--- a/Хасаншина Алсу.pptx
+++ b/Хасаншина Алсу.pptx
@@ -5,7 +5,7 @@
     <p:sldMasterId id="2147483648" r:id="rId4"/>
   </p:sldMasterIdLst>
   <p:notesMasterIdLst>
-    <p:notesMasterId r:id="rId20"/>
+    <p:notesMasterId r:id="rId22"/>
   </p:notesMasterIdLst>
   <p:sldIdLst>
     <p:sldId id="271" r:id="rId5"/>
@@ -15,14 +15,16 @@
     <p:sldId id="286" r:id="rId9"/>
     <p:sldId id="287" r:id="rId10"/>
     <p:sldId id="289" r:id="rId11"/>
-    <p:sldId id="272" r:id="rId12"/>
-    <p:sldId id="275" r:id="rId13"/>
-    <p:sldId id="273" r:id="rId14"/>
-    <p:sldId id="292" r:id="rId15"/>
-    <p:sldId id="291" r:id="rId16"/>
-    <p:sldId id="276" r:id="rId17"/>
-    <p:sldId id="290" r:id="rId18"/>
-    <p:sldId id="285" r:id="rId19"/>
+    <p:sldId id="294" r:id="rId12"/>
+    <p:sldId id="295" r:id="rId13"/>
+    <p:sldId id="272" r:id="rId14"/>
+    <p:sldId id="275" r:id="rId15"/>
+    <p:sldId id="273" r:id="rId16"/>
+    <p:sldId id="292" r:id="rId17"/>
+    <p:sldId id="291" r:id="rId18"/>
+    <p:sldId id="276" r:id="rId19"/>
+    <p:sldId id="290" r:id="rId20"/>
+    <p:sldId id="285" r:id="rId21"/>
   </p:sldIdLst>
   <p:sldSz cx="12192000" cy="6858000"/>
   <p:notesSz cx="6858000" cy="9144000"/>
@@ -1289,7 +1291,7 @@
           <a:p>
             <a:fld id="{73261BF4-8B2C-784B-9959-B59A059012C3}" type="datetimeFigureOut">
               <a:rPr lang="en-RU" smtClean="0"/>
-              <a:t>05/04/2026</a:t>
+              <a:t>05/06/2026</a:t>
             </a:fld>
             <a:endParaRPr lang="en-RU"/>
           </a:p>
@@ -1644,6 +1646,90 @@
 </p:notes>
 </file>
 
+<file path=ppt/notesSlides/notesSlide10.xml><?xml version="1.0" encoding="utf-8"?>
+<p:notes xmlns:a="http://schemas.openxmlformats.org/drawingml/2006/main" xmlns:r="http://schemas.openxmlformats.org/officeDocument/2006/relationships" xmlns:p="http://schemas.openxmlformats.org/presentationml/2006/main">
+  <p:cSld>
+    <p:spTree>
+      <p:nvGrpSpPr>
+        <p:cNvPr id="1" name=""/>
+        <p:cNvGrpSpPr/>
+        <p:nvPr/>
+      </p:nvGrpSpPr>
+      <p:grpSpPr>
+        <a:xfrm>
+          <a:off x="0" y="0"/>
+          <a:ext cx="0" cy="0"/>
+          <a:chOff x="0" y="0"/>
+          <a:chExt cx="0" cy="0"/>
+        </a:xfrm>
+      </p:grpSpPr>
+      <p:sp>
+        <p:nvSpPr>
+          <p:cNvPr id="2" name="Образ слайда 1"/>
+          <p:cNvSpPr>
+            <a:spLocks noGrp="1" noRot="1" noChangeAspect="1"/>
+          </p:cNvSpPr>
+          <p:nvPr>
+            <p:ph type="sldImg"/>
+          </p:nvPr>
+        </p:nvSpPr>
+        <p:spPr/>
+      </p:sp>
+      <p:sp>
+        <p:nvSpPr>
+          <p:cNvPr id="3" name="Заметки 2"/>
+          <p:cNvSpPr>
+            <a:spLocks noGrp="1"/>
+          </p:cNvSpPr>
+          <p:nvPr>
+            <p:ph type="body" idx="1"/>
+          </p:nvPr>
+        </p:nvSpPr>
+        <p:spPr/>
+        <p:txBody>
+          <a:bodyPr/>
+          <a:lstStyle/>
+          <a:p>
+            <a:endParaRPr lang="ru-RU" dirty="0"/>
+          </a:p>
+        </p:txBody>
+      </p:sp>
+      <p:sp>
+        <p:nvSpPr>
+          <p:cNvPr id="4" name="Номер слайда 3"/>
+          <p:cNvSpPr>
+            <a:spLocks noGrp="1"/>
+          </p:cNvSpPr>
+          <p:nvPr>
+            <p:ph type="sldNum" sz="quarter" idx="5"/>
+          </p:nvPr>
+        </p:nvSpPr>
+        <p:spPr/>
+        <p:txBody>
+          <a:bodyPr/>
+          <a:lstStyle/>
+          <a:p>
+            <a:fld id="{6C748903-8EB5-294E-A216-6B54B0368783}" type="slidenum">
+              <a:rPr lang="en-RU" smtClean="0"/>
+              <a:t>14</a:t>
+            </a:fld>
+            <a:endParaRPr lang="en-RU"/>
+          </a:p>
+        </p:txBody>
+      </p:sp>
+    </p:spTree>
+    <p:extLst>
+      <p:ext uri="{BB962C8B-B14F-4D97-AF65-F5344CB8AC3E}">
+        <p14:creationId xmlns:p14="http://schemas.microsoft.com/office/powerpoint/2010/main" val="2235376208"/>
+      </p:ext>
+    </p:extLst>
+  </p:cSld>
+  <p:clrMapOvr>
+    <a:masterClrMapping/>
+  </p:clrMapOvr>
+</p:notes>
+</file>
+
 <file path=ppt/notesSlides/notesSlide2.xml><?xml version="1.0" encoding="utf-8"?>
 <p:notes xmlns:a="http://schemas.openxmlformats.org/drawingml/2006/main" xmlns:r="http://schemas.openxmlformats.org/officeDocument/2006/relationships" xmlns:p="http://schemas.openxmlformats.org/presentationml/2006/main">
   <p:cSld>
@@ -2068,17 +2154,6 @@
           <a:bodyPr/>
           <a:lstStyle/>
           <a:p>
-            <a:pPr algn="l"/>
-            <a:r>
-              <a:rPr lang="ru-RU" b="0" i="0" dirty="0" err="1">
-                <a:solidFill>
-                  <a:srgbClr val="000000"/>
-                </a:solidFill>
-                <a:effectLst/>
-                <a:latin typeface="-apple-system"/>
-              </a:rPr>
-              <a:t>Спирмен</a:t>
-            </a:r>
             <a:r>
               <a:rPr lang="ru-RU" b="0" i="0" dirty="0">
                 <a:solidFill>
@@ -2087,9 +2162,12 @@
                 <a:effectLst/>
                 <a:latin typeface="-apple-system"/>
               </a:rPr>
-              <a:t> проверяет:</a:t>
+              <a:t>ANOVA — это тест:</a:t>
             </a:r>
             <a:br>
+              <a:rPr lang="ru-RU" dirty="0"/>
+            </a:br>
+            <a:r>
               <a:rPr lang="ru-RU" b="0" i="0" dirty="0">
                 <a:solidFill>
                   <a:srgbClr val="000000"/>
@@ -2097,6 +2175,10 @@
                 <a:effectLst/>
                 <a:latin typeface="-apple-system"/>
               </a:rPr>
+              <a:t>объясняет ли фактор “страна” часть вариации переменной.</a:t>
+            </a:r>
+            <a:br>
+              <a:rPr lang="ru-RU" dirty="0"/>
             </a:br>
             <a:r>
               <a:rPr lang="ru-RU" b="0" i="0" dirty="0">
@@ -2106,9 +2188,15 @@
                 <a:effectLst/>
                 <a:latin typeface="-apple-system"/>
               </a:rPr>
-              <a:t>есть ли монотонная связь между двумя переменными</a:t>
+              <a:t>F статистика рассчитывается как отношение межгрупповой дисперсии к внутригрупповой </a:t>
             </a:r>
             <a:br>
+              <a:rPr lang="ru-RU" dirty="0"/>
+            </a:br>
+            <a:endParaRPr lang="ru-RU" dirty="0"/>
+          </a:p>
+          <a:p>
+            <a:r>
               <a:rPr lang="ru-RU" b="0" i="0" dirty="0">
                 <a:solidFill>
                   <a:srgbClr val="000000"/>
@@ -2116,8 +2204,15 @@
                 <a:effectLst/>
                 <a:latin typeface="-apple-system"/>
               </a:rPr>
+              <a:t>Результаты непараметрических тестов Манна–Уитни показали, что уровень счастья в Швеции статистически значимо выше, чем в России и Великобритании (p &lt; 0.001). Это подтверждает гипотезу о более высоком уровне счастья в Швеции.</a:t>
+            </a:r>
+            <a:br>
+              <a:rPr lang="ru-RU" dirty="0"/>
             </a:br>
             <a:br>
+              <a:rPr lang="ru-RU" dirty="0"/>
+            </a:br>
+            <a:r>
               <a:rPr lang="ru-RU" b="0" i="0" dirty="0">
                 <a:solidFill>
                   <a:srgbClr val="000000"/>
@@ -2125,108 +2220,8 @@
                 <a:effectLst/>
                 <a:latin typeface="-apple-system"/>
               </a:rPr>
-            </a:br>
-            <a:r>
-              <a:rPr lang="ru-RU" b="0" i="0" dirty="0">
-                <a:solidFill>
-                  <a:srgbClr val="000000"/>
-                </a:solidFill>
-                <a:effectLst/>
-                <a:latin typeface="-apple-system"/>
-              </a:rPr>
-              <a:t>Корреляционный анализ </a:t>
-            </a:r>
-            <a:r>
-              <a:rPr lang="ru-RU" b="0" i="0" dirty="0" err="1">
-                <a:solidFill>
-                  <a:srgbClr val="000000"/>
-                </a:solidFill>
-                <a:effectLst/>
-                <a:latin typeface="-apple-system"/>
-              </a:rPr>
-              <a:t>Спирмена</a:t>
-            </a:r>
-            <a:r>
-              <a:rPr lang="ru-RU" b="0" i="0" dirty="0">
-                <a:solidFill>
-                  <a:srgbClr val="000000"/>
-                </a:solidFill>
-                <a:effectLst/>
-                <a:latin typeface="-apple-system"/>
-              </a:rPr>
-              <a:t> используется для выявления направлений и силы монотонных связей между переменными. Результаты носят описательный характер и служат основой для последующего моделирования.</a:t>
-            </a:r>
-            <a:br>
-              <a:rPr lang="ru-RU" b="0" i="0" dirty="0">
-                <a:solidFill>
-                  <a:srgbClr val="000000"/>
-                </a:solidFill>
-                <a:effectLst/>
-                <a:latin typeface="-apple-system"/>
-              </a:rPr>
-            </a:br>
-            <a:r>
-              <a:rPr lang="ru-RU" b="0" i="0" dirty="0">
-                <a:solidFill>
-                  <a:srgbClr val="000000"/>
-                </a:solidFill>
-                <a:effectLst/>
-                <a:latin typeface="-apple-system"/>
-              </a:rPr>
-              <a:t>дополнительно оценивается </a:t>
-            </a:r>
-            <a:r>
-              <a:rPr lang="ru-RU" b="0" i="0" dirty="0" err="1">
-                <a:solidFill>
-                  <a:srgbClr val="000000"/>
-                </a:solidFill>
-                <a:effectLst/>
-                <a:latin typeface="-apple-system"/>
-              </a:rPr>
-              <a:t>стат</a:t>
-            </a:r>
-            <a:r>
-              <a:rPr lang="ru-RU" b="0" i="0" dirty="0">
-                <a:solidFill>
-                  <a:srgbClr val="000000"/>
-                </a:solidFill>
-                <a:effectLst/>
-                <a:latin typeface="-apple-system"/>
-              </a:rPr>
-              <a:t> значимость коэффициентов</a:t>
-            </a:r>
-          </a:p>
-          <a:p>
-            <a:pPr algn="l"/>
-            <a:r>
-              <a:rPr lang="ru-RU" b="0" i="0" dirty="0">
-                <a:solidFill>
-                  <a:srgbClr val="000000"/>
-                </a:solidFill>
-                <a:effectLst/>
-                <a:latin typeface="-apple-system"/>
-              </a:rPr>
-              <a:t>с использованием функции </a:t>
-            </a:r>
-            <a:r>
-              <a:rPr lang="ru-RU" b="0" i="0" dirty="0" err="1">
-                <a:solidFill>
-                  <a:srgbClr val="000000"/>
-                </a:solidFill>
-                <a:effectLst/>
-                <a:latin typeface="-apple-system"/>
-              </a:rPr>
-              <a:t>spearmanr</a:t>
-            </a:r>
-            <a:endParaRPr lang="ru-RU" b="0" i="0" dirty="0">
-              <a:solidFill>
-                <a:srgbClr val="000000"/>
-              </a:solidFill>
-              <a:effectLst/>
-              <a:latin typeface="-apple-system"/>
-            </a:endParaRPr>
-          </a:p>
-          <a:p>
+              <a:t>Для проверки гипотезы использован непараметрический тест Манна–Уитни, поскольку зависимая переменная имеет порядковую природу и не предполагается нормальность распределения (так как опросный данные) Тест позволяет корректно сравнивать распределения между двумя независимыми группами. (Швеция &gt; РФ и лучше Британии)</a:t>
+            </a:r>
             <a:endParaRPr lang="ru-RU" dirty="0"/>
           </a:p>
         </p:txBody>
@@ -2257,7 +2252,7 @@
     </p:spTree>
     <p:extLst>
       <p:ext uri="{BB962C8B-B14F-4D97-AF65-F5344CB8AC3E}">
-        <p14:creationId xmlns:p14="http://schemas.microsoft.com/office/powerpoint/2010/main" val="1456949768"/>
+        <p14:creationId xmlns:p14="http://schemas.microsoft.com/office/powerpoint/2010/main" val="3739074842"/>
       </p:ext>
     </p:extLst>
   </p:cSld>
@@ -2311,6 +2306,74 @@
           <a:bodyPr/>
           <a:lstStyle/>
           <a:p>
+            <a:r>
+              <a:rPr lang="ru-RU" b="0" i="0" dirty="0">
+                <a:solidFill>
+                  <a:srgbClr val="000000"/>
+                </a:solidFill>
+                <a:effectLst/>
+                <a:latin typeface="-apple-system"/>
+              </a:rPr>
+              <a:t>ANOVA — это тест:</a:t>
+            </a:r>
+            <a:br>
+              <a:rPr lang="ru-RU" dirty="0"/>
+            </a:br>
+            <a:r>
+              <a:rPr lang="ru-RU" b="0" i="0" dirty="0">
+                <a:solidFill>
+                  <a:srgbClr val="000000"/>
+                </a:solidFill>
+                <a:effectLst/>
+                <a:latin typeface="-apple-system"/>
+              </a:rPr>
+              <a:t>объясняет ли фактор “страна” часть вариации переменной.</a:t>
+            </a:r>
+            <a:br>
+              <a:rPr lang="ru-RU" dirty="0"/>
+            </a:br>
+            <a:r>
+              <a:rPr lang="ru-RU" b="0" i="0" dirty="0">
+                <a:solidFill>
+                  <a:srgbClr val="000000"/>
+                </a:solidFill>
+                <a:effectLst/>
+                <a:latin typeface="-apple-system"/>
+              </a:rPr>
+              <a:t>F статистика рассчитывается как отношение межгрупповой дисперсии к внутригрупповой </a:t>
+            </a:r>
+            <a:br>
+              <a:rPr lang="ru-RU" dirty="0"/>
+            </a:br>
+            <a:endParaRPr lang="ru-RU" dirty="0"/>
+          </a:p>
+          <a:p>
+            <a:r>
+              <a:rPr lang="ru-RU" b="0" i="0" dirty="0">
+                <a:solidFill>
+                  <a:srgbClr val="000000"/>
+                </a:solidFill>
+                <a:effectLst/>
+                <a:latin typeface="-apple-system"/>
+              </a:rPr>
+              <a:t>Результаты непараметрических тестов Манна–Уитни показали, что уровень счастья в Швеции статистически значимо выше, чем в России и Великобритании (p &lt; 0.001). Это подтверждает гипотезу о более высоком уровне счастья в Швеции.</a:t>
+            </a:r>
+            <a:br>
+              <a:rPr lang="ru-RU" dirty="0"/>
+            </a:br>
+            <a:br>
+              <a:rPr lang="ru-RU" dirty="0"/>
+            </a:br>
+            <a:r>
+              <a:rPr lang="ru-RU" b="0" i="0" dirty="0">
+                <a:solidFill>
+                  <a:srgbClr val="000000"/>
+                </a:solidFill>
+                <a:effectLst/>
+                <a:latin typeface="-apple-system"/>
+              </a:rPr>
+              <a:t>Для проверки гипотезы использован непараметрический тест Манна–Уитни, поскольку зависимая переменная имеет порядковую природу и не предполагается нормальность распределения (так как опросный данные) Тест позволяет корректно сравнивать распределения между двумя независимыми группами. (Швеция &gt; РФ и лучше Британии)</a:t>
+            </a:r>
             <a:endParaRPr lang="ru-RU" dirty="0"/>
           </a:p>
         </p:txBody>
@@ -2341,7 +2404,7 @@
     </p:spTree>
     <p:extLst>
       <p:ext uri="{BB962C8B-B14F-4D97-AF65-F5344CB8AC3E}">
-        <p14:creationId xmlns:p14="http://schemas.microsoft.com/office/powerpoint/2010/main" val="1751720898"/>
+        <p14:creationId xmlns:p14="http://schemas.microsoft.com/office/powerpoint/2010/main" val="2774860550"/>
       </p:ext>
     </p:extLst>
   </p:cSld>
@@ -2395,64 +2458,166 @@
           <a:bodyPr/>
           <a:lstStyle/>
           <a:p>
-            <a:r>
-              <a:rPr lang="ru-RU" dirty="0"/>
-              <a:t>В Швеция:</a:t>
+            <a:pPr algn="l"/>
+            <a:r>
+              <a:rPr lang="ru-RU" b="0" i="0" dirty="0" err="1">
+                <a:solidFill>
+                  <a:srgbClr val="000000"/>
+                </a:solidFill>
+                <a:effectLst/>
+                <a:latin typeface="-apple-system"/>
+              </a:rPr>
+              <a:t>Спирмен</a:t>
+            </a:r>
+            <a:r>
+              <a:rPr lang="ru-RU" b="0" i="0" dirty="0">
+                <a:solidFill>
+                  <a:srgbClr val="000000"/>
+                </a:solidFill>
+                <a:effectLst/>
+                <a:latin typeface="-apple-system"/>
+              </a:rPr>
+              <a:t> проверяет:</a:t>
+            </a:r>
+            <a:br>
+              <a:rPr lang="ru-RU" b="0" i="0" dirty="0">
+                <a:solidFill>
+                  <a:srgbClr val="000000"/>
+                </a:solidFill>
+                <a:effectLst/>
+                <a:latin typeface="-apple-system"/>
+              </a:rPr>
+            </a:br>
+            <a:r>
+              <a:rPr lang="ru-RU" b="0" i="0" dirty="0">
+                <a:solidFill>
+                  <a:srgbClr val="000000"/>
+                </a:solidFill>
+                <a:effectLst/>
+                <a:latin typeface="-apple-system"/>
+              </a:rPr>
+              <a:t>есть ли монотонная связь между двумя переменными</a:t>
+            </a:r>
+            <a:br>
+              <a:rPr lang="ru-RU" b="0" i="0" dirty="0">
+                <a:solidFill>
+                  <a:srgbClr val="000000"/>
+                </a:solidFill>
+                <a:effectLst/>
+                <a:latin typeface="-apple-system"/>
+              </a:rPr>
+            </a:br>
+            <a:br>
+              <a:rPr lang="ru-RU" b="0" i="0" dirty="0">
+                <a:solidFill>
+                  <a:srgbClr val="000000"/>
+                </a:solidFill>
+                <a:effectLst/>
+                <a:latin typeface="-apple-system"/>
+              </a:rPr>
+            </a:br>
+            <a:r>
+              <a:rPr lang="ru-RU" b="0" i="0" dirty="0">
+                <a:solidFill>
+                  <a:srgbClr val="000000"/>
+                </a:solidFill>
+                <a:effectLst/>
+                <a:latin typeface="-apple-system"/>
+              </a:rPr>
+              <a:t>Корреляционный анализ </a:t>
+            </a:r>
+            <a:r>
+              <a:rPr lang="ru-RU" b="0" i="0" dirty="0" err="1">
+                <a:solidFill>
+                  <a:srgbClr val="000000"/>
+                </a:solidFill>
+                <a:effectLst/>
+                <a:latin typeface="-apple-system"/>
+              </a:rPr>
+              <a:t>Спирмена</a:t>
+            </a:r>
+            <a:r>
+              <a:rPr lang="ru-RU" b="0" i="0" dirty="0">
+                <a:solidFill>
+                  <a:srgbClr val="000000"/>
+                </a:solidFill>
+                <a:effectLst/>
+                <a:latin typeface="-apple-system"/>
+              </a:rPr>
+              <a:t> используется для выявления направлений и силы монотонных связей между переменными. Результаты носят описательный характер и служат основой для последующего моделирования.</a:t>
+            </a:r>
+            <a:br>
+              <a:rPr lang="ru-RU" b="0" i="0" dirty="0">
+                <a:solidFill>
+                  <a:srgbClr val="000000"/>
+                </a:solidFill>
+                <a:effectLst/>
+                <a:latin typeface="-apple-system"/>
+              </a:rPr>
+            </a:br>
+            <a:r>
+              <a:rPr lang="ru-RU" b="0" i="0" dirty="0">
+                <a:solidFill>
+                  <a:srgbClr val="000000"/>
+                </a:solidFill>
+                <a:effectLst/>
+                <a:latin typeface="-apple-system"/>
+              </a:rPr>
+              <a:t>дополнительно оценивается </a:t>
+            </a:r>
+            <a:r>
+              <a:rPr lang="ru-RU" b="0" i="0" dirty="0" err="1">
+                <a:solidFill>
+                  <a:srgbClr val="000000"/>
+                </a:solidFill>
+                <a:effectLst/>
+                <a:latin typeface="-apple-system"/>
+              </a:rPr>
+              <a:t>стат</a:t>
+            </a:r>
+            <a:r>
+              <a:rPr lang="ru-RU" b="0" i="0" dirty="0">
+                <a:solidFill>
+                  <a:srgbClr val="000000"/>
+                </a:solidFill>
+                <a:effectLst/>
+                <a:latin typeface="-apple-system"/>
+              </a:rPr>
+              <a:t> значимость коэффициентов</a:t>
             </a:r>
           </a:p>
           <a:p>
-            <a:r>
-              <a:rPr lang="ru-RU" dirty="0"/>
-              <a:t>коэффициенты почти монотонно растут</a:t>
-            </a:r>
+            <a:pPr algn="l"/>
+            <a:r>
+              <a:rPr lang="ru-RU" b="0" i="0" dirty="0">
+                <a:solidFill>
+                  <a:srgbClr val="000000"/>
+                </a:solidFill>
+                <a:effectLst/>
+                <a:latin typeface="-apple-system"/>
+              </a:rPr>
+              <a:t>с использованием функции </a:t>
+            </a:r>
+            <a:r>
+              <a:rPr lang="ru-RU" b="0" i="0" dirty="0" err="1">
+                <a:solidFill>
+                  <a:srgbClr val="000000"/>
+                </a:solidFill>
+                <a:effectLst/>
+                <a:latin typeface="-apple-system"/>
+              </a:rPr>
+              <a:t>spearmanr</a:t>
+            </a:r>
+            <a:endParaRPr lang="ru-RU" b="0" i="0" dirty="0">
+              <a:solidFill>
+                <a:srgbClr val="000000"/>
+              </a:solidFill>
+              <a:effectLst/>
+              <a:latin typeface="-apple-system"/>
+            </a:endParaRPr>
           </a:p>
           <a:p>
-            <a:r>
-              <a:rPr lang="ru-RU" dirty="0"/>
-              <a:t>значимость появляется уже с середины шкалы</a:t>
-            </a:r>
-          </a:p>
-          <a:p>
-            <a:r>
-              <a:rPr lang="ru-RU" dirty="0"/>
-              <a:t>эффект самый большой</a:t>
-            </a:r>
-          </a:p>
-          <a:p>
-            <a:r>
-              <a:rPr lang="ru-RU" dirty="0"/>
-              <a:t>В Россия:</a:t>
-            </a:r>
-          </a:p>
-          <a:p>
-            <a:r>
-              <a:rPr lang="ru-RU" dirty="0"/>
-              <a:t>до 5 уровня — почти нет эффекта</a:t>
-            </a:r>
-          </a:p>
-          <a:p>
-            <a:r>
-              <a:rPr lang="ru-RU" dirty="0"/>
-              <a:t>потом резкий рост (порог)</a:t>
-            </a:r>
-          </a:p>
-          <a:p>
-            <a:r>
-              <a:rPr lang="ru-RU" dirty="0"/>
-              <a:t>В Великобритания:</a:t>
-            </a:r>
-          </a:p>
-          <a:p>
-            <a:r>
-              <a:rPr lang="ru-RU" dirty="0"/>
-              <a:t>слабая и нестабильная связь</a:t>
-            </a:r>
-          </a:p>
-          <a:p>
-            <a:r>
-              <a:rPr lang="ru-RU" dirty="0"/>
-              <a:t>даже отрицательный эффект на низких уровнях</a:t>
-            </a:r>
+            <a:endParaRPr lang="ru-RU" dirty="0"/>
           </a:p>
         </p:txBody>
       </p:sp>
@@ -2473,7 +2638,7 @@
           <a:p>
             <a:fld id="{6C748903-8EB5-294E-A216-6B54B0368783}" type="slidenum">
               <a:rPr lang="en-RU" smtClean="0"/>
-              <a:t>11</a:t>
+              <a:t>10</a:t>
             </a:fld>
             <a:endParaRPr lang="en-RU"/>
           </a:p>
@@ -2482,7 +2647,7 @@
     </p:spTree>
     <p:extLst>
       <p:ext uri="{BB962C8B-B14F-4D97-AF65-F5344CB8AC3E}">
-        <p14:creationId xmlns:p14="http://schemas.microsoft.com/office/powerpoint/2010/main" val="2483655968"/>
+        <p14:creationId xmlns:p14="http://schemas.microsoft.com/office/powerpoint/2010/main" val="1456949768"/>
       </p:ext>
     </p:extLst>
   </p:cSld>
@@ -2557,7 +2722,7 @@
           <a:p>
             <a:fld id="{6C748903-8EB5-294E-A216-6B54B0368783}" type="slidenum">
               <a:rPr lang="en-RU" smtClean="0"/>
-              <a:t>12</a:t>
+              <a:t>11</a:t>
             </a:fld>
             <a:endParaRPr lang="en-RU"/>
           </a:p>
@@ -2566,7 +2731,148 @@
     </p:spTree>
     <p:extLst>
       <p:ext uri="{BB962C8B-B14F-4D97-AF65-F5344CB8AC3E}">
-        <p14:creationId xmlns:p14="http://schemas.microsoft.com/office/powerpoint/2010/main" val="2235376208"/>
+        <p14:creationId xmlns:p14="http://schemas.microsoft.com/office/powerpoint/2010/main" val="1751720898"/>
+      </p:ext>
+    </p:extLst>
+  </p:cSld>
+  <p:clrMapOvr>
+    <a:masterClrMapping/>
+  </p:clrMapOvr>
+</p:notes>
+</file>
+
+<file path=ppt/notesSlides/notesSlide9.xml><?xml version="1.0" encoding="utf-8"?>
+<p:notes xmlns:a="http://schemas.openxmlformats.org/drawingml/2006/main" xmlns:r="http://schemas.openxmlformats.org/officeDocument/2006/relationships" xmlns:p="http://schemas.openxmlformats.org/presentationml/2006/main">
+  <p:cSld>
+    <p:spTree>
+      <p:nvGrpSpPr>
+        <p:cNvPr id="1" name=""/>
+        <p:cNvGrpSpPr/>
+        <p:nvPr/>
+      </p:nvGrpSpPr>
+      <p:grpSpPr>
+        <a:xfrm>
+          <a:off x="0" y="0"/>
+          <a:ext cx="0" cy="0"/>
+          <a:chOff x="0" y="0"/>
+          <a:chExt cx="0" cy="0"/>
+        </a:xfrm>
+      </p:grpSpPr>
+      <p:sp>
+        <p:nvSpPr>
+          <p:cNvPr id="2" name="Образ слайда 1"/>
+          <p:cNvSpPr>
+            <a:spLocks noGrp="1" noRot="1" noChangeAspect="1"/>
+          </p:cNvSpPr>
+          <p:nvPr>
+            <p:ph type="sldImg"/>
+          </p:nvPr>
+        </p:nvSpPr>
+        <p:spPr/>
+      </p:sp>
+      <p:sp>
+        <p:nvSpPr>
+          <p:cNvPr id="3" name="Заметки 2"/>
+          <p:cNvSpPr>
+            <a:spLocks noGrp="1"/>
+          </p:cNvSpPr>
+          <p:nvPr>
+            <p:ph type="body" idx="1"/>
+          </p:nvPr>
+        </p:nvSpPr>
+        <p:spPr/>
+        <p:txBody>
+          <a:bodyPr/>
+          <a:lstStyle/>
+          <a:p>
+            <a:r>
+              <a:rPr lang="ru-RU" dirty="0"/>
+              <a:t>В Швеция:</a:t>
+            </a:r>
+          </a:p>
+          <a:p>
+            <a:r>
+              <a:rPr lang="ru-RU" dirty="0"/>
+              <a:t>коэффициенты почти монотонно растут</a:t>
+            </a:r>
+          </a:p>
+          <a:p>
+            <a:r>
+              <a:rPr lang="ru-RU" dirty="0"/>
+              <a:t>значимость появляется уже с середины шкалы</a:t>
+            </a:r>
+          </a:p>
+          <a:p>
+            <a:r>
+              <a:rPr lang="ru-RU" dirty="0"/>
+              <a:t>эффект самый большой</a:t>
+            </a:r>
+          </a:p>
+          <a:p>
+            <a:r>
+              <a:rPr lang="ru-RU" dirty="0"/>
+              <a:t>В Россия:</a:t>
+            </a:r>
+          </a:p>
+          <a:p>
+            <a:r>
+              <a:rPr lang="ru-RU" dirty="0"/>
+              <a:t>до 5 уровня — почти нет эффекта</a:t>
+            </a:r>
+          </a:p>
+          <a:p>
+            <a:r>
+              <a:rPr lang="ru-RU" dirty="0"/>
+              <a:t>потом резкий рост (порог)</a:t>
+            </a:r>
+          </a:p>
+          <a:p>
+            <a:r>
+              <a:rPr lang="ru-RU" dirty="0"/>
+              <a:t>В Великобритания:</a:t>
+            </a:r>
+          </a:p>
+          <a:p>
+            <a:r>
+              <a:rPr lang="ru-RU" dirty="0"/>
+              <a:t>слабая и нестабильная связь</a:t>
+            </a:r>
+          </a:p>
+          <a:p>
+            <a:r>
+              <a:rPr lang="ru-RU" dirty="0"/>
+              <a:t>даже отрицательный эффект на низких уровнях</a:t>
+            </a:r>
+          </a:p>
+        </p:txBody>
+      </p:sp>
+      <p:sp>
+        <p:nvSpPr>
+          <p:cNvPr id="4" name="Номер слайда 3"/>
+          <p:cNvSpPr>
+            <a:spLocks noGrp="1"/>
+          </p:cNvSpPr>
+          <p:nvPr>
+            <p:ph type="sldNum" sz="quarter" idx="5"/>
+          </p:nvPr>
+        </p:nvSpPr>
+        <p:spPr/>
+        <p:txBody>
+          <a:bodyPr/>
+          <a:lstStyle/>
+          <a:p>
+            <a:fld id="{6C748903-8EB5-294E-A216-6B54B0368783}" type="slidenum">
+              <a:rPr lang="en-RU" smtClean="0"/>
+              <a:t>13</a:t>
+            </a:fld>
+            <a:endParaRPr lang="en-RU"/>
+          </a:p>
+        </p:txBody>
+      </p:sp>
+    </p:spTree>
+    <p:extLst>
+      <p:ext uri="{BB962C8B-B14F-4D97-AF65-F5344CB8AC3E}">
+        <p14:creationId xmlns:p14="http://schemas.microsoft.com/office/powerpoint/2010/main" val="2483655968"/>
       </p:ext>
     </p:extLst>
   </p:cSld>
@@ -15712,7 +16018,7 @@
           <a:p>
             <a:fld id="{53063DFB-8595-A44B-9F09-A50FA310E559}" type="datetimeFigureOut">
               <a:rPr lang="en-RU" smtClean="0"/>
-              <a:t>05/04/2026</a:t>
+              <a:t>05/06/2026</a:t>
             </a:fld>
             <a:endParaRPr lang="en-RU"/>
           </a:p>
@@ -16356,6 +16662,3879 @@
       </p:grpSpPr>
       <p:sp>
         <p:nvSpPr>
+          <p:cNvPr id="3" name="Заголовок 2">
+            <a:extLst>
+              <a:ext uri="{FF2B5EF4-FFF2-40B4-BE49-F238E27FC236}">
+                <a16:creationId xmlns:a16="http://schemas.microsoft.com/office/drawing/2014/main" id="{E2EAF03B-EC26-1D47-94AC-C75942861D6C}"/>
+              </a:ext>
+            </a:extLst>
+          </p:cNvPr>
+          <p:cNvSpPr>
+            <a:spLocks noGrp="1"/>
+          </p:cNvSpPr>
+          <p:nvPr>
+            <p:ph type="title"/>
+          </p:nvPr>
+        </p:nvSpPr>
+        <p:spPr/>
+        <p:txBody>
+          <a:bodyPr/>
+          <a:lstStyle/>
+          <a:p>
+            <a:r>
+              <a:rPr lang="ru-RU" dirty="0"/>
+              <a:t>Корреляция признаков</a:t>
+            </a:r>
+          </a:p>
+        </p:txBody>
+      </p:sp>
+      <p:sp>
+        <p:nvSpPr>
+          <p:cNvPr id="4" name="Текст 3">
+            <a:extLst>
+              <a:ext uri="{FF2B5EF4-FFF2-40B4-BE49-F238E27FC236}">
+                <a16:creationId xmlns:a16="http://schemas.microsoft.com/office/drawing/2014/main" id="{53356540-7218-FF4B-B6BC-5BD291A372E2}"/>
+              </a:ext>
+            </a:extLst>
+          </p:cNvPr>
+          <p:cNvSpPr>
+            <a:spLocks noGrp="1"/>
+          </p:cNvSpPr>
+          <p:nvPr>
+            <p:ph type="body" sz="quarter" idx="12"/>
+          </p:nvPr>
+        </p:nvSpPr>
+        <p:spPr>
+          <a:xfrm>
+            <a:off x="585896" y="2029015"/>
+            <a:ext cx="11317755" cy="1399985"/>
+          </a:xfrm>
+        </p:spPr>
+        <p:txBody>
+          <a:bodyPr/>
+          <a:lstStyle/>
+          <a:p>
+            <a:pPr marL="285750" lvl="0" indent="-285750">
+              <a:buFont typeface="Arial" panose="020B0604020202020204" pitchFamily="34" charset="0"/>
+              <a:buChar char="•"/>
+            </a:pPr>
+            <a:r>
+              <a:rPr lang="ru-RU" sz="1400" dirty="0">
+                <a:solidFill>
+                  <a:schemeClr val="tx1"/>
+                </a:solidFill>
+              </a:rPr>
+              <a:t>В Швеции наблюдается положительная монотонная связь между уровнем счастья и уровнем финансовой удовлетворенности и доверия к полиции и людям</a:t>
+            </a:r>
+          </a:p>
+          <a:p>
+            <a:pPr marL="285750" indent="-285750">
+              <a:buFont typeface="Arial" panose="020B0604020202020204" pitchFamily="34" charset="0"/>
+              <a:buChar char="•"/>
+            </a:pPr>
+            <a:r>
+              <a:rPr lang="ru-RU" sz="1400" dirty="0">
+                <a:solidFill>
+                  <a:schemeClr val="tx1"/>
+                </a:solidFill>
+              </a:rPr>
+              <a:t>В Великобритании наиболее значимые корреляции с целевой переменной у признаков, отвечающих за здоровье, финансовое благополучие и доверие полиции</a:t>
+            </a:r>
+          </a:p>
+          <a:p>
+            <a:pPr marL="285750" indent="-285750">
+              <a:buFont typeface="Arial" panose="020B0604020202020204" pitchFamily="34" charset="0"/>
+              <a:buChar char="•"/>
+            </a:pPr>
+            <a:r>
+              <a:rPr lang="ru-RU" sz="1400" dirty="0">
+                <a:solidFill>
+                  <a:schemeClr val="tx1"/>
+                </a:solidFill>
+              </a:rPr>
+              <a:t>В РФ наиболее значимые корреляции с целевой переменной у признаков, отвечающих  за здоровье, финансовую удовлетворенность, возраст</a:t>
+            </a:r>
+          </a:p>
+          <a:p>
+            <a:pPr marL="342900" lvl="0" indent="-342900">
+              <a:lnSpc>
+                <a:spcPct val="150000"/>
+              </a:lnSpc>
+              <a:spcBef>
+                <a:spcPts val="1200"/>
+              </a:spcBef>
+              <a:buFont typeface="Symbol" panose="05050102010706020507" pitchFamily="18" charset="2"/>
+              <a:buChar char=""/>
+            </a:pPr>
+            <a:endParaRPr lang="ru-RU" sz="1400" dirty="0">
+              <a:effectLst/>
+              <a:latin typeface="Times New Roman" panose="02020603050405020304" pitchFamily="18" charset="0"/>
+              <a:ea typeface="Times New Roman" panose="02020603050405020304" pitchFamily="18" charset="0"/>
+              <a:cs typeface="Times New Roman" panose="02020603050405020304" pitchFamily="18" charset="0"/>
+            </a:endParaRPr>
+          </a:p>
+        </p:txBody>
+      </p:sp>
+      <p:sp>
+        <p:nvSpPr>
+          <p:cNvPr id="5" name="Текст 4">
+            <a:extLst>
+              <a:ext uri="{FF2B5EF4-FFF2-40B4-BE49-F238E27FC236}">
+                <a16:creationId xmlns:a16="http://schemas.microsoft.com/office/drawing/2014/main" id="{3EB29DC1-D5D4-FB41-9E2D-AA4750D0CC8B}"/>
+              </a:ext>
+            </a:extLst>
+          </p:cNvPr>
+          <p:cNvSpPr>
+            <a:spLocks noGrp="1"/>
+          </p:cNvSpPr>
+          <p:nvPr>
+            <p:ph type="body" sz="quarter" idx="13"/>
+          </p:nvPr>
+        </p:nvSpPr>
+        <p:spPr/>
+        <p:txBody>
+          <a:bodyPr/>
+          <a:lstStyle/>
+          <a:p>
+            <a:pPr>
+              <a:lnSpc>
+                <a:spcPct val="120000"/>
+              </a:lnSpc>
+              <a:spcAft>
+                <a:spcPts val="0"/>
+              </a:spcAft>
+            </a:pPr>
+            <a:r>
+              <a:rPr lang="ru-RU" sz="1000" dirty="0">
+                <a:solidFill>
+                  <a:schemeClr val="tx1"/>
+                </a:solidFill>
+              </a:rPr>
+              <a:t>Магистерская программа</a:t>
+            </a:r>
+          </a:p>
+          <a:p>
+            <a:pPr>
+              <a:lnSpc>
+                <a:spcPct val="120000"/>
+              </a:lnSpc>
+              <a:spcAft>
+                <a:spcPts val="0"/>
+              </a:spcAft>
+            </a:pPr>
+            <a:r>
+              <a:rPr lang="ru-RU" sz="1000" dirty="0">
+                <a:solidFill>
+                  <a:schemeClr val="tx1"/>
+                </a:solidFill>
+              </a:rPr>
+              <a:t>“Аналитика больших данных”</a:t>
+            </a:r>
+          </a:p>
+        </p:txBody>
+      </p:sp>
+      <p:sp>
+        <p:nvSpPr>
+          <p:cNvPr id="6" name="Текст 5">
+            <a:extLst>
+              <a:ext uri="{FF2B5EF4-FFF2-40B4-BE49-F238E27FC236}">
+                <a16:creationId xmlns:a16="http://schemas.microsoft.com/office/drawing/2014/main" id="{B5B6DD1A-BEFA-D842-9B7A-78D7BD1A5259}"/>
+              </a:ext>
+            </a:extLst>
+          </p:cNvPr>
+          <p:cNvSpPr>
+            <a:spLocks noGrp="1"/>
+          </p:cNvSpPr>
+          <p:nvPr>
+            <p:ph type="body" sz="quarter" idx="14"/>
+          </p:nvPr>
+        </p:nvSpPr>
+        <p:spPr>
+          <a:xfrm>
+            <a:off x="3459162" y="548720"/>
+            <a:ext cx="2636837" cy="408109"/>
+          </a:xfrm>
+        </p:spPr>
+        <p:txBody>
+          <a:bodyPr/>
+          <a:lstStyle/>
+          <a:p>
+            <a:r>
+              <a:rPr lang="ru-RU" dirty="0"/>
+              <a:t>Взаимосвязь социально-экономических факторов и восприятия счастья в странах с разными моделями общественного устройства</a:t>
+            </a:r>
+          </a:p>
+          <a:p>
+            <a:endParaRPr lang="ru-RU" dirty="0"/>
+          </a:p>
+        </p:txBody>
+      </p:sp>
+      <p:sp>
+        <p:nvSpPr>
+          <p:cNvPr id="7" name="Текст 6">
+            <a:extLst>
+              <a:ext uri="{FF2B5EF4-FFF2-40B4-BE49-F238E27FC236}">
+                <a16:creationId xmlns:a16="http://schemas.microsoft.com/office/drawing/2014/main" id="{88968744-3B75-9B47-92FD-77E1E725F232}"/>
+              </a:ext>
+            </a:extLst>
+          </p:cNvPr>
+          <p:cNvSpPr>
+            <a:spLocks noGrp="1"/>
+          </p:cNvSpPr>
+          <p:nvPr>
+            <p:ph type="body" sz="quarter" idx="15"/>
+          </p:nvPr>
+        </p:nvSpPr>
+        <p:spPr/>
+        <p:txBody>
+          <a:bodyPr/>
+          <a:lstStyle/>
+          <a:p>
+            <a:r>
+              <a:rPr lang="ru-RU" dirty="0"/>
+              <a:t>Разведочный анализ и построение корреляционных матриц</a:t>
+            </a:r>
+          </a:p>
+        </p:txBody>
+      </p:sp>
+      <p:graphicFrame>
+        <p:nvGraphicFramePr>
+          <p:cNvPr id="10" name="Таблица 10">
+            <a:extLst>
+              <a:ext uri="{FF2B5EF4-FFF2-40B4-BE49-F238E27FC236}">
+                <a16:creationId xmlns:a16="http://schemas.microsoft.com/office/drawing/2014/main" id="{586B72BA-30D5-4B6D-9EE8-831F1C33058B}"/>
+              </a:ext>
+            </a:extLst>
+          </p:cNvPr>
+          <p:cNvGraphicFramePr>
+            <a:graphicFrameLocks noGrp="1"/>
+          </p:cNvGraphicFramePr>
+          <p:nvPr>
+            <p:extLst>
+              <p:ext uri="{D42A27DB-BD31-4B8C-83A1-F6EECF244321}">
+                <p14:modId xmlns:p14="http://schemas.microsoft.com/office/powerpoint/2010/main" val="1678422657"/>
+              </p:ext>
+            </p:extLst>
+          </p:nvPr>
+        </p:nvGraphicFramePr>
+        <p:xfrm>
+          <a:off x="710817" y="4803087"/>
+          <a:ext cx="5245561" cy="1338604"/>
+        </p:xfrm>
+        <a:graphic>
+          <a:graphicData uri="http://schemas.openxmlformats.org/drawingml/2006/table">
+            <a:tbl>
+              <a:tblPr firstRow="1" bandRow="1">
+                <a:tableStyleId>{5C22544A-7EE6-4342-B048-85BDC9FD1C3A}</a:tableStyleId>
+              </a:tblPr>
+              <a:tblGrid>
+                <a:gridCol w="2744652">
+                  <a:extLst>
+                    <a:ext uri="{9D8B030D-6E8A-4147-A177-3AD203B41FA5}">
+                      <a16:colId xmlns:a16="http://schemas.microsoft.com/office/drawing/2014/main" val="281395215"/>
+                    </a:ext>
+                  </a:extLst>
+                </a:gridCol>
+                <a:gridCol w="1506528">
+                  <a:extLst>
+                    <a:ext uri="{9D8B030D-6E8A-4147-A177-3AD203B41FA5}">
+                      <a16:colId xmlns:a16="http://schemas.microsoft.com/office/drawing/2014/main" val="454134994"/>
+                    </a:ext>
+                  </a:extLst>
+                </a:gridCol>
+                <a:gridCol w="994381">
+                  <a:extLst>
+                    <a:ext uri="{9D8B030D-6E8A-4147-A177-3AD203B41FA5}">
+                      <a16:colId xmlns:a16="http://schemas.microsoft.com/office/drawing/2014/main" val="4245603752"/>
+                    </a:ext>
+                  </a:extLst>
+                </a:gridCol>
+              </a:tblGrid>
+              <a:tr h="207692">
+                <a:tc>
+                  <a:txBody>
+                    <a:bodyPr/>
+                    <a:lstStyle/>
+                    <a:p>
+                      <a:pPr>
+                        <a:lnSpc>
+                          <a:spcPct val="150000"/>
+                        </a:lnSpc>
+                        <a:spcBef>
+                          <a:spcPts val="1200"/>
+                        </a:spcBef>
+                      </a:pPr>
+                      <a:r>
+                        <a:rPr lang="ru-RU" sz="1200" dirty="0">
+                          <a:solidFill>
+                            <a:schemeClr val="tx1"/>
+                          </a:solidFill>
+                          <a:effectLst/>
+                          <a:latin typeface="Times New Roman" panose="02020603050405020304" pitchFamily="18" charset="0"/>
+                          <a:ea typeface="Calibri" panose="020F0502020204030204" pitchFamily="34" charset="0"/>
+                          <a:cs typeface="Times New Roman" panose="02020603050405020304" pitchFamily="18" charset="0"/>
+                        </a:rPr>
+                        <a:t>Переменная для Швеции</a:t>
+                      </a:r>
+                      <a:endParaRPr lang="ru-RU" sz="1100" dirty="0">
+                        <a:solidFill>
+                          <a:schemeClr val="tx1"/>
+                        </a:solidFill>
+                        <a:effectLst/>
+                        <a:latin typeface="Calibri" panose="020F0502020204030204" pitchFamily="34" charset="0"/>
+                        <a:ea typeface="Calibri" panose="020F0502020204030204" pitchFamily="34" charset="0"/>
+                        <a:cs typeface="Times New Roman" panose="02020603050405020304" pitchFamily="18" charset="0"/>
+                      </a:endParaRPr>
+                    </a:p>
+                  </a:txBody>
+                  <a:tcPr marL="68580" marR="68580" marT="0" marB="0">
+                    <a:lnL w="9525" cap="flat" cmpd="sng" algn="ctr">
+                      <a:solidFill>
+                        <a:schemeClr val="tx1"/>
+                      </a:solidFill>
+                      <a:prstDash val="solid"/>
+                      <a:round/>
+                      <a:headEnd type="none" w="med" len="med"/>
+                      <a:tailEnd type="none" w="med" len="med"/>
+                    </a:lnL>
+                    <a:lnR w="9525" cap="flat" cmpd="sng" algn="ctr">
+                      <a:solidFill>
+                        <a:schemeClr val="tx1"/>
+                      </a:solidFill>
+                      <a:prstDash val="solid"/>
+                      <a:round/>
+                      <a:headEnd type="none" w="med" len="med"/>
+                      <a:tailEnd type="none" w="med" len="med"/>
+                    </a:lnR>
+                    <a:lnT w="9525" cap="flat" cmpd="sng" algn="ctr">
+                      <a:solidFill>
+                        <a:schemeClr val="tx1"/>
+                      </a:solidFill>
+                      <a:prstDash val="solid"/>
+                      <a:round/>
+                      <a:headEnd type="none" w="med" len="med"/>
+                      <a:tailEnd type="none" w="med" len="med"/>
+                    </a:lnT>
+                    <a:lnB w="9525" cap="flat" cmpd="sng" algn="ctr">
+                      <a:solidFill>
+                        <a:schemeClr val="tx1"/>
+                      </a:solidFill>
+                      <a:prstDash val="solid"/>
+                      <a:round/>
+                      <a:headEnd type="none" w="med" len="med"/>
+                      <a:tailEnd type="none" w="med" len="med"/>
+                    </a:lnB>
+                    <a:noFill/>
+                  </a:tcPr>
+                </a:tc>
+                <a:tc>
+                  <a:txBody>
+                    <a:bodyPr/>
+                    <a:lstStyle/>
+                    <a:p>
+                      <a:pPr>
+                        <a:lnSpc>
+                          <a:spcPct val="150000"/>
+                        </a:lnSpc>
+                        <a:spcBef>
+                          <a:spcPts val="1200"/>
+                        </a:spcBef>
+                      </a:pPr>
+                      <a:r>
+                        <a:rPr lang="ru-RU" sz="1100" dirty="0">
+                          <a:solidFill>
+                            <a:schemeClr val="tx1"/>
+                          </a:solidFill>
+                          <a:effectLst/>
+                          <a:latin typeface="Calibri" panose="020F0502020204030204" pitchFamily="34" charset="0"/>
+                          <a:ea typeface="Calibri" panose="020F0502020204030204" pitchFamily="34" charset="0"/>
+                          <a:cs typeface="Times New Roman" panose="02020603050405020304" pitchFamily="18" charset="0"/>
+                        </a:rPr>
+                        <a:t>Корреляция с </a:t>
+                      </a:r>
+                      <a:r>
+                        <a:rPr lang="en-US" sz="1100" dirty="0">
+                          <a:solidFill>
+                            <a:schemeClr val="tx1"/>
+                          </a:solidFill>
+                          <a:effectLst/>
+                          <a:latin typeface="Calibri" panose="020F0502020204030204" pitchFamily="34" charset="0"/>
+                          <a:ea typeface="Calibri" panose="020F0502020204030204" pitchFamily="34" charset="0"/>
+                          <a:cs typeface="Times New Roman" panose="02020603050405020304" pitchFamily="18" charset="0"/>
+                        </a:rPr>
+                        <a:t>happy</a:t>
+                      </a:r>
+                      <a:endParaRPr lang="ru-RU" sz="1100" dirty="0">
+                        <a:solidFill>
+                          <a:schemeClr val="tx1"/>
+                        </a:solidFill>
+                        <a:effectLst/>
+                        <a:latin typeface="Calibri" panose="020F0502020204030204" pitchFamily="34" charset="0"/>
+                        <a:ea typeface="Calibri" panose="020F0502020204030204" pitchFamily="34" charset="0"/>
+                        <a:cs typeface="Times New Roman" panose="02020603050405020304" pitchFamily="18" charset="0"/>
+                      </a:endParaRPr>
+                    </a:p>
+                  </a:txBody>
+                  <a:tcPr marL="68580" marR="68580" marT="0" marB="0">
+                    <a:lnL w="9525" cap="flat" cmpd="sng" algn="ctr">
+                      <a:solidFill>
+                        <a:schemeClr val="tx1"/>
+                      </a:solidFill>
+                      <a:prstDash val="solid"/>
+                      <a:round/>
+                      <a:headEnd type="none" w="med" len="med"/>
+                      <a:tailEnd type="none" w="med" len="med"/>
+                    </a:lnL>
+                    <a:lnR w="9525" cap="flat" cmpd="sng" algn="ctr">
+                      <a:solidFill>
+                        <a:schemeClr val="tx1"/>
+                      </a:solidFill>
+                      <a:prstDash val="solid"/>
+                      <a:round/>
+                      <a:headEnd type="none" w="med" len="med"/>
+                      <a:tailEnd type="none" w="med" len="med"/>
+                    </a:lnR>
+                    <a:lnT w="9525" cap="flat" cmpd="sng" algn="ctr">
+                      <a:solidFill>
+                        <a:schemeClr val="tx1"/>
+                      </a:solidFill>
+                      <a:prstDash val="solid"/>
+                      <a:round/>
+                      <a:headEnd type="none" w="med" len="med"/>
+                      <a:tailEnd type="none" w="med" len="med"/>
+                    </a:lnT>
+                    <a:lnB w="9525" cap="flat" cmpd="sng" algn="ctr">
+                      <a:solidFill>
+                        <a:schemeClr val="tx1"/>
+                      </a:solidFill>
+                      <a:prstDash val="solid"/>
+                      <a:round/>
+                      <a:headEnd type="none" w="med" len="med"/>
+                      <a:tailEnd type="none" w="med" len="med"/>
+                    </a:lnB>
+                    <a:noFill/>
+                  </a:tcPr>
+                </a:tc>
+                <a:tc>
+                  <a:txBody>
+                    <a:bodyPr/>
+                    <a:lstStyle/>
+                    <a:p>
+                      <a:pPr>
+                        <a:lnSpc>
+                          <a:spcPct val="150000"/>
+                        </a:lnSpc>
+                        <a:spcBef>
+                          <a:spcPts val="1200"/>
+                        </a:spcBef>
+                      </a:pPr>
+                      <a:r>
+                        <a:rPr lang="ru-RU" sz="1100" dirty="0">
+                          <a:solidFill>
+                            <a:schemeClr val="tx1"/>
+                          </a:solidFill>
+                          <a:effectLst/>
+                          <a:latin typeface="Calibri" panose="020F0502020204030204" pitchFamily="34" charset="0"/>
+                          <a:ea typeface="Calibri" panose="020F0502020204030204" pitchFamily="34" charset="0"/>
+                          <a:cs typeface="Times New Roman" panose="02020603050405020304" pitchFamily="18" charset="0"/>
+                        </a:rPr>
+                        <a:t>Значимость</a:t>
+                      </a:r>
+                    </a:p>
+                  </a:txBody>
+                  <a:tcPr marL="68580" marR="68580" marT="0" marB="0">
+                    <a:lnL w="9525" cap="flat" cmpd="sng" algn="ctr">
+                      <a:solidFill>
+                        <a:schemeClr val="tx1"/>
+                      </a:solidFill>
+                      <a:prstDash val="solid"/>
+                      <a:round/>
+                      <a:headEnd type="none" w="med" len="med"/>
+                      <a:tailEnd type="none" w="med" len="med"/>
+                    </a:lnL>
+                    <a:lnR w="9525" cap="flat" cmpd="sng" algn="ctr">
+                      <a:solidFill>
+                        <a:schemeClr val="tx1"/>
+                      </a:solidFill>
+                      <a:prstDash val="solid"/>
+                      <a:round/>
+                      <a:headEnd type="none" w="med" len="med"/>
+                      <a:tailEnd type="none" w="med" len="med"/>
+                    </a:lnR>
+                    <a:lnT w="9525" cap="flat" cmpd="sng" algn="ctr">
+                      <a:solidFill>
+                        <a:schemeClr val="tx1"/>
+                      </a:solidFill>
+                      <a:prstDash val="solid"/>
+                      <a:round/>
+                      <a:headEnd type="none" w="med" len="med"/>
+                      <a:tailEnd type="none" w="med" len="med"/>
+                    </a:lnT>
+                    <a:lnB w="9525" cap="flat" cmpd="sng" algn="ctr">
+                      <a:solidFill>
+                        <a:schemeClr val="tx1"/>
+                      </a:solidFill>
+                      <a:prstDash val="solid"/>
+                      <a:round/>
+                      <a:headEnd type="none" w="med" len="med"/>
+                      <a:tailEnd type="none" w="med" len="med"/>
+                    </a:lnB>
+                    <a:noFill/>
+                  </a:tcPr>
+                </a:tc>
+                <a:extLst>
+                  <a:ext uri="{0D108BD9-81ED-4DB2-BD59-A6C34878D82A}">
+                    <a16:rowId xmlns:a16="http://schemas.microsoft.com/office/drawing/2014/main" val="2492690188"/>
+                  </a:ext>
+                </a:extLst>
+              </a:tr>
+              <a:tr h="207692">
+                <a:tc>
+                  <a:txBody>
+                    <a:bodyPr/>
+                    <a:lstStyle/>
+                    <a:p>
+                      <a:pPr>
+                        <a:lnSpc>
+                          <a:spcPct val="150000"/>
+                        </a:lnSpc>
+                        <a:spcBef>
+                          <a:spcPts val="1200"/>
+                        </a:spcBef>
+                      </a:pPr>
+                      <a:r>
+                        <a:rPr lang="en-US" sz="1100" dirty="0">
+                          <a:solidFill>
+                            <a:schemeClr val="tx1"/>
+                          </a:solidFill>
+                          <a:effectLst/>
+                          <a:latin typeface="Calibri" panose="020F0502020204030204" pitchFamily="34" charset="0"/>
+                          <a:ea typeface="Calibri" panose="020F0502020204030204" pitchFamily="34" charset="0"/>
+                          <a:cs typeface="Times New Roman" panose="02020603050405020304" pitchFamily="18" charset="0"/>
+                        </a:rPr>
+                        <a:t>Health</a:t>
+                      </a:r>
+                      <a:r>
+                        <a:rPr lang="ru-RU" sz="1100" dirty="0">
+                          <a:solidFill>
+                            <a:schemeClr val="tx1"/>
+                          </a:solidFill>
+                          <a:effectLst/>
+                          <a:latin typeface="Calibri" panose="020F0502020204030204" pitchFamily="34" charset="0"/>
+                          <a:ea typeface="Calibri" panose="020F0502020204030204" pitchFamily="34" charset="0"/>
+                          <a:cs typeface="Times New Roman" panose="02020603050405020304" pitchFamily="18" charset="0"/>
+                        </a:rPr>
+                        <a:t> </a:t>
+                      </a:r>
+                    </a:p>
+                  </a:txBody>
+                  <a:tcPr marL="68580" marR="68580" marT="0" marB="0">
+                    <a:lnL w="9525" cap="flat" cmpd="sng" algn="ctr">
+                      <a:solidFill>
+                        <a:schemeClr val="tx1"/>
+                      </a:solidFill>
+                      <a:prstDash val="solid"/>
+                      <a:round/>
+                      <a:headEnd type="none" w="med" len="med"/>
+                      <a:tailEnd type="none" w="med" len="med"/>
+                    </a:lnL>
+                    <a:lnR w="9525" cap="flat" cmpd="sng" algn="ctr">
+                      <a:solidFill>
+                        <a:schemeClr val="tx1"/>
+                      </a:solidFill>
+                      <a:prstDash val="solid"/>
+                      <a:round/>
+                      <a:headEnd type="none" w="med" len="med"/>
+                      <a:tailEnd type="none" w="med" len="med"/>
+                    </a:lnR>
+                    <a:lnT w="9525" cap="flat" cmpd="sng" algn="ctr">
+                      <a:solidFill>
+                        <a:schemeClr val="tx1"/>
+                      </a:solidFill>
+                      <a:prstDash val="solid"/>
+                      <a:round/>
+                      <a:headEnd type="none" w="med" len="med"/>
+                      <a:tailEnd type="none" w="med" len="med"/>
+                    </a:lnT>
+                    <a:lnB w="9525" cap="flat" cmpd="sng" algn="ctr">
+                      <a:solidFill>
+                        <a:schemeClr val="tx1"/>
+                      </a:solidFill>
+                      <a:prstDash val="solid"/>
+                      <a:round/>
+                      <a:headEnd type="none" w="med" len="med"/>
+                      <a:tailEnd type="none" w="med" len="med"/>
+                    </a:lnB>
+                    <a:noFill/>
+                  </a:tcPr>
+                </a:tc>
+                <a:tc>
+                  <a:txBody>
+                    <a:bodyPr/>
+                    <a:lstStyle/>
+                    <a:p>
+                      <a:pPr>
+                        <a:lnSpc>
+                          <a:spcPct val="150000"/>
+                        </a:lnSpc>
+                        <a:spcBef>
+                          <a:spcPts val="1200"/>
+                        </a:spcBef>
+                      </a:pPr>
+                      <a:r>
+                        <a:rPr lang="en-US" sz="1200" dirty="0">
+                          <a:solidFill>
+                            <a:schemeClr val="tx1"/>
+                          </a:solidFill>
+                          <a:effectLst/>
+                          <a:latin typeface="Times New Roman" panose="02020603050405020304" pitchFamily="18" charset="0"/>
+                          <a:ea typeface="Calibri" panose="020F0502020204030204" pitchFamily="34" charset="0"/>
+                          <a:cs typeface="Times New Roman" panose="02020603050405020304" pitchFamily="18" charset="0"/>
+                        </a:rPr>
+                        <a:t>-0.3</a:t>
+                      </a:r>
+                      <a:endParaRPr lang="ru-RU" sz="1100" dirty="0">
+                        <a:solidFill>
+                          <a:schemeClr val="tx1"/>
+                        </a:solidFill>
+                        <a:effectLst/>
+                        <a:latin typeface="Calibri" panose="020F0502020204030204" pitchFamily="34" charset="0"/>
+                        <a:ea typeface="Calibri" panose="020F0502020204030204" pitchFamily="34" charset="0"/>
+                        <a:cs typeface="Times New Roman" panose="02020603050405020304" pitchFamily="18" charset="0"/>
+                      </a:endParaRPr>
+                    </a:p>
+                  </a:txBody>
+                  <a:tcPr marL="68580" marR="68580" marT="0" marB="0">
+                    <a:lnL w="9525" cap="flat" cmpd="sng" algn="ctr">
+                      <a:solidFill>
+                        <a:schemeClr val="tx1"/>
+                      </a:solidFill>
+                      <a:prstDash val="solid"/>
+                      <a:round/>
+                      <a:headEnd type="none" w="med" len="med"/>
+                      <a:tailEnd type="none" w="med" len="med"/>
+                    </a:lnL>
+                    <a:lnR w="9525" cap="flat" cmpd="sng" algn="ctr">
+                      <a:solidFill>
+                        <a:schemeClr val="tx1"/>
+                      </a:solidFill>
+                      <a:prstDash val="solid"/>
+                      <a:round/>
+                      <a:headEnd type="none" w="med" len="med"/>
+                      <a:tailEnd type="none" w="med" len="med"/>
+                    </a:lnR>
+                    <a:lnT w="9525" cap="flat" cmpd="sng" algn="ctr">
+                      <a:solidFill>
+                        <a:schemeClr val="tx1"/>
+                      </a:solidFill>
+                      <a:prstDash val="solid"/>
+                      <a:round/>
+                      <a:headEnd type="none" w="med" len="med"/>
+                      <a:tailEnd type="none" w="med" len="med"/>
+                    </a:lnT>
+                    <a:lnB w="9525" cap="flat" cmpd="sng" algn="ctr">
+                      <a:solidFill>
+                        <a:schemeClr val="tx1"/>
+                      </a:solidFill>
+                      <a:prstDash val="solid"/>
+                      <a:round/>
+                      <a:headEnd type="none" w="med" len="med"/>
+                      <a:tailEnd type="none" w="med" len="med"/>
+                    </a:lnB>
+                    <a:noFill/>
+                  </a:tcPr>
+                </a:tc>
+                <a:tc>
+                  <a:txBody>
+                    <a:bodyPr/>
+                    <a:lstStyle/>
+                    <a:p>
+                      <a:pPr>
+                        <a:lnSpc>
+                          <a:spcPct val="150000"/>
+                        </a:lnSpc>
+                        <a:spcBef>
+                          <a:spcPts val="1200"/>
+                        </a:spcBef>
+                      </a:pPr>
+                      <a:r>
+                        <a:rPr lang="ru-RU" sz="1100" dirty="0">
+                          <a:solidFill>
+                            <a:schemeClr val="tx1"/>
+                          </a:solidFill>
+                          <a:effectLst/>
+                          <a:latin typeface="Calibri" panose="020F0502020204030204" pitchFamily="34" charset="0"/>
+                          <a:ea typeface="Calibri" panose="020F0502020204030204" pitchFamily="34" charset="0"/>
+                          <a:cs typeface="Times New Roman" panose="02020603050405020304" pitchFamily="18" charset="0"/>
+                        </a:rPr>
+                        <a:t>Значима</a:t>
+                      </a:r>
+                    </a:p>
+                  </a:txBody>
+                  <a:tcPr marL="68580" marR="68580" marT="0" marB="0">
+                    <a:lnL w="9525" cap="flat" cmpd="sng" algn="ctr">
+                      <a:solidFill>
+                        <a:schemeClr val="tx1"/>
+                      </a:solidFill>
+                      <a:prstDash val="solid"/>
+                      <a:round/>
+                      <a:headEnd type="none" w="med" len="med"/>
+                      <a:tailEnd type="none" w="med" len="med"/>
+                    </a:lnL>
+                    <a:lnR w="9525" cap="flat" cmpd="sng" algn="ctr">
+                      <a:solidFill>
+                        <a:schemeClr val="tx1"/>
+                      </a:solidFill>
+                      <a:prstDash val="solid"/>
+                      <a:round/>
+                      <a:headEnd type="none" w="med" len="med"/>
+                      <a:tailEnd type="none" w="med" len="med"/>
+                    </a:lnR>
+                    <a:lnT w="9525" cap="flat" cmpd="sng" algn="ctr">
+                      <a:solidFill>
+                        <a:schemeClr val="tx1"/>
+                      </a:solidFill>
+                      <a:prstDash val="solid"/>
+                      <a:round/>
+                      <a:headEnd type="none" w="med" len="med"/>
+                      <a:tailEnd type="none" w="med" len="med"/>
+                    </a:lnT>
+                    <a:lnB w="9525" cap="flat" cmpd="sng" algn="ctr">
+                      <a:solidFill>
+                        <a:schemeClr val="tx1"/>
+                      </a:solidFill>
+                      <a:prstDash val="solid"/>
+                      <a:round/>
+                      <a:headEnd type="none" w="med" len="med"/>
+                      <a:tailEnd type="none" w="med" len="med"/>
+                    </a:lnB>
+                    <a:noFill/>
+                  </a:tcPr>
+                </a:tc>
+                <a:extLst>
+                  <a:ext uri="{0D108BD9-81ED-4DB2-BD59-A6C34878D82A}">
+                    <a16:rowId xmlns:a16="http://schemas.microsoft.com/office/drawing/2014/main" val="695215291"/>
+                  </a:ext>
+                </a:extLst>
+              </a:tr>
+              <a:tr h="189126">
+                <a:tc>
+                  <a:txBody>
+                    <a:bodyPr/>
+                    <a:lstStyle/>
+                    <a:p>
+                      <a:pPr>
+                        <a:lnSpc>
+                          <a:spcPct val="150000"/>
+                        </a:lnSpc>
+                        <a:spcBef>
+                          <a:spcPts val="1200"/>
+                        </a:spcBef>
+                      </a:pPr>
+                      <a:r>
+                        <a:rPr lang="en-US" sz="1100" dirty="0" err="1">
+                          <a:solidFill>
+                            <a:schemeClr val="tx1"/>
+                          </a:solidFill>
+                          <a:effectLst/>
+                          <a:latin typeface="Calibri" panose="020F0502020204030204" pitchFamily="34" charset="0"/>
+                          <a:ea typeface="Calibri" panose="020F0502020204030204" pitchFamily="34" charset="0"/>
+                          <a:cs typeface="Times New Roman" panose="02020603050405020304" pitchFamily="18" charset="0"/>
+                        </a:rPr>
+                        <a:t>hincfel</a:t>
+                      </a:r>
+                      <a:endParaRPr lang="ru-RU" sz="1100" dirty="0">
+                        <a:solidFill>
+                          <a:schemeClr val="tx1"/>
+                        </a:solidFill>
+                        <a:effectLst/>
+                        <a:latin typeface="Calibri" panose="020F0502020204030204" pitchFamily="34" charset="0"/>
+                        <a:ea typeface="Calibri" panose="020F0502020204030204" pitchFamily="34" charset="0"/>
+                        <a:cs typeface="Times New Roman" panose="02020603050405020304" pitchFamily="18" charset="0"/>
+                      </a:endParaRPr>
+                    </a:p>
+                  </a:txBody>
+                  <a:tcPr marL="68580" marR="68580" marT="0" marB="0">
+                    <a:lnL w="9525" cap="flat" cmpd="sng" algn="ctr">
+                      <a:solidFill>
+                        <a:schemeClr val="tx1"/>
+                      </a:solidFill>
+                      <a:prstDash val="solid"/>
+                      <a:round/>
+                      <a:headEnd type="none" w="med" len="med"/>
+                      <a:tailEnd type="none" w="med" len="med"/>
+                    </a:lnL>
+                    <a:lnR w="9525" cap="flat" cmpd="sng" algn="ctr">
+                      <a:solidFill>
+                        <a:schemeClr val="tx1"/>
+                      </a:solidFill>
+                      <a:prstDash val="solid"/>
+                      <a:round/>
+                      <a:headEnd type="none" w="med" len="med"/>
+                      <a:tailEnd type="none" w="med" len="med"/>
+                    </a:lnR>
+                    <a:lnT w="9525" cap="flat" cmpd="sng" algn="ctr">
+                      <a:solidFill>
+                        <a:schemeClr val="tx1"/>
+                      </a:solidFill>
+                      <a:prstDash val="solid"/>
+                      <a:round/>
+                      <a:headEnd type="none" w="med" len="med"/>
+                      <a:tailEnd type="none" w="med" len="med"/>
+                    </a:lnT>
+                    <a:lnB w="9525" cap="flat" cmpd="sng" algn="ctr">
+                      <a:solidFill>
+                        <a:schemeClr val="tx1"/>
+                      </a:solidFill>
+                      <a:prstDash val="solid"/>
+                      <a:round/>
+                      <a:headEnd type="none" w="med" len="med"/>
+                      <a:tailEnd type="none" w="med" len="med"/>
+                    </a:lnB>
+                    <a:noFill/>
+                  </a:tcPr>
+                </a:tc>
+                <a:tc>
+                  <a:txBody>
+                    <a:bodyPr/>
+                    <a:lstStyle/>
+                    <a:p>
+                      <a:pPr>
+                        <a:lnSpc>
+                          <a:spcPct val="150000"/>
+                        </a:lnSpc>
+                        <a:spcBef>
+                          <a:spcPts val="1200"/>
+                        </a:spcBef>
+                      </a:pPr>
+                      <a:r>
+                        <a:rPr lang="en-US" sz="1200" dirty="0">
+                          <a:solidFill>
+                            <a:schemeClr val="tx1"/>
+                          </a:solidFill>
+                          <a:effectLst/>
+                          <a:latin typeface="Times New Roman" panose="02020603050405020304" pitchFamily="18" charset="0"/>
+                          <a:ea typeface="Calibri" panose="020F0502020204030204" pitchFamily="34" charset="0"/>
+                          <a:cs typeface="Times New Roman" panose="02020603050405020304" pitchFamily="18" charset="0"/>
+                        </a:rPr>
+                        <a:t>-0.23</a:t>
+                      </a:r>
+                      <a:endParaRPr lang="ru-RU" sz="1100" dirty="0">
+                        <a:solidFill>
+                          <a:schemeClr val="tx1"/>
+                        </a:solidFill>
+                        <a:effectLst/>
+                        <a:latin typeface="Calibri" panose="020F0502020204030204" pitchFamily="34" charset="0"/>
+                        <a:ea typeface="Calibri" panose="020F0502020204030204" pitchFamily="34" charset="0"/>
+                        <a:cs typeface="Times New Roman" panose="02020603050405020304" pitchFamily="18" charset="0"/>
+                      </a:endParaRPr>
+                    </a:p>
+                  </a:txBody>
+                  <a:tcPr marL="68580" marR="68580" marT="0" marB="0">
+                    <a:lnL w="9525" cap="flat" cmpd="sng" algn="ctr">
+                      <a:solidFill>
+                        <a:schemeClr val="tx1"/>
+                      </a:solidFill>
+                      <a:prstDash val="solid"/>
+                      <a:round/>
+                      <a:headEnd type="none" w="med" len="med"/>
+                      <a:tailEnd type="none" w="med" len="med"/>
+                    </a:lnL>
+                    <a:lnR w="9525" cap="flat" cmpd="sng" algn="ctr">
+                      <a:solidFill>
+                        <a:schemeClr val="tx1"/>
+                      </a:solidFill>
+                      <a:prstDash val="solid"/>
+                      <a:round/>
+                      <a:headEnd type="none" w="med" len="med"/>
+                      <a:tailEnd type="none" w="med" len="med"/>
+                    </a:lnR>
+                    <a:lnT w="9525" cap="flat" cmpd="sng" algn="ctr">
+                      <a:solidFill>
+                        <a:schemeClr val="tx1"/>
+                      </a:solidFill>
+                      <a:prstDash val="solid"/>
+                      <a:round/>
+                      <a:headEnd type="none" w="med" len="med"/>
+                      <a:tailEnd type="none" w="med" len="med"/>
+                    </a:lnT>
+                    <a:lnB w="9525" cap="flat" cmpd="sng" algn="ctr">
+                      <a:solidFill>
+                        <a:schemeClr val="tx1"/>
+                      </a:solidFill>
+                      <a:prstDash val="solid"/>
+                      <a:round/>
+                      <a:headEnd type="none" w="med" len="med"/>
+                      <a:tailEnd type="none" w="med" len="med"/>
+                    </a:lnB>
+                    <a:noFill/>
+                  </a:tcPr>
+                </a:tc>
+                <a:tc>
+                  <a:txBody>
+                    <a:bodyPr/>
+                    <a:lstStyle/>
+                    <a:p>
+                      <a:pPr marL="0" algn="l" defTabSz="914400" rtl="0" eaLnBrk="1" latinLnBrk="0" hangingPunct="1">
+                        <a:lnSpc>
+                          <a:spcPct val="150000"/>
+                        </a:lnSpc>
+                        <a:spcBef>
+                          <a:spcPts val="1200"/>
+                        </a:spcBef>
+                      </a:pPr>
+                      <a:r>
+                        <a:rPr lang="ru-RU" sz="1100" kern="1200" dirty="0">
+                          <a:solidFill>
+                            <a:schemeClr val="tx1"/>
+                          </a:solidFill>
+                          <a:effectLst/>
+                          <a:latin typeface="Calibri" panose="020F0502020204030204" pitchFamily="34" charset="0"/>
+                          <a:ea typeface="Calibri" panose="020F0502020204030204" pitchFamily="34" charset="0"/>
+                          <a:cs typeface="Times New Roman" panose="02020603050405020304" pitchFamily="18" charset="0"/>
+                        </a:rPr>
+                        <a:t>Значима</a:t>
+                      </a:r>
+                    </a:p>
+                  </a:txBody>
+                  <a:tcPr marL="68580" marR="68580" marT="0" marB="0">
+                    <a:lnL w="9525" cap="flat" cmpd="sng" algn="ctr">
+                      <a:solidFill>
+                        <a:schemeClr val="tx1"/>
+                      </a:solidFill>
+                      <a:prstDash val="solid"/>
+                      <a:round/>
+                      <a:headEnd type="none" w="med" len="med"/>
+                      <a:tailEnd type="none" w="med" len="med"/>
+                    </a:lnL>
+                    <a:lnR w="9525" cap="flat" cmpd="sng" algn="ctr">
+                      <a:solidFill>
+                        <a:schemeClr val="tx1"/>
+                      </a:solidFill>
+                      <a:prstDash val="solid"/>
+                      <a:round/>
+                      <a:headEnd type="none" w="med" len="med"/>
+                      <a:tailEnd type="none" w="med" len="med"/>
+                    </a:lnR>
+                    <a:lnT w="9525" cap="flat" cmpd="sng" algn="ctr">
+                      <a:solidFill>
+                        <a:schemeClr val="tx1"/>
+                      </a:solidFill>
+                      <a:prstDash val="solid"/>
+                      <a:round/>
+                      <a:headEnd type="none" w="med" len="med"/>
+                      <a:tailEnd type="none" w="med" len="med"/>
+                    </a:lnT>
+                    <a:lnB w="9525" cap="flat" cmpd="sng" algn="ctr">
+                      <a:solidFill>
+                        <a:schemeClr val="tx1"/>
+                      </a:solidFill>
+                      <a:prstDash val="solid"/>
+                      <a:round/>
+                      <a:headEnd type="none" w="med" len="med"/>
+                      <a:tailEnd type="none" w="med" len="med"/>
+                    </a:lnB>
+                    <a:noFill/>
+                  </a:tcPr>
+                </a:tc>
+                <a:extLst>
+                  <a:ext uri="{0D108BD9-81ED-4DB2-BD59-A6C34878D82A}">
+                    <a16:rowId xmlns:a16="http://schemas.microsoft.com/office/drawing/2014/main" val="3711788390"/>
+                  </a:ext>
+                </a:extLst>
+              </a:tr>
+              <a:tr h="357464">
+                <a:tc>
+                  <a:txBody>
+                    <a:bodyPr/>
+                    <a:lstStyle/>
+                    <a:p>
+                      <a:pPr>
+                        <a:lnSpc>
+                          <a:spcPct val="150000"/>
+                        </a:lnSpc>
+                        <a:spcBef>
+                          <a:spcPts val="1200"/>
+                        </a:spcBef>
+                      </a:pPr>
+                      <a:r>
+                        <a:rPr lang="ru-RU" sz="1200" dirty="0" err="1">
+                          <a:solidFill>
+                            <a:schemeClr val="tx1"/>
+                          </a:solidFill>
+                          <a:effectLst/>
+                          <a:latin typeface="Times New Roman" panose="02020603050405020304" pitchFamily="18" charset="0"/>
+                          <a:ea typeface="Calibri" panose="020F0502020204030204" pitchFamily="34" charset="0"/>
+                          <a:cs typeface="Times New Roman" panose="02020603050405020304" pitchFamily="18" charset="0"/>
+                        </a:rPr>
+                        <a:t>trstp</a:t>
+                      </a:r>
+                      <a:r>
+                        <a:rPr lang="en-US" sz="1200" dirty="0">
+                          <a:solidFill>
+                            <a:schemeClr val="tx1"/>
+                          </a:solidFill>
+                          <a:effectLst/>
+                          <a:latin typeface="Times New Roman" panose="02020603050405020304" pitchFamily="18" charset="0"/>
+                          <a:ea typeface="Calibri" panose="020F0502020204030204" pitchFamily="34" charset="0"/>
+                          <a:cs typeface="Times New Roman" panose="02020603050405020304" pitchFamily="18" charset="0"/>
+                        </a:rPr>
+                        <a:t>lc</a:t>
+                      </a:r>
+                      <a:endParaRPr lang="ru-RU" sz="1100" dirty="0">
+                        <a:solidFill>
+                          <a:schemeClr val="tx1"/>
+                        </a:solidFill>
+                        <a:effectLst/>
+                        <a:latin typeface="Calibri" panose="020F0502020204030204" pitchFamily="34" charset="0"/>
+                        <a:ea typeface="Calibri" panose="020F0502020204030204" pitchFamily="34" charset="0"/>
+                        <a:cs typeface="Times New Roman" panose="02020603050405020304" pitchFamily="18" charset="0"/>
+                      </a:endParaRPr>
+                    </a:p>
+                  </a:txBody>
+                  <a:tcPr marL="68580" marR="68580" marT="0" marB="0">
+                    <a:lnL w="9525" cap="flat" cmpd="sng" algn="ctr">
+                      <a:solidFill>
+                        <a:schemeClr val="tx1"/>
+                      </a:solidFill>
+                      <a:prstDash val="solid"/>
+                      <a:round/>
+                      <a:headEnd type="none" w="med" len="med"/>
+                      <a:tailEnd type="none" w="med" len="med"/>
+                    </a:lnL>
+                    <a:lnR w="9525" cap="flat" cmpd="sng" algn="ctr">
+                      <a:solidFill>
+                        <a:schemeClr val="tx1"/>
+                      </a:solidFill>
+                      <a:prstDash val="solid"/>
+                      <a:round/>
+                      <a:headEnd type="none" w="med" len="med"/>
+                      <a:tailEnd type="none" w="med" len="med"/>
+                    </a:lnR>
+                    <a:lnT w="9525" cap="flat" cmpd="sng" algn="ctr">
+                      <a:solidFill>
+                        <a:schemeClr val="tx1"/>
+                      </a:solidFill>
+                      <a:prstDash val="solid"/>
+                      <a:round/>
+                      <a:headEnd type="none" w="med" len="med"/>
+                      <a:tailEnd type="none" w="med" len="med"/>
+                    </a:lnT>
+                    <a:lnB w="9525" cap="flat" cmpd="sng" algn="ctr">
+                      <a:solidFill>
+                        <a:schemeClr val="tx1"/>
+                      </a:solidFill>
+                      <a:prstDash val="solid"/>
+                      <a:round/>
+                      <a:headEnd type="none" w="med" len="med"/>
+                      <a:tailEnd type="none" w="med" len="med"/>
+                    </a:lnB>
+                    <a:noFill/>
+                  </a:tcPr>
+                </a:tc>
+                <a:tc>
+                  <a:txBody>
+                    <a:bodyPr/>
+                    <a:lstStyle/>
+                    <a:p>
+                      <a:pPr>
+                        <a:lnSpc>
+                          <a:spcPct val="150000"/>
+                        </a:lnSpc>
+                        <a:spcBef>
+                          <a:spcPts val="1200"/>
+                        </a:spcBef>
+                      </a:pPr>
+                      <a:r>
+                        <a:rPr lang="en-US" sz="1200" dirty="0">
+                          <a:solidFill>
+                            <a:schemeClr val="tx1"/>
+                          </a:solidFill>
+                          <a:effectLst/>
+                          <a:latin typeface="Times New Roman" panose="02020603050405020304" pitchFamily="18" charset="0"/>
+                          <a:ea typeface="Calibri" panose="020F0502020204030204" pitchFamily="34" charset="0"/>
+                          <a:cs typeface="Times New Roman" panose="02020603050405020304" pitchFamily="18" charset="0"/>
+                        </a:rPr>
+                        <a:t>0.17</a:t>
+                      </a:r>
+                      <a:endParaRPr lang="ru-RU" sz="1100" dirty="0">
+                        <a:solidFill>
+                          <a:schemeClr val="tx1"/>
+                        </a:solidFill>
+                        <a:effectLst/>
+                        <a:latin typeface="Calibri" panose="020F0502020204030204" pitchFamily="34" charset="0"/>
+                        <a:ea typeface="Calibri" panose="020F0502020204030204" pitchFamily="34" charset="0"/>
+                        <a:cs typeface="Times New Roman" panose="02020603050405020304" pitchFamily="18" charset="0"/>
+                      </a:endParaRPr>
+                    </a:p>
+                  </a:txBody>
+                  <a:tcPr marL="68580" marR="68580" marT="0" marB="0">
+                    <a:lnL w="9525" cap="flat" cmpd="sng" algn="ctr">
+                      <a:solidFill>
+                        <a:schemeClr val="tx1"/>
+                      </a:solidFill>
+                      <a:prstDash val="solid"/>
+                      <a:round/>
+                      <a:headEnd type="none" w="med" len="med"/>
+                      <a:tailEnd type="none" w="med" len="med"/>
+                    </a:lnL>
+                    <a:lnR w="9525" cap="flat" cmpd="sng" algn="ctr">
+                      <a:solidFill>
+                        <a:schemeClr val="tx1"/>
+                      </a:solidFill>
+                      <a:prstDash val="solid"/>
+                      <a:round/>
+                      <a:headEnd type="none" w="med" len="med"/>
+                      <a:tailEnd type="none" w="med" len="med"/>
+                    </a:lnR>
+                    <a:lnT w="9525" cap="flat" cmpd="sng" algn="ctr">
+                      <a:solidFill>
+                        <a:schemeClr val="tx1"/>
+                      </a:solidFill>
+                      <a:prstDash val="solid"/>
+                      <a:round/>
+                      <a:headEnd type="none" w="med" len="med"/>
+                      <a:tailEnd type="none" w="med" len="med"/>
+                    </a:lnT>
+                    <a:lnB w="9525" cap="flat" cmpd="sng" algn="ctr">
+                      <a:solidFill>
+                        <a:schemeClr val="tx1"/>
+                      </a:solidFill>
+                      <a:prstDash val="solid"/>
+                      <a:round/>
+                      <a:headEnd type="none" w="med" len="med"/>
+                      <a:tailEnd type="none" w="med" len="med"/>
+                    </a:lnB>
+                    <a:noFill/>
+                  </a:tcPr>
+                </a:tc>
+                <a:tc>
+                  <a:txBody>
+                    <a:bodyPr/>
+                    <a:lstStyle/>
+                    <a:p>
+                      <a:pPr marL="0" algn="l" defTabSz="914400" rtl="0" eaLnBrk="1" latinLnBrk="0" hangingPunct="1">
+                        <a:lnSpc>
+                          <a:spcPct val="150000"/>
+                        </a:lnSpc>
+                        <a:spcBef>
+                          <a:spcPts val="1200"/>
+                        </a:spcBef>
+                      </a:pPr>
+                      <a:r>
+                        <a:rPr lang="ru-RU" sz="1200" kern="1200" dirty="0">
+                          <a:solidFill>
+                            <a:schemeClr val="tx1"/>
+                          </a:solidFill>
+                          <a:effectLst/>
+                          <a:latin typeface="Calibri" panose="020F0502020204030204" pitchFamily="34" charset="0"/>
+                          <a:ea typeface="Calibri" panose="020F0502020204030204" pitchFamily="34" charset="0"/>
+                          <a:cs typeface="Times New Roman" panose="02020603050405020304" pitchFamily="18" charset="0"/>
+                        </a:rPr>
+                        <a:t>Значима</a:t>
+                      </a:r>
+                    </a:p>
+                  </a:txBody>
+                  <a:tcPr marL="68580" marR="68580" marT="0" marB="0">
+                    <a:lnL w="9525" cap="flat" cmpd="sng" algn="ctr">
+                      <a:solidFill>
+                        <a:schemeClr val="tx1"/>
+                      </a:solidFill>
+                      <a:prstDash val="solid"/>
+                      <a:round/>
+                      <a:headEnd type="none" w="med" len="med"/>
+                      <a:tailEnd type="none" w="med" len="med"/>
+                    </a:lnL>
+                    <a:lnR w="9525" cap="flat" cmpd="sng" algn="ctr">
+                      <a:solidFill>
+                        <a:schemeClr val="tx1"/>
+                      </a:solidFill>
+                      <a:prstDash val="solid"/>
+                      <a:round/>
+                      <a:headEnd type="none" w="med" len="med"/>
+                      <a:tailEnd type="none" w="med" len="med"/>
+                    </a:lnR>
+                    <a:lnT w="9525" cap="flat" cmpd="sng" algn="ctr">
+                      <a:solidFill>
+                        <a:schemeClr val="tx1"/>
+                      </a:solidFill>
+                      <a:prstDash val="solid"/>
+                      <a:round/>
+                      <a:headEnd type="none" w="med" len="med"/>
+                      <a:tailEnd type="none" w="med" len="med"/>
+                    </a:lnT>
+                    <a:lnB w="9525" cap="flat" cmpd="sng" algn="ctr">
+                      <a:solidFill>
+                        <a:schemeClr val="tx1"/>
+                      </a:solidFill>
+                      <a:prstDash val="solid"/>
+                      <a:round/>
+                      <a:headEnd type="none" w="med" len="med"/>
+                      <a:tailEnd type="none" w="med" len="med"/>
+                    </a:lnB>
+                    <a:noFill/>
+                  </a:tcPr>
+                </a:tc>
+                <a:extLst>
+                  <a:ext uri="{0D108BD9-81ED-4DB2-BD59-A6C34878D82A}">
+                    <a16:rowId xmlns:a16="http://schemas.microsoft.com/office/drawing/2014/main" val="1267310396"/>
+                  </a:ext>
+                </a:extLst>
+              </a:tr>
+              <a:tr h="207692">
+                <a:tc>
+                  <a:txBody>
+                    <a:bodyPr/>
+                    <a:lstStyle/>
+                    <a:p>
+                      <a:pPr>
+                        <a:lnSpc>
+                          <a:spcPct val="150000"/>
+                        </a:lnSpc>
+                        <a:spcBef>
+                          <a:spcPts val="1200"/>
+                        </a:spcBef>
+                      </a:pPr>
+                      <a:r>
+                        <a:rPr lang="en-US" sz="1100" dirty="0" err="1">
+                          <a:solidFill>
+                            <a:schemeClr val="tx1"/>
+                          </a:solidFill>
+                          <a:effectLst/>
+                          <a:latin typeface="Calibri" panose="020F0502020204030204" pitchFamily="34" charset="0"/>
+                          <a:ea typeface="Calibri" panose="020F0502020204030204" pitchFamily="34" charset="0"/>
+                          <a:cs typeface="Times New Roman" panose="02020603050405020304" pitchFamily="18" charset="0"/>
+                        </a:rPr>
+                        <a:t>ppltrst</a:t>
+                      </a:r>
+                      <a:endParaRPr lang="ru-RU" sz="1100" dirty="0">
+                        <a:solidFill>
+                          <a:schemeClr val="tx1"/>
+                        </a:solidFill>
+                        <a:effectLst/>
+                        <a:latin typeface="Calibri" panose="020F0502020204030204" pitchFamily="34" charset="0"/>
+                        <a:ea typeface="Calibri" panose="020F0502020204030204" pitchFamily="34" charset="0"/>
+                        <a:cs typeface="Times New Roman" panose="02020603050405020304" pitchFamily="18" charset="0"/>
+                      </a:endParaRPr>
+                    </a:p>
+                  </a:txBody>
+                  <a:tcPr marL="68580" marR="68580" marT="0" marB="0">
+                    <a:lnL w="9525" cap="flat" cmpd="sng" algn="ctr">
+                      <a:solidFill>
+                        <a:schemeClr val="tx1"/>
+                      </a:solidFill>
+                      <a:prstDash val="solid"/>
+                      <a:round/>
+                      <a:headEnd type="none" w="med" len="med"/>
+                      <a:tailEnd type="none" w="med" len="med"/>
+                    </a:lnL>
+                    <a:lnR w="9525" cap="flat" cmpd="sng" algn="ctr">
+                      <a:solidFill>
+                        <a:schemeClr val="tx1"/>
+                      </a:solidFill>
+                      <a:prstDash val="solid"/>
+                      <a:round/>
+                      <a:headEnd type="none" w="med" len="med"/>
+                      <a:tailEnd type="none" w="med" len="med"/>
+                    </a:lnR>
+                    <a:lnT w="9525" cap="flat" cmpd="sng" algn="ctr">
+                      <a:solidFill>
+                        <a:schemeClr val="tx1"/>
+                      </a:solidFill>
+                      <a:prstDash val="solid"/>
+                      <a:round/>
+                      <a:headEnd type="none" w="med" len="med"/>
+                      <a:tailEnd type="none" w="med" len="med"/>
+                    </a:lnT>
+                    <a:lnB w="9525" cap="flat" cmpd="sng" algn="ctr">
+                      <a:solidFill>
+                        <a:schemeClr val="tx1"/>
+                      </a:solidFill>
+                      <a:prstDash val="solid"/>
+                      <a:round/>
+                      <a:headEnd type="none" w="med" len="med"/>
+                      <a:tailEnd type="none" w="med" len="med"/>
+                    </a:lnB>
+                    <a:noFill/>
+                  </a:tcPr>
+                </a:tc>
+                <a:tc>
+                  <a:txBody>
+                    <a:bodyPr/>
+                    <a:lstStyle/>
+                    <a:p>
+                      <a:pPr>
+                        <a:lnSpc>
+                          <a:spcPct val="150000"/>
+                        </a:lnSpc>
+                        <a:spcBef>
+                          <a:spcPts val="1200"/>
+                        </a:spcBef>
+                      </a:pPr>
+                      <a:r>
+                        <a:rPr lang="en-US" sz="1200" dirty="0">
+                          <a:solidFill>
+                            <a:schemeClr val="tx1"/>
+                          </a:solidFill>
+                          <a:effectLst/>
+                          <a:latin typeface="Times New Roman" panose="02020603050405020304" pitchFamily="18" charset="0"/>
+                          <a:ea typeface="Calibri" panose="020F0502020204030204" pitchFamily="34" charset="0"/>
+                          <a:cs typeface="Times New Roman" panose="02020603050405020304" pitchFamily="18" charset="0"/>
+                        </a:rPr>
+                        <a:t>0.17</a:t>
+                      </a:r>
+                      <a:endParaRPr lang="ru-RU" sz="1100" dirty="0">
+                        <a:solidFill>
+                          <a:schemeClr val="tx1"/>
+                        </a:solidFill>
+                        <a:effectLst/>
+                        <a:latin typeface="Calibri" panose="020F0502020204030204" pitchFamily="34" charset="0"/>
+                        <a:ea typeface="Calibri" panose="020F0502020204030204" pitchFamily="34" charset="0"/>
+                        <a:cs typeface="Times New Roman" panose="02020603050405020304" pitchFamily="18" charset="0"/>
+                      </a:endParaRPr>
+                    </a:p>
+                  </a:txBody>
+                  <a:tcPr marL="68580" marR="68580" marT="0" marB="0">
+                    <a:lnL w="9525" cap="flat" cmpd="sng" algn="ctr">
+                      <a:solidFill>
+                        <a:schemeClr val="tx1"/>
+                      </a:solidFill>
+                      <a:prstDash val="solid"/>
+                      <a:round/>
+                      <a:headEnd type="none" w="med" len="med"/>
+                      <a:tailEnd type="none" w="med" len="med"/>
+                    </a:lnL>
+                    <a:lnR w="9525" cap="flat" cmpd="sng" algn="ctr">
+                      <a:solidFill>
+                        <a:schemeClr val="tx1"/>
+                      </a:solidFill>
+                      <a:prstDash val="solid"/>
+                      <a:round/>
+                      <a:headEnd type="none" w="med" len="med"/>
+                      <a:tailEnd type="none" w="med" len="med"/>
+                    </a:lnR>
+                    <a:lnT w="9525" cap="flat" cmpd="sng" algn="ctr">
+                      <a:solidFill>
+                        <a:schemeClr val="tx1"/>
+                      </a:solidFill>
+                      <a:prstDash val="solid"/>
+                      <a:round/>
+                      <a:headEnd type="none" w="med" len="med"/>
+                      <a:tailEnd type="none" w="med" len="med"/>
+                    </a:lnT>
+                    <a:lnB w="9525" cap="flat" cmpd="sng" algn="ctr">
+                      <a:solidFill>
+                        <a:schemeClr val="tx1"/>
+                      </a:solidFill>
+                      <a:prstDash val="solid"/>
+                      <a:round/>
+                      <a:headEnd type="none" w="med" len="med"/>
+                      <a:tailEnd type="none" w="med" len="med"/>
+                    </a:lnB>
+                    <a:noFill/>
+                  </a:tcPr>
+                </a:tc>
+                <a:tc>
+                  <a:txBody>
+                    <a:bodyPr/>
+                    <a:lstStyle/>
+                    <a:p>
+                      <a:pPr marL="0" algn="l" defTabSz="914400" rtl="0" eaLnBrk="1" latinLnBrk="0" hangingPunct="1">
+                        <a:lnSpc>
+                          <a:spcPct val="150000"/>
+                        </a:lnSpc>
+                        <a:spcBef>
+                          <a:spcPts val="1200"/>
+                        </a:spcBef>
+                      </a:pPr>
+                      <a:r>
+                        <a:rPr lang="ru-RU" sz="1200" kern="1200" dirty="0">
+                          <a:solidFill>
+                            <a:schemeClr val="tx1"/>
+                          </a:solidFill>
+                          <a:effectLst/>
+                          <a:latin typeface="Calibri" panose="020F0502020204030204" pitchFamily="34" charset="0"/>
+                          <a:ea typeface="Calibri" panose="020F0502020204030204" pitchFamily="34" charset="0"/>
+                          <a:cs typeface="Times New Roman" panose="02020603050405020304" pitchFamily="18" charset="0"/>
+                        </a:rPr>
+                        <a:t>Значима</a:t>
+                      </a:r>
+                    </a:p>
+                  </a:txBody>
+                  <a:tcPr marL="68580" marR="68580" marT="0" marB="0">
+                    <a:lnL w="9525" cap="flat" cmpd="sng" algn="ctr">
+                      <a:solidFill>
+                        <a:schemeClr val="tx1"/>
+                      </a:solidFill>
+                      <a:prstDash val="solid"/>
+                      <a:round/>
+                      <a:headEnd type="none" w="med" len="med"/>
+                      <a:tailEnd type="none" w="med" len="med"/>
+                    </a:lnL>
+                    <a:lnR w="9525" cap="flat" cmpd="sng" algn="ctr">
+                      <a:solidFill>
+                        <a:schemeClr val="tx1"/>
+                      </a:solidFill>
+                      <a:prstDash val="solid"/>
+                      <a:round/>
+                      <a:headEnd type="none" w="med" len="med"/>
+                      <a:tailEnd type="none" w="med" len="med"/>
+                    </a:lnR>
+                    <a:lnT w="9525" cap="flat" cmpd="sng" algn="ctr">
+                      <a:solidFill>
+                        <a:schemeClr val="tx1"/>
+                      </a:solidFill>
+                      <a:prstDash val="solid"/>
+                      <a:round/>
+                      <a:headEnd type="none" w="med" len="med"/>
+                      <a:tailEnd type="none" w="med" len="med"/>
+                    </a:lnT>
+                    <a:lnB w="9525" cap="flat" cmpd="sng" algn="ctr">
+                      <a:solidFill>
+                        <a:schemeClr val="tx1"/>
+                      </a:solidFill>
+                      <a:prstDash val="solid"/>
+                      <a:round/>
+                      <a:headEnd type="none" w="med" len="med"/>
+                      <a:tailEnd type="none" w="med" len="med"/>
+                    </a:lnB>
+                    <a:noFill/>
+                  </a:tcPr>
+                </a:tc>
+                <a:extLst>
+                  <a:ext uri="{0D108BD9-81ED-4DB2-BD59-A6C34878D82A}">
+                    <a16:rowId xmlns:a16="http://schemas.microsoft.com/office/drawing/2014/main" val="1989229793"/>
+                  </a:ext>
+                </a:extLst>
+              </a:tr>
+            </a:tbl>
+          </a:graphicData>
+        </a:graphic>
+      </p:graphicFrame>
+      <p:graphicFrame>
+        <p:nvGraphicFramePr>
+          <p:cNvPr id="11" name="Таблица 10">
+            <a:extLst>
+              <a:ext uri="{FF2B5EF4-FFF2-40B4-BE49-F238E27FC236}">
+                <a16:creationId xmlns:a16="http://schemas.microsoft.com/office/drawing/2014/main" id="{0C2BE4E1-B6FB-4FF4-95F4-239E93F42463}"/>
+              </a:ext>
+            </a:extLst>
+          </p:cNvPr>
+          <p:cNvGraphicFramePr>
+            <a:graphicFrameLocks noGrp="1"/>
+          </p:cNvGraphicFramePr>
+          <p:nvPr>
+            <p:extLst>
+              <p:ext uri="{D42A27DB-BD31-4B8C-83A1-F6EECF244321}">
+                <p14:modId xmlns:p14="http://schemas.microsoft.com/office/powerpoint/2010/main" val="918043211"/>
+              </p:ext>
+            </p:extLst>
+          </p:nvPr>
+        </p:nvGraphicFramePr>
+        <p:xfrm>
+          <a:off x="710818" y="3560977"/>
+          <a:ext cx="5245561" cy="956777"/>
+        </p:xfrm>
+        <a:graphic>
+          <a:graphicData uri="http://schemas.openxmlformats.org/drawingml/2006/table">
+            <a:tbl>
+              <a:tblPr firstRow="1" bandRow="1">
+                <a:tableStyleId>{5C22544A-7EE6-4342-B048-85BDC9FD1C3A}</a:tableStyleId>
+              </a:tblPr>
+              <a:tblGrid>
+                <a:gridCol w="2773527">
+                  <a:extLst>
+                    <a:ext uri="{9D8B030D-6E8A-4147-A177-3AD203B41FA5}">
+                      <a16:colId xmlns:a16="http://schemas.microsoft.com/office/drawing/2014/main" val="281395215"/>
+                    </a:ext>
+                  </a:extLst>
+                </a:gridCol>
+                <a:gridCol w="1463040">
+                  <a:extLst>
+                    <a:ext uri="{9D8B030D-6E8A-4147-A177-3AD203B41FA5}">
+                      <a16:colId xmlns:a16="http://schemas.microsoft.com/office/drawing/2014/main" val="454134994"/>
+                    </a:ext>
+                  </a:extLst>
+                </a:gridCol>
+                <a:gridCol w="1008994">
+                  <a:extLst>
+                    <a:ext uri="{9D8B030D-6E8A-4147-A177-3AD203B41FA5}">
+                      <a16:colId xmlns:a16="http://schemas.microsoft.com/office/drawing/2014/main" val="4245603752"/>
+                    </a:ext>
+                  </a:extLst>
+                </a:gridCol>
+              </a:tblGrid>
+              <a:tr h="280310">
+                <a:tc>
+                  <a:txBody>
+                    <a:bodyPr/>
+                    <a:lstStyle/>
+                    <a:p>
+                      <a:pPr>
+                        <a:lnSpc>
+                          <a:spcPct val="150000"/>
+                        </a:lnSpc>
+                        <a:spcBef>
+                          <a:spcPts val="1200"/>
+                        </a:spcBef>
+                      </a:pPr>
+                      <a:r>
+                        <a:rPr lang="ru-RU" sz="1200" dirty="0">
+                          <a:solidFill>
+                            <a:schemeClr val="tx1"/>
+                          </a:solidFill>
+                          <a:effectLst/>
+                          <a:latin typeface="Times New Roman" panose="02020603050405020304" pitchFamily="18" charset="0"/>
+                          <a:ea typeface="Calibri" panose="020F0502020204030204" pitchFamily="34" charset="0"/>
+                          <a:cs typeface="Times New Roman" panose="02020603050405020304" pitchFamily="18" charset="0"/>
+                        </a:rPr>
+                        <a:t>Переменная для Великобритании </a:t>
+                      </a:r>
+                      <a:endParaRPr lang="ru-RU" sz="1100" dirty="0">
+                        <a:solidFill>
+                          <a:schemeClr val="tx1"/>
+                        </a:solidFill>
+                        <a:effectLst/>
+                        <a:latin typeface="Calibri" panose="020F0502020204030204" pitchFamily="34" charset="0"/>
+                        <a:ea typeface="Calibri" panose="020F0502020204030204" pitchFamily="34" charset="0"/>
+                        <a:cs typeface="Times New Roman" panose="02020603050405020304" pitchFamily="18" charset="0"/>
+                      </a:endParaRPr>
+                    </a:p>
+                  </a:txBody>
+                  <a:tcPr marL="68580" marR="68580" marT="0" marB="0">
+                    <a:lnL w="9525" cap="flat" cmpd="sng" algn="ctr">
+                      <a:solidFill>
+                        <a:schemeClr val="tx1"/>
+                      </a:solidFill>
+                      <a:prstDash val="solid"/>
+                      <a:round/>
+                      <a:headEnd type="none" w="med" len="med"/>
+                      <a:tailEnd type="none" w="med" len="med"/>
+                    </a:lnL>
+                    <a:lnR w="9525" cap="flat" cmpd="sng" algn="ctr">
+                      <a:solidFill>
+                        <a:schemeClr val="tx1"/>
+                      </a:solidFill>
+                      <a:prstDash val="solid"/>
+                      <a:round/>
+                      <a:headEnd type="none" w="med" len="med"/>
+                      <a:tailEnd type="none" w="med" len="med"/>
+                    </a:lnR>
+                    <a:lnT w="9525" cap="flat" cmpd="sng" algn="ctr">
+                      <a:solidFill>
+                        <a:schemeClr val="tx1"/>
+                      </a:solidFill>
+                      <a:prstDash val="solid"/>
+                      <a:round/>
+                      <a:headEnd type="none" w="med" len="med"/>
+                      <a:tailEnd type="none" w="med" len="med"/>
+                    </a:lnT>
+                    <a:lnB w="9525" cap="flat" cmpd="sng" algn="ctr">
+                      <a:solidFill>
+                        <a:schemeClr val="tx1"/>
+                      </a:solidFill>
+                      <a:prstDash val="solid"/>
+                      <a:round/>
+                      <a:headEnd type="none" w="med" len="med"/>
+                      <a:tailEnd type="none" w="med" len="med"/>
+                    </a:lnB>
+                    <a:noFill/>
+                  </a:tcPr>
+                </a:tc>
+                <a:tc>
+                  <a:txBody>
+                    <a:bodyPr/>
+                    <a:lstStyle/>
+                    <a:p>
+                      <a:pPr>
+                        <a:lnSpc>
+                          <a:spcPct val="150000"/>
+                        </a:lnSpc>
+                        <a:spcBef>
+                          <a:spcPts val="1200"/>
+                        </a:spcBef>
+                      </a:pPr>
+                      <a:r>
+                        <a:rPr lang="ru-RU" sz="1100" dirty="0">
+                          <a:solidFill>
+                            <a:schemeClr val="tx1"/>
+                          </a:solidFill>
+                          <a:effectLst/>
+                          <a:latin typeface="Calibri" panose="020F0502020204030204" pitchFamily="34" charset="0"/>
+                          <a:ea typeface="Calibri" panose="020F0502020204030204" pitchFamily="34" charset="0"/>
+                          <a:cs typeface="Times New Roman" panose="02020603050405020304" pitchFamily="18" charset="0"/>
+                        </a:rPr>
+                        <a:t>Корреляция с </a:t>
+                      </a:r>
+                      <a:r>
+                        <a:rPr lang="en-US" sz="1100" dirty="0">
+                          <a:solidFill>
+                            <a:schemeClr val="tx1"/>
+                          </a:solidFill>
+                          <a:effectLst/>
+                          <a:latin typeface="Calibri" panose="020F0502020204030204" pitchFamily="34" charset="0"/>
+                          <a:ea typeface="Calibri" panose="020F0502020204030204" pitchFamily="34" charset="0"/>
+                          <a:cs typeface="Times New Roman" panose="02020603050405020304" pitchFamily="18" charset="0"/>
+                        </a:rPr>
+                        <a:t>happy</a:t>
+                      </a:r>
+                      <a:endParaRPr lang="ru-RU" sz="1100" dirty="0">
+                        <a:solidFill>
+                          <a:schemeClr val="tx1"/>
+                        </a:solidFill>
+                        <a:effectLst/>
+                        <a:latin typeface="Calibri" panose="020F0502020204030204" pitchFamily="34" charset="0"/>
+                        <a:ea typeface="Calibri" panose="020F0502020204030204" pitchFamily="34" charset="0"/>
+                        <a:cs typeface="Times New Roman" panose="02020603050405020304" pitchFamily="18" charset="0"/>
+                      </a:endParaRPr>
+                    </a:p>
+                  </a:txBody>
+                  <a:tcPr marL="68580" marR="68580" marT="0" marB="0">
+                    <a:lnL w="9525" cap="flat" cmpd="sng" algn="ctr">
+                      <a:solidFill>
+                        <a:schemeClr val="tx1"/>
+                      </a:solidFill>
+                      <a:prstDash val="solid"/>
+                      <a:round/>
+                      <a:headEnd type="none" w="med" len="med"/>
+                      <a:tailEnd type="none" w="med" len="med"/>
+                    </a:lnL>
+                    <a:lnR w="9525" cap="flat" cmpd="sng" algn="ctr">
+                      <a:solidFill>
+                        <a:schemeClr val="tx1"/>
+                      </a:solidFill>
+                      <a:prstDash val="solid"/>
+                      <a:round/>
+                      <a:headEnd type="none" w="med" len="med"/>
+                      <a:tailEnd type="none" w="med" len="med"/>
+                    </a:lnR>
+                    <a:lnT w="9525" cap="flat" cmpd="sng" algn="ctr">
+                      <a:solidFill>
+                        <a:schemeClr val="tx1"/>
+                      </a:solidFill>
+                      <a:prstDash val="solid"/>
+                      <a:round/>
+                      <a:headEnd type="none" w="med" len="med"/>
+                      <a:tailEnd type="none" w="med" len="med"/>
+                    </a:lnT>
+                    <a:lnB w="9525" cap="flat" cmpd="sng" algn="ctr">
+                      <a:solidFill>
+                        <a:schemeClr val="tx1"/>
+                      </a:solidFill>
+                      <a:prstDash val="solid"/>
+                      <a:round/>
+                      <a:headEnd type="none" w="med" len="med"/>
+                      <a:tailEnd type="none" w="med" len="med"/>
+                    </a:lnB>
+                    <a:noFill/>
+                  </a:tcPr>
+                </a:tc>
+                <a:tc>
+                  <a:txBody>
+                    <a:bodyPr/>
+                    <a:lstStyle/>
+                    <a:p>
+                      <a:pPr>
+                        <a:lnSpc>
+                          <a:spcPct val="150000"/>
+                        </a:lnSpc>
+                        <a:spcBef>
+                          <a:spcPts val="1200"/>
+                        </a:spcBef>
+                      </a:pPr>
+                      <a:r>
+                        <a:rPr lang="ru-RU" sz="1100" dirty="0">
+                          <a:solidFill>
+                            <a:schemeClr val="tx1"/>
+                          </a:solidFill>
+                          <a:effectLst/>
+                          <a:latin typeface="Calibri" panose="020F0502020204030204" pitchFamily="34" charset="0"/>
+                          <a:ea typeface="Calibri" panose="020F0502020204030204" pitchFamily="34" charset="0"/>
+                          <a:cs typeface="Times New Roman" panose="02020603050405020304" pitchFamily="18" charset="0"/>
+                        </a:rPr>
+                        <a:t>Значимость</a:t>
+                      </a:r>
+                    </a:p>
+                  </a:txBody>
+                  <a:tcPr marL="68580" marR="68580" marT="0" marB="0">
+                    <a:lnL w="9525" cap="flat" cmpd="sng" algn="ctr">
+                      <a:solidFill>
+                        <a:schemeClr val="tx1"/>
+                      </a:solidFill>
+                      <a:prstDash val="solid"/>
+                      <a:round/>
+                      <a:headEnd type="none" w="med" len="med"/>
+                      <a:tailEnd type="none" w="med" len="med"/>
+                    </a:lnL>
+                    <a:lnR w="9525" cap="flat" cmpd="sng" algn="ctr">
+                      <a:solidFill>
+                        <a:schemeClr val="tx1"/>
+                      </a:solidFill>
+                      <a:prstDash val="solid"/>
+                      <a:round/>
+                      <a:headEnd type="none" w="med" len="med"/>
+                      <a:tailEnd type="none" w="med" len="med"/>
+                    </a:lnR>
+                    <a:lnT w="9525" cap="flat" cmpd="sng" algn="ctr">
+                      <a:solidFill>
+                        <a:schemeClr val="tx1"/>
+                      </a:solidFill>
+                      <a:prstDash val="solid"/>
+                      <a:round/>
+                      <a:headEnd type="none" w="med" len="med"/>
+                      <a:tailEnd type="none" w="med" len="med"/>
+                    </a:lnT>
+                    <a:lnB w="9525" cap="flat" cmpd="sng" algn="ctr">
+                      <a:solidFill>
+                        <a:schemeClr val="tx1"/>
+                      </a:solidFill>
+                      <a:prstDash val="solid"/>
+                      <a:round/>
+                      <a:headEnd type="none" w="med" len="med"/>
+                      <a:tailEnd type="none" w="med" len="med"/>
+                    </a:lnB>
+                    <a:noFill/>
+                  </a:tcPr>
+                </a:tc>
+                <a:extLst>
+                  <a:ext uri="{0D108BD9-81ED-4DB2-BD59-A6C34878D82A}">
+                    <a16:rowId xmlns:a16="http://schemas.microsoft.com/office/drawing/2014/main" val="2492690188"/>
+                  </a:ext>
+                </a:extLst>
+              </a:tr>
+              <a:tr h="179602">
+                <a:tc>
+                  <a:txBody>
+                    <a:bodyPr/>
+                    <a:lstStyle/>
+                    <a:p>
+                      <a:pPr marL="0" algn="l" defTabSz="914400" rtl="0" eaLnBrk="1" latinLnBrk="0" hangingPunct="1">
+                        <a:lnSpc>
+                          <a:spcPct val="150000"/>
+                        </a:lnSpc>
+                        <a:spcBef>
+                          <a:spcPts val="1200"/>
+                        </a:spcBef>
+                      </a:pPr>
+                      <a:r>
+                        <a:rPr lang="en-US" sz="1100" kern="1200" dirty="0">
+                          <a:solidFill>
+                            <a:schemeClr val="tx1"/>
+                          </a:solidFill>
+                          <a:effectLst/>
+                          <a:latin typeface="Calibri" panose="020F0502020204030204" pitchFamily="34" charset="0"/>
+                          <a:ea typeface="Calibri" panose="020F0502020204030204" pitchFamily="34" charset="0"/>
+                          <a:cs typeface="Times New Roman" panose="02020603050405020304" pitchFamily="18" charset="0"/>
+                        </a:rPr>
+                        <a:t>Health</a:t>
+                      </a:r>
+                      <a:r>
+                        <a:rPr lang="ru-RU" sz="1100" kern="1200" dirty="0">
+                          <a:solidFill>
+                            <a:schemeClr val="tx1"/>
+                          </a:solidFill>
+                          <a:effectLst/>
+                          <a:latin typeface="Calibri" panose="020F0502020204030204" pitchFamily="34" charset="0"/>
+                          <a:ea typeface="Calibri" panose="020F0502020204030204" pitchFamily="34" charset="0"/>
+                          <a:cs typeface="Times New Roman" panose="02020603050405020304" pitchFamily="18" charset="0"/>
+                        </a:rPr>
+                        <a:t> </a:t>
+                      </a:r>
+                    </a:p>
+                  </a:txBody>
+                  <a:tcPr marL="68580" marR="68580" marT="0" marB="0">
+                    <a:lnL w="9525" cap="flat" cmpd="sng" algn="ctr">
+                      <a:solidFill>
+                        <a:schemeClr val="tx1"/>
+                      </a:solidFill>
+                      <a:prstDash val="solid"/>
+                      <a:round/>
+                      <a:headEnd type="none" w="med" len="med"/>
+                      <a:tailEnd type="none" w="med" len="med"/>
+                    </a:lnL>
+                    <a:lnR w="9525" cap="flat" cmpd="sng" algn="ctr">
+                      <a:solidFill>
+                        <a:schemeClr val="tx1"/>
+                      </a:solidFill>
+                      <a:prstDash val="solid"/>
+                      <a:round/>
+                      <a:headEnd type="none" w="med" len="med"/>
+                      <a:tailEnd type="none" w="med" len="med"/>
+                    </a:lnR>
+                    <a:lnT w="9525" cap="flat" cmpd="sng" algn="ctr">
+                      <a:solidFill>
+                        <a:schemeClr val="tx1"/>
+                      </a:solidFill>
+                      <a:prstDash val="solid"/>
+                      <a:round/>
+                      <a:headEnd type="none" w="med" len="med"/>
+                      <a:tailEnd type="none" w="med" len="med"/>
+                    </a:lnT>
+                    <a:lnB w="9525" cap="flat" cmpd="sng" algn="ctr">
+                      <a:solidFill>
+                        <a:schemeClr val="tx1"/>
+                      </a:solidFill>
+                      <a:prstDash val="solid"/>
+                      <a:round/>
+                      <a:headEnd type="none" w="med" len="med"/>
+                      <a:tailEnd type="none" w="med" len="med"/>
+                    </a:lnB>
+                    <a:noFill/>
+                  </a:tcPr>
+                </a:tc>
+                <a:tc>
+                  <a:txBody>
+                    <a:bodyPr/>
+                    <a:lstStyle/>
+                    <a:p>
+                      <a:pPr marL="0" algn="l" defTabSz="914400" rtl="0" eaLnBrk="1" latinLnBrk="0" hangingPunct="1">
+                        <a:lnSpc>
+                          <a:spcPct val="150000"/>
+                        </a:lnSpc>
+                        <a:spcBef>
+                          <a:spcPts val="1200"/>
+                        </a:spcBef>
+                      </a:pPr>
+                      <a:r>
+                        <a:rPr lang="ru-RU" sz="1100" kern="1200" dirty="0">
+                          <a:solidFill>
+                            <a:schemeClr val="tx1"/>
+                          </a:solidFill>
+                          <a:effectLst/>
+                          <a:latin typeface="Calibri" panose="020F0502020204030204" pitchFamily="34" charset="0"/>
+                          <a:ea typeface="+mn-ea"/>
+                          <a:cs typeface="Times New Roman" panose="02020603050405020304" pitchFamily="18" charset="0"/>
+                        </a:rPr>
+                        <a:t> -0.24 </a:t>
+                      </a:r>
+                      <a:endParaRPr lang="ru-RU" sz="1100" kern="1200" dirty="0">
+                        <a:solidFill>
+                          <a:schemeClr val="tx1"/>
+                        </a:solidFill>
+                        <a:effectLst/>
+                        <a:latin typeface="Calibri" panose="020F0502020204030204" pitchFamily="34" charset="0"/>
+                        <a:ea typeface="Calibri" panose="020F0502020204030204" pitchFamily="34" charset="0"/>
+                        <a:cs typeface="Times New Roman" panose="02020603050405020304" pitchFamily="18" charset="0"/>
+                      </a:endParaRPr>
+                    </a:p>
+                  </a:txBody>
+                  <a:tcPr marL="68580" marR="68580" marT="0" marB="0">
+                    <a:lnL w="9525" cap="flat" cmpd="sng" algn="ctr">
+                      <a:solidFill>
+                        <a:schemeClr val="tx1"/>
+                      </a:solidFill>
+                      <a:prstDash val="solid"/>
+                      <a:round/>
+                      <a:headEnd type="none" w="med" len="med"/>
+                      <a:tailEnd type="none" w="med" len="med"/>
+                    </a:lnL>
+                    <a:lnR w="9525" cap="flat" cmpd="sng" algn="ctr">
+                      <a:solidFill>
+                        <a:schemeClr val="tx1"/>
+                      </a:solidFill>
+                      <a:prstDash val="solid"/>
+                      <a:round/>
+                      <a:headEnd type="none" w="med" len="med"/>
+                      <a:tailEnd type="none" w="med" len="med"/>
+                    </a:lnR>
+                    <a:lnT w="9525" cap="flat" cmpd="sng" algn="ctr">
+                      <a:solidFill>
+                        <a:schemeClr val="tx1"/>
+                      </a:solidFill>
+                      <a:prstDash val="solid"/>
+                      <a:round/>
+                      <a:headEnd type="none" w="med" len="med"/>
+                      <a:tailEnd type="none" w="med" len="med"/>
+                    </a:lnT>
+                    <a:lnB w="9525" cap="flat" cmpd="sng" algn="ctr">
+                      <a:solidFill>
+                        <a:schemeClr val="tx1"/>
+                      </a:solidFill>
+                      <a:prstDash val="solid"/>
+                      <a:round/>
+                      <a:headEnd type="none" w="med" len="med"/>
+                      <a:tailEnd type="none" w="med" len="med"/>
+                    </a:lnB>
+                    <a:noFill/>
+                  </a:tcPr>
+                </a:tc>
+                <a:tc>
+                  <a:txBody>
+                    <a:bodyPr/>
+                    <a:lstStyle/>
+                    <a:p>
+                      <a:pPr marL="0" algn="l" defTabSz="914400" rtl="0" eaLnBrk="1" latinLnBrk="0" hangingPunct="1">
+                        <a:lnSpc>
+                          <a:spcPct val="150000"/>
+                        </a:lnSpc>
+                        <a:spcBef>
+                          <a:spcPts val="1200"/>
+                        </a:spcBef>
+                      </a:pPr>
+                      <a:r>
+                        <a:rPr lang="ru-RU" sz="1100" kern="1200" dirty="0">
+                          <a:solidFill>
+                            <a:schemeClr val="tx1"/>
+                          </a:solidFill>
+                          <a:effectLst/>
+                          <a:latin typeface="Calibri" panose="020F0502020204030204" pitchFamily="34" charset="0"/>
+                          <a:ea typeface="Calibri" panose="020F0502020204030204" pitchFamily="34" charset="0"/>
+                          <a:cs typeface="Times New Roman" panose="02020603050405020304" pitchFamily="18" charset="0"/>
+                        </a:rPr>
+                        <a:t>Значима</a:t>
+                      </a:r>
+                    </a:p>
+                  </a:txBody>
+                  <a:tcPr marL="68580" marR="68580" marT="0" marB="0">
+                    <a:lnL w="9525" cap="flat" cmpd="sng" algn="ctr">
+                      <a:solidFill>
+                        <a:schemeClr val="tx1"/>
+                      </a:solidFill>
+                      <a:prstDash val="solid"/>
+                      <a:round/>
+                      <a:headEnd type="none" w="med" len="med"/>
+                      <a:tailEnd type="none" w="med" len="med"/>
+                    </a:lnL>
+                    <a:lnR w="9525" cap="flat" cmpd="sng" algn="ctr">
+                      <a:solidFill>
+                        <a:schemeClr val="tx1"/>
+                      </a:solidFill>
+                      <a:prstDash val="solid"/>
+                      <a:round/>
+                      <a:headEnd type="none" w="med" len="med"/>
+                      <a:tailEnd type="none" w="med" len="med"/>
+                    </a:lnR>
+                    <a:lnT w="9525" cap="flat" cmpd="sng" algn="ctr">
+                      <a:solidFill>
+                        <a:schemeClr val="tx1"/>
+                      </a:solidFill>
+                      <a:prstDash val="solid"/>
+                      <a:round/>
+                      <a:headEnd type="none" w="med" len="med"/>
+                      <a:tailEnd type="none" w="med" len="med"/>
+                    </a:lnT>
+                    <a:lnB w="9525" cap="flat" cmpd="sng" algn="ctr">
+                      <a:solidFill>
+                        <a:schemeClr val="tx1"/>
+                      </a:solidFill>
+                      <a:prstDash val="solid"/>
+                      <a:round/>
+                      <a:headEnd type="none" w="med" len="med"/>
+                      <a:tailEnd type="none" w="med" len="med"/>
+                    </a:lnB>
+                    <a:noFill/>
+                  </a:tcPr>
+                </a:tc>
+                <a:extLst>
+                  <a:ext uri="{0D108BD9-81ED-4DB2-BD59-A6C34878D82A}">
+                    <a16:rowId xmlns:a16="http://schemas.microsoft.com/office/drawing/2014/main" val="695215291"/>
+                  </a:ext>
+                </a:extLst>
+              </a:tr>
+              <a:tr h="179602">
+                <a:tc>
+                  <a:txBody>
+                    <a:bodyPr/>
+                    <a:lstStyle/>
+                    <a:p>
+                      <a:pPr marL="0" algn="l" defTabSz="914400" rtl="0" eaLnBrk="1" latinLnBrk="0" hangingPunct="1">
+                        <a:lnSpc>
+                          <a:spcPct val="150000"/>
+                        </a:lnSpc>
+                        <a:spcBef>
+                          <a:spcPts val="1200"/>
+                        </a:spcBef>
+                      </a:pPr>
+                      <a:r>
+                        <a:rPr lang="en-US" sz="1100" kern="1200" dirty="0" err="1">
+                          <a:solidFill>
+                            <a:schemeClr val="tx1"/>
+                          </a:solidFill>
+                          <a:effectLst/>
+                          <a:latin typeface="Calibri" panose="020F0502020204030204" pitchFamily="34" charset="0"/>
+                          <a:ea typeface="Calibri" panose="020F0502020204030204" pitchFamily="34" charset="0"/>
+                          <a:cs typeface="Times New Roman" panose="02020603050405020304" pitchFamily="18" charset="0"/>
+                        </a:rPr>
+                        <a:t>hincfel</a:t>
+                      </a:r>
+                      <a:endParaRPr lang="ru-RU" sz="1100" kern="1200" dirty="0">
+                        <a:solidFill>
+                          <a:schemeClr val="tx1"/>
+                        </a:solidFill>
+                        <a:effectLst/>
+                        <a:latin typeface="Calibri" panose="020F0502020204030204" pitchFamily="34" charset="0"/>
+                        <a:ea typeface="Calibri" panose="020F0502020204030204" pitchFamily="34" charset="0"/>
+                        <a:cs typeface="Times New Roman" panose="02020603050405020304" pitchFamily="18" charset="0"/>
+                      </a:endParaRPr>
+                    </a:p>
+                  </a:txBody>
+                  <a:tcPr marL="68580" marR="68580" marT="0" marB="0">
+                    <a:lnL w="9525" cap="flat" cmpd="sng" algn="ctr">
+                      <a:solidFill>
+                        <a:schemeClr val="tx1"/>
+                      </a:solidFill>
+                      <a:prstDash val="solid"/>
+                      <a:round/>
+                      <a:headEnd type="none" w="med" len="med"/>
+                      <a:tailEnd type="none" w="med" len="med"/>
+                    </a:lnL>
+                    <a:lnR w="9525" cap="flat" cmpd="sng" algn="ctr">
+                      <a:solidFill>
+                        <a:schemeClr val="tx1"/>
+                      </a:solidFill>
+                      <a:prstDash val="solid"/>
+                      <a:round/>
+                      <a:headEnd type="none" w="med" len="med"/>
+                      <a:tailEnd type="none" w="med" len="med"/>
+                    </a:lnR>
+                    <a:lnT w="9525" cap="flat" cmpd="sng" algn="ctr">
+                      <a:solidFill>
+                        <a:schemeClr val="tx1"/>
+                      </a:solidFill>
+                      <a:prstDash val="solid"/>
+                      <a:round/>
+                      <a:headEnd type="none" w="med" len="med"/>
+                      <a:tailEnd type="none" w="med" len="med"/>
+                    </a:lnT>
+                    <a:lnB w="9525" cap="flat" cmpd="sng" algn="ctr">
+                      <a:solidFill>
+                        <a:schemeClr val="tx1"/>
+                      </a:solidFill>
+                      <a:prstDash val="solid"/>
+                      <a:round/>
+                      <a:headEnd type="none" w="med" len="med"/>
+                      <a:tailEnd type="none" w="med" len="med"/>
+                    </a:lnB>
+                    <a:noFill/>
+                  </a:tcPr>
+                </a:tc>
+                <a:tc>
+                  <a:txBody>
+                    <a:bodyPr/>
+                    <a:lstStyle/>
+                    <a:p>
+                      <a:pPr marL="0" algn="l" defTabSz="914400" rtl="0" eaLnBrk="1" latinLnBrk="0" hangingPunct="1">
+                        <a:lnSpc>
+                          <a:spcPct val="150000"/>
+                        </a:lnSpc>
+                        <a:spcBef>
+                          <a:spcPts val="1200"/>
+                        </a:spcBef>
+                      </a:pPr>
+                      <a:r>
+                        <a:rPr lang="ru-RU" sz="1100" kern="1200" dirty="0">
+                          <a:solidFill>
+                            <a:schemeClr val="tx1"/>
+                          </a:solidFill>
+                          <a:effectLst/>
+                          <a:latin typeface="Calibri" panose="020F0502020204030204" pitchFamily="34" charset="0"/>
+                          <a:ea typeface="+mn-ea"/>
+                          <a:cs typeface="Times New Roman" panose="02020603050405020304" pitchFamily="18" charset="0"/>
+                        </a:rPr>
+                        <a:t>-0.29</a:t>
+                      </a:r>
+                      <a:endParaRPr lang="ru-RU" sz="1100" kern="1200" dirty="0">
+                        <a:solidFill>
+                          <a:schemeClr val="tx1"/>
+                        </a:solidFill>
+                        <a:effectLst/>
+                        <a:latin typeface="Calibri" panose="020F0502020204030204" pitchFamily="34" charset="0"/>
+                        <a:ea typeface="Calibri" panose="020F0502020204030204" pitchFamily="34" charset="0"/>
+                        <a:cs typeface="Times New Roman" panose="02020603050405020304" pitchFamily="18" charset="0"/>
+                      </a:endParaRPr>
+                    </a:p>
+                  </a:txBody>
+                  <a:tcPr marL="68580" marR="68580" marT="0" marB="0">
+                    <a:lnL w="9525" cap="flat" cmpd="sng" algn="ctr">
+                      <a:solidFill>
+                        <a:schemeClr val="tx1"/>
+                      </a:solidFill>
+                      <a:prstDash val="solid"/>
+                      <a:round/>
+                      <a:headEnd type="none" w="med" len="med"/>
+                      <a:tailEnd type="none" w="med" len="med"/>
+                    </a:lnL>
+                    <a:lnR w="9525" cap="flat" cmpd="sng" algn="ctr">
+                      <a:solidFill>
+                        <a:schemeClr val="tx1"/>
+                      </a:solidFill>
+                      <a:prstDash val="solid"/>
+                      <a:round/>
+                      <a:headEnd type="none" w="med" len="med"/>
+                      <a:tailEnd type="none" w="med" len="med"/>
+                    </a:lnR>
+                    <a:lnT w="9525" cap="flat" cmpd="sng" algn="ctr">
+                      <a:solidFill>
+                        <a:schemeClr val="tx1"/>
+                      </a:solidFill>
+                      <a:prstDash val="solid"/>
+                      <a:round/>
+                      <a:headEnd type="none" w="med" len="med"/>
+                      <a:tailEnd type="none" w="med" len="med"/>
+                    </a:lnT>
+                    <a:lnB w="9525" cap="flat" cmpd="sng" algn="ctr">
+                      <a:solidFill>
+                        <a:schemeClr val="tx1"/>
+                      </a:solidFill>
+                      <a:prstDash val="solid"/>
+                      <a:round/>
+                      <a:headEnd type="none" w="med" len="med"/>
+                      <a:tailEnd type="none" w="med" len="med"/>
+                    </a:lnB>
+                    <a:noFill/>
+                  </a:tcPr>
+                </a:tc>
+                <a:tc>
+                  <a:txBody>
+                    <a:bodyPr/>
+                    <a:lstStyle/>
+                    <a:p>
+                      <a:pPr marL="0" algn="l" defTabSz="914400" rtl="0" eaLnBrk="1" latinLnBrk="0" hangingPunct="1">
+                        <a:lnSpc>
+                          <a:spcPct val="150000"/>
+                        </a:lnSpc>
+                        <a:spcBef>
+                          <a:spcPts val="1200"/>
+                        </a:spcBef>
+                      </a:pPr>
+                      <a:r>
+                        <a:rPr lang="ru-RU" sz="1100" kern="1200" dirty="0">
+                          <a:solidFill>
+                            <a:schemeClr val="tx1"/>
+                          </a:solidFill>
+                          <a:effectLst/>
+                          <a:latin typeface="Calibri" panose="020F0502020204030204" pitchFamily="34" charset="0"/>
+                          <a:ea typeface="Calibri" panose="020F0502020204030204" pitchFamily="34" charset="0"/>
+                          <a:cs typeface="Times New Roman" panose="02020603050405020304" pitchFamily="18" charset="0"/>
+                        </a:rPr>
+                        <a:t>Значима</a:t>
+                      </a:r>
+                    </a:p>
+                  </a:txBody>
+                  <a:tcPr marL="68580" marR="68580" marT="0" marB="0">
+                    <a:lnL w="9525" cap="flat" cmpd="sng" algn="ctr">
+                      <a:solidFill>
+                        <a:schemeClr val="tx1"/>
+                      </a:solidFill>
+                      <a:prstDash val="solid"/>
+                      <a:round/>
+                      <a:headEnd type="none" w="med" len="med"/>
+                      <a:tailEnd type="none" w="med" len="med"/>
+                    </a:lnL>
+                    <a:lnR w="9525" cap="flat" cmpd="sng" algn="ctr">
+                      <a:solidFill>
+                        <a:schemeClr val="tx1"/>
+                      </a:solidFill>
+                      <a:prstDash val="solid"/>
+                      <a:round/>
+                      <a:headEnd type="none" w="med" len="med"/>
+                      <a:tailEnd type="none" w="med" len="med"/>
+                    </a:lnR>
+                    <a:lnT w="9525" cap="flat" cmpd="sng" algn="ctr">
+                      <a:solidFill>
+                        <a:schemeClr val="tx1"/>
+                      </a:solidFill>
+                      <a:prstDash val="solid"/>
+                      <a:round/>
+                      <a:headEnd type="none" w="med" len="med"/>
+                      <a:tailEnd type="none" w="med" len="med"/>
+                    </a:lnT>
+                    <a:lnB w="9525" cap="flat" cmpd="sng" algn="ctr">
+                      <a:solidFill>
+                        <a:schemeClr val="tx1"/>
+                      </a:solidFill>
+                      <a:prstDash val="solid"/>
+                      <a:round/>
+                      <a:headEnd type="none" w="med" len="med"/>
+                      <a:tailEnd type="none" w="med" len="med"/>
+                    </a:lnB>
+                    <a:noFill/>
+                  </a:tcPr>
+                </a:tc>
+                <a:extLst>
+                  <a:ext uri="{0D108BD9-81ED-4DB2-BD59-A6C34878D82A}">
+                    <a16:rowId xmlns:a16="http://schemas.microsoft.com/office/drawing/2014/main" val="3711788390"/>
+                  </a:ext>
+                </a:extLst>
+              </a:tr>
+              <a:tr h="188630">
+                <a:tc>
+                  <a:txBody>
+                    <a:bodyPr/>
+                    <a:lstStyle/>
+                    <a:p>
+                      <a:pPr marL="0" algn="l" defTabSz="914400" rtl="0" eaLnBrk="1" latinLnBrk="0" hangingPunct="1">
+                        <a:lnSpc>
+                          <a:spcPct val="150000"/>
+                        </a:lnSpc>
+                        <a:spcBef>
+                          <a:spcPts val="1200"/>
+                        </a:spcBef>
+                      </a:pPr>
+                      <a:r>
+                        <a:rPr lang="ru-RU" sz="1100" kern="1200" dirty="0" err="1">
+                          <a:solidFill>
+                            <a:schemeClr val="tx1"/>
+                          </a:solidFill>
+                          <a:effectLst/>
+                          <a:latin typeface="Calibri" panose="020F0502020204030204" pitchFamily="34" charset="0"/>
+                          <a:ea typeface="Calibri" panose="020F0502020204030204" pitchFamily="34" charset="0"/>
+                          <a:cs typeface="Times New Roman" panose="02020603050405020304" pitchFamily="18" charset="0"/>
+                        </a:rPr>
+                        <a:t>trstp</a:t>
+                      </a:r>
+                      <a:r>
+                        <a:rPr lang="en-US" sz="1100" kern="1200" dirty="0">
+                          <a:solidFill>
+                            <a:schemeClr val="tx1"/>
+                          </a:solidFill>
+                          <a:effectLst/>
+                          <a:latin typeface="Calibri" panose="020F0502020204030204" pitchFamily="34" charset="0"/>
+                          <a:ea typeface="Calibri" panose="020F0502020204030204" pitchFamily="34" charset="0"/>
+                          <a:cs typeface="Times New Roman" panose="02020603050405020304" pitchFamily="18" charset="0"/>
+                        </a:rPr>
+                        <a:t>lc</a:t>
+                      </a:r>
+                      <a:endParaRPr lang="ru-RU" sz="1100" kern="1200" dirty="0">
+                        <a:solidFill>
+                          <a:schemeClr val="tx1"/>
+                        </a:solidFill>
+                        <a:effectLst/>
+                        <a:latin typeface="Calibri" panose="020F0502020204030204" pitchFamily="34" charset="0"/>
+                        <a:ea typeface="Calibri" panose="020F0502020204030204" pitchFamily="34" charset="0"/>
+                        <a:cs typeface="Times New Roman" panose="02020603050405020304" pitchFamily="18" charset="0"/>
+                      </a:endParaRPr>
+                    </a:p>
+                  </a:txBody>
+                  <a:tcPr marL="68580" marR="68580" marT="0" marB="0">
+                    <a:lnL w="9525" cap="flat" cmpd="sng" algn="ctr">
+                      <a:solidFill>
+                        <a:schemeClr val="tx1"/>
+                      </a:solidFill>
+                      <a:prstDash val="solid"/>
+                      <a:round/>
+                      <a:headEnd type="none" w="med" len="med"/>
+                      <a:tailEnd type="none" w="med" len="med"/>
+                    </a:lnL>
+                    <a:lnR w="9525" cap="flat" cmpd="sng" algn="ctr">
+                      <a:solidFill>
+                        <a:schemeClr val="tx1"/>
+                      </a:solidFill>
+                      <a:prstDash val="solid"/>
+                      <a:round/>
+                      <a:headEnd type="none" w="med" len="med"/>
+                      <a:tailEnd type="none" w="med" len="med"/>
+                    </a:lnR>
+                    <a:lnT w="9525" cap="flat" cmpd="sng" algn="ctr">
+                      <a:solidFill>
+                        <a:schemeClr val="tx1"/>
+                      </a:solidFill>
+                      <a:prstDash val="solid"/>
+                      <a:round/>
+                      <a:headEnd type="none" w="med" len="med"/>
+                      <a:tailEnd type="none" w="med" len="med"/>
+                    </a:lnT>
+                    <a:lnB w="9525" cap="flat" cmpd="sng" algn="ctr">
+                      <a:solidFill>
+                        <a:schemeClr val="tx1"/>
+                      </a:solidFill>
+                      <a:prstDash val="solid"/>
+                      <a:round/>
+                      <a:headEnd type="none" w="med" len="med"/>
+                      <a:tailEnd type="none" w="med" len="med"/>
+                    </a:lnB>
+                    <a:noFill/>
+                  </a:tcPr>
+                </a:tc>
+                <a:tc>
+                  <a:txBody>
+                    <a:bodyPr/>
+                    <a:lstStyle/>
+                    <a:p>
+                      <a:pPr marL="0" algn="l" defTabSz="914400" rtl="0" eaLnBrk="1" latinLnBrk="0" hangingPunct="1">
+                        <a:lnSpc>
+                          <a:spcPct val="150000"/>
+                        </a:lnSpc>
+                        <a:spcBef>
+                          <a:spcPts val="1200"/>
+                        </a:spcBef>
+                      </a:pPr>
+                      <a:r>
+                        <a:rPr lang="ru-RU" sz="1100" kern="1200" dirty="0">
+                          <a:solidFill>
+                            <a:schemeClr val="tx1"/>
+                          </a:solidFill>
+                          <a:effectLst/>
+                          <a:latin typeface="Calibri" panose="020F0502020204030204" pitchFamily="34" charset="0"/>
+                          <a:ea typeface="+mn-ea"/>
+                          <a:cs typeface="Times New Roman" panose="02020603050405020304" pitchFamily="18" charset="0"/>
+                        </a:rPr>
+                        <a:t> 0.21</a:t>
+                      </a:r>
+                      <a:endParaRPr lang="ru-RU" sz="1100" kern="1200" dirty="0">
+                        <a:solidFill>
+                          <a:schemeClr val="tx1"/>
+                        </a:solidFill>
+                        <a:effectLst/>
+                        <a:latin typeface="Calibri" panose="020F0502020204030204" pitchFamily="34" charset="0"/>
+                        <a:ea typeface="Calibri" panose="020F0502020204030204" pitchFamily="34" charset="0"/>
+                        <a:cs typeface="Times New Roman" panose="02020603050405020304" pitchFamily="18" charset="0"/>
+                      </a:endParaRPr>
+                    </a:p>
+                  </a:txBody>
+                  <a:tcPr marL="68580" marR="68580" marT="0" marB="0">
+                    <a:lnL w="9525" cap="flat" cmpd="sng" algn="ctr">
+                      <a:solidFill>
+                        <a:schemeClr val="tx1"/>
+                      </a:solidFill>
+                      <a:prstDash val="solid"/>
+                      <a:round/>
+                      <a:headEnd type="none" w="med" len="med"/>
+                      <a:tailEnd type="none" w="med" len="med"/>
+                    </a:lnL>
+                    <a:lnR w="9525" cap="flat" cmpd="sng" algn="ctr">
+                      <a:solidFill>
+                        <a:schemeClr val="tx1"/>
+                      </a:solidFill>
+                      <a:prstDash val="solid"/>
+                      <a:round/>
+                      <a:headEnd type="none" w="med" len="med"/>
+                      <a:tailEnd type="none" w="med" len="med"/>
+                    </a:lnR>
+                    <a:lnT w="9525" cap="flat" cmpd="sng" algn="ctr">
+                      <a:solidFill>
+                        <a:schemeClr val="tx1"/>
+                      </a:solidFill>
+                      <a:prstDash val="solid"/>
+                      <a:round/>
+                      <a:headEnd type="none" w="med" len="med"/>
+                      <a:tailEnd type="none" w="med" len="med"/>
+                    </a:lnT>
+                    <a:lnB w="9525" cap="flat" cmpd="sng" algn="ctr">
+                      <a:solidFill>
+                        <a:schemeClr val="tx1"/>
+                      </a:solidFill>
+                      <a:prstDash val="solid"/>
+                      <a:round/>
+                      <a:headEnd type="none" w="med" len="med"/>
+                      <a:tailEnd type="none" w="med" len="med"/>
+                    </a:lnB>
+                    <a:noFill/>
+                  </a:tcPr>
+                </a:tc>
+                <a:tc>
+                  <a:txBody>
+                    <a:bodyPr/>
+                    <a:lstStyle/>
+                    <a:p>
+                      <a:pPr marL="0" algn="l" defTabSz="914400" rtl="0" eaLnBrk="1" latinLnBrk="0" hangingPunct="1">
+                        <a:lnSpc>
+                          <a:spcPct val="150000"/>
+                        </a:lnSpc>
+                        <a:spcBef>
+                          <a:spcPts val="1200"/>
+                        </a:spcBef>
+                      </a:pPr>
+                      <a:r>
+                        <a:rPr lang="ru-RU" sz="1100" kern="1200" dirty="0">
+                          <a:solidFill>
+                            <a:schemeClr val="tx1"/>
+                          </a:solidFill>
+                          <a:effectLst/>
+                          <a:latin typeface="Calibri" panose="020F0502020204030204" pitchFamily="34" charset="0"/>
+                          <a:ea typeface="Calibri" panose="020F0502020204030204" pitchFamily="34" charset="0"/>
+                          <a:cs typeface="Times New Roman" panose="02020603050405020304" pitchFamily="18" charset="0"/>
+                        </a:rPr>
+                        <a:t>Значима</a:t>
+                      </a:r>
+                    </a:p>
+                  </a:txBody>
+                  <a:tcPr marL="68580" marR="68580" marT="0" marB="0">
+                    <a:lnL w="9525" cap="flat" cmpd="sng" algn="ctr">
+                      <a:solidFill>
+                        <a:schemeClr val="tx1"/>
+                      </a:solidFill>
+                      <a:prstDash val="solid"/>
+                      <a:round/>
+                      <a:headEnd type="none" w="med" len="med"/>
+                      <a:tailEnd type="none" w="med" len="med"/>
+                    </a:lnL>
+                    <a:lnR w="9525" cap="flat" cmpd="sng" algn="ctr">
+                      <a:solidFill>
+                        <a:schemeClr val="tx1"/>
+                      </a:solidFill>
+                      <a:prstDash val="solid"/>
+                      <a:round/>
+                      <a:headEnd type="none" w="med" len="med"/>
+                      <a:tailEnd type="none" w="med" len="med"/>
+                    </a:lnR>
+                    <a:lnT w="9525" cap="flat" cmpd="sng" algn="ctr">
+                      <a:solidFill>
+                        <a:schemeClr val="tx1"/>
+                      </a:solidFill>
+                      <a:prstDash val="solid"/>
+                      <a:round/>
+                      <a:headEnd type="none" w="med" len="med"/>
+                      <a:tailEnd type="none" w="med" len="med"/>
+                    </a:lnT>
+                    <a:lnB w="9525" cap="flat" cmpd="sng" algn="ctr">
+                      <a:solidFill>
+                        <a:schemeClr val="tx1"/>
+                      </a:solidFill>
+                      <a:prstDash val="solid"/>
+                      <a:round/>
+                      <a:headEnd type="none" w="med" len="med"/>
+                      <a:tailEnd type="none" w="med" len="med"/>
+                    </a:lnB>
+                    <a:noFill/>
+                  </a:tcPr>
+                </a:tc>
+                <a:extLst>
+                  <a:ext uri="{0D108BD9-81ED-4DB2-BD59-A6C34878D82A}">
+                    <a16:rowId xmlns:a16="http://schemas.microsoft.com/office/drawing/2014/main" val="1267310396"/>
+                  </a:ext>
+                </a:extLst>
+              </a:tr>
+            </a:tbl>
+          </a:graphicData>
+        </a:graphic>
+      </p:graphicFrame>
+      <p:graphicFrame>
+        <p:nvGraphicFramePr>
+          <p:cNvPr id="12" name="Таблица 10">
+            <a:extLst>
+              <a:ext uri="{FF2B5EF4-FFF2-40B4-BE49-F238E27FC236}">
+                <a16:creationId xmlns:a16="http://schemas.microsoft.com/office/drawing/2014/main" id="{288FFE73-71D8-4088-BAB7-2E6BDE0F9AA6}"/>
+              </a:ext>
+            </a:extLst>
+          </p:cNvPr>
+          <p:cNvGraphicFramePr>
+            <a:graphicFrameLocks noGrp="1"/>
+          </p:cNvGraphicFramePr>
+          <p:nvPr>
+            <p:extLst>
+              <p:ext uri="{D42A27DB-BD31-4B8C-83A1-F6EECF244321}">
+                <p14:modId xmlns:p14="http://schemas.microsoft.com/office/powerpoint/2010/main" val="2690113367"/>
+              </p:ext>
+            </p:extLst>
+          </p:nvPr>
+        </p:nvGraphicFramePr>
+        <p:xfrm>
+          <a:off x="6360544" y="3564609"/>
+          <a:ext cx="5120640" cy="921514"/>
+        </p:xfrm>
+        <a:graphic>
+          <a:graphicData uri="http://schemas.openxmlformats.org/drawingml/2006/table">
+            <a:tbl>
+              <a:tblPr firstRow="1" bandRow="1">
+                <a:tableStyleId>{5C22544A-7EE6-4342-B048-85BDC9FD1C3A}</a:tableStyleId>
+              </a:tblPr>
+              <a:tblGrid>
+                <a:gridCol w="1936129">
+                  <a:extLst>
+                    <a:ext uri="{9D8B030D-6E8A-4147-A177-3AD203B41FA5}">
+                      <a16:colId xmlns:a16="http://schemas.microsoft.com/office/drawing/2014/main" val="281395215"/>
+                    </a:ext>
+                  </a:extLst>
+                </a:gridCol>
+                <a:gridCol w="1549668">
+                  <a:extLst>
+                    <a:ext uri="{9D8B030D-6E8A-4147-A177-3AD203B41FA5}">
+                      <a16:colId xmlns:a16="http://schemas.microsoft.com/office/drawing/2014/main" val="454134994"/>
+                    </a:ext>
+                  </a:extLst>
+                </a:gridCol>
+                <a:gridCol w="1634843">
+                  <a:extLst>
+                    <a:ext uri="{9D8B030D-6E8A-4147-A177-3AD203B41FA5}">
+                      <a16:colId xmlns:a16="http://schemas.microsoft.com/office/drawing/2014/main" val="4245603752"/>
+                    </a:ext>
+                  </a:extLst>
+                </a:gridCol>
+              </a:tblGrid>
+              <a:tr h="207692">
+                <a:tc>
+                  <a:txBody>
+                    <a:bodyPr/>
+                    <a:lstStyle/>
+                    <a:p>
+                      <a:pPr>
+                        <a:lnSpc>
+                          <a:spcPct val="150000"/>
+                        </a:lnSpc>
+                        <a:spcBef>
+                          <a:spcPts val="1200"/>
+                        </a:spcBef>
+                      </a:pPr>
+                      <a:r>
+                        <a:rPr lang="ru-RU" sz="1200" dirty="0">
+                          <a:solidFill>
+                            <a:schemeClr val="tx1"/>
+                          </a:solidFill>
+                          <a:effectLst/>
+                          <a:latin typeface="Times New Roman" panose="02020603050405020304" pitchFamily="18" charset="0"/>
+                          <a:ea typeface="Calibri" panose="020F0502020204030204" pitchFamily="34" charset="0"/>
+                          <a:cs typeface="Times New Roman" panose="02020603050405020304" pitchFamily="18" charset="0"/>
+                        </a:rPr>
+                        <a:t>Переменная для РФ</a:t>
+                      </a:r>
+                      <a:endParaRPr lang="ru-RU" sz="1100" dirty="0">
+                        <a:solidFill>
+                          <a:schemeClr val="tx1"/>
+                        </a:solidFill>
+                        <a:effectLst/>
+                        <a:latin typeface="Calibri" panose="020F0502020204030204" pitchFamily="34" charset="0"/>
+                        <a:ea typeface="Calibri" panose="020F0502020204030204" pitchFamily="34" charset="0"/>
+                        <a:cs typeface="Times New Roman" panose="02020603050405020304" pitchFamily="18" charset="0"/>
+                      </a:endParaRPr>
+                    </a:p>
+                  </a:txBody>
+                  <a:tcPr marL="68580" marR="68580" marT="0" marB="0">
+                    <a:lnL w="9525" cap="flat" cmpd="sng" algn="ctr">
+                      <a:solidFill>
+                        <a:schemeClr val="tx1"/>
+                      </a:solidFill>
+                      <a:prstDash val="solid"/>
+                      <a:round/>
+                      <a:headEnd type="none" w="med" len="med"/>
+                      <a:tailEnd type="none" w="med" len="med"/>
+                    </a:lnL>
+                    <a:lnR w="9525" cap="flat" cmpd="sng" algn="ctr">
+                      <a:solidFill>
+                        <a:schemeClr val="tx1"/>
+                      </a:solidFill>
+                      <a:prstDash val="solid"/>
+                      <a:round/>
+                      <a:headEnd type="none" w="med" len="med"/>
+                      <a:tailEnd type="none" w="med" len="med"/>
+                    </a:lnR>
+                    <a:lnT w="9525" cap="flat" cmpd="sng" algn="ctr">
+                      <a:solidFill>
+                        <a:schemeClr val="tx1"/>
+                      </a:solidFill>
+                      <a:prstDash val="solid"/>
+                      <a:round/>
+                      <a:headEnd type="none" w="med" len="med"/>
+                      <a:tailEnd type="none" w="med" len="med"/>
+                    </a:lnT>
+                    <a:lnB w="9525" cap="flat" cmpd="sng" algn="ctr">
+                      <a:solidFill>
+                        <a:schemeClr val="tx1"/>
+                      </a:solidFill>
+                      <a:prstDash val="solid"/>
+                      <a:round/>
+                      <a:headEnd type="none" w="med" len="med"/>
+                      <a:tailEnd type="none" w="med" len="med"/>
+                    </a:lnB>
+                    <a:noFill/>
+                  </a:tcPr>
+                </a:tc>
+                <a:tc>
+                  <a:txBody>
+                    <a:bodyPr/>
+                    <a:lstStyle/>
+                    <a:p>
+                      <a:pPr>
+                        <a:lnSpc>
+                          <a:spcPct val="150000"/>
+                        </a:lnSpc>
+                        <a:spcBef>
+                          <a:spcPts val="1200"/>
+                        </a:spcBef>
+                      </a:pPr>
+                      <a:r>
+                        <a:rPr lang="ru-RU" sz="1100" dirty="0">
+                          <a:solidFill>
+                            <a:schemeClr val="tx1"/>
+                          </a:solidFill>
+                          <a:effectLst/>
+                          <a:latin typeface="Calibri" panose="020F0502020204030204" pitchFamily="34" charset="0"/>
+                          <a:ea typeface="Calibri" panose="020F0502020204030204" pitchFamily="34" charset="0"/>
+                          <a:cs typeface="Times New Roman" panose="02020603050405020304" pitchFamily="18" charset="0"/>
+                        </a:rPr>
+                        <a:t>Корреляция с </a:t>
+                      </a:r>
+                      <a:r>
+                        <a:rPr lang="en-US" sz="1100" dirty="0">
+                          <a:solidFill>
+                            <a:schemeClr val="tx1"/>
+                          </a:solidFill>
+                          <a:effectLst/>
+                          <a:latin typeface="Calibri" panose="020F0502020204030204" pitchFamily="34" charset="0"/>
+                          <a:ea typeface="Calibri" panose="020F0502020204030204" pitchFamily="34" charset="0"/>
+                          <a:cs typeface="Times New Roman" panose="02020603050405020304" pitchFamily="18" charset="0"/>
+                        </a:rPr>
+                        <a:t>happy</a:t>
+                      </a:r>
+                      <a:endParaRPr lang="ru-RU" sz="1100" dirty="0">
+                        <a:solidFill>
+                          <a:schemeClr val="tx1"/>
+                        </a:solidFill>
+                        <a:effectLst/>
+                        <a:latin typeface="Calibri" panose="020F0502020204030204" pitchFamily="34" charset="0"/>
+                        <a:ea typeface="Calibri" panose="020F0502020204030204" pitchFamily="34" charset="0"/>
+                        <a:cs typeface="Times New Roman" panose="02020603050405020304" pitchFamily="18" charset="0"/>
+                      </a:endParaRPr>
+                    </a:p>
+                  </a:txBody>
+                  <a:tcPr marL="68580" marR="68580" marT="0" marB="0">
+                    <a:lnL w="9525" cap="flat" cmpd="sng" algn="ctr">
+                      <a:solidFill>
+                        <a:schemeClr val="tx1"/>
+                      </a:solidFill>
+                      <a:prstDash val="solid"/>
+                      <a:round/>
+                      <a:headEnd type="none" w="med" len="med"/>
+                      <a:tailEnd type="none" w="med" len="med"/>
+                    </a:lnL>
+                    <a:lnR w="9525" cap="flat" cmpd="sng" algn="ctr">
+                      <a:solidFill>
+                        <a:schemeClr val="tx1"/>
+                      </a:solidFill>
+                      <a:prstDash val="solid"/>
+                      <a:round/>
+                      <a:headEnd type="none" w="med" len="med"/>
+                      <a:tailEnd type="none" w="med" len="med"/>
+                    </a:lnR>
+                    <a:lnT w="9525" cap="flat" cmpd="sng" algn="ctr">
+                      <a:solidFill>
+                        <a:schemeClr val="tx1"/>
+                      </a:solidFill>
+                      <a:prstDash val="solid"/>
+                      <a:round/>
+                      <a:headEnd type="none" w="med" len="med"/>
+                      <a:tailEnd type="none" w="med" len="med"/>
+                    </a:lnT>
+                    <a:lnB w="9525" cap="flat" cmpd="sng" algn="ctr">
+                      <a:solidFill>
+                        <a:schemeClr val="tx1"/>
+                      </a:solidFill>
+                      <a:prstDash val="solid"/>
+                      <a:round/>
+                      <a:headEnd type="none" w="med" len="med"/>
+                      <a:tailEnd type="none" w="med" len="med"/>
+                    </a:lnB>
+                    <a:noFill/>
+                  </a:tcPr>
+                </a:tc>
+                <a:tc>
+                  <a:txBody>
+                    <a:bodyPr/>
+                    <a:lstStyle/>
+                    <a:p>
+                      <a:pPr>
+                        <a:lnSpc>
+                          <a:spcPct val="150000"/>
+                        </a:lnSpc>
+                        <a:spcBef>
+                          <a:spcPts val="1200"/>
+                        </a:spcBef>
+                      </a:pPr>
+                      <a:r>
+                        <a:rPr lang="ru-RU" sz="1100" dirty="0">
+                          <a:solidFill>
+                            <a:schemeClr val="tx1"/>
+                          </a:solidFill>
+                          <a:effectLst/>
+                          <a:latin typeface="Calibri" panose="020F0502020204030204" pitchFamily="34" charset="0"/>
+                          <a:ea typeface="Calibri" panose="020F0502020204030204" pitchFamily="34" charset="0"/>
+                          <a:cs typeface="Times New Roman" panose="02020603050405020304" pitchFamily="18" charset="0"/>
+                        </a:rPr>
+                        <a:t>Значимость</a:t>
+                      </a:r>
+                    </a:p>
+                  </a:txBody>
+                  <a:tcPr marL="68580" marR="68580" marT="0" marB="0">
+                    <a:lnL w="9525" cap="flat" cmpd="sng" algn="ctr">
+                      <a:solidFill>
+                        <a:schemeClr val="tx1"/>
+                      </a:solidFill>
+                      <a:prstDash val="solid"/>
+                      <a:round/>
+                      <a:headEnd type="none" w="med" len="med"/>
+                      <a:tailEnd type="none" w="med" len="med"/>
+                    </a:lnL>
+                    <a:lnR w="9525" cap="flat" cmpd="sng" algn="ctr">
+                      <a:solidFill>
+                        <a:schemeClr val="tx1"/>
+                      </a:solidFill>
+                      <a:prstDash val="solid"/>
+                      <a:round/>
+                      <a:headEnd type="none" w="med" len="med"/>
+                      <a:tailEnd type="none" w="med" len="med"/>
+                    </a:lnR>
+                    <a:lnT w="9525" cap="flat" cmpd="sng" algn="ctr">
+                      <a:solidFill>
+                        <a:schemeClr val="tx1"/>
+                      </a:solidFill>
+                      <a:prstDash val="solid"/>
+                      <a:round/>
+                      <a:headEnd type="none" w="med" len="med"/>
+                      <a:tailEnd type="none" w="med" len="med"/>
+                    </a:lnT>
+                    <a:lnB w="9525" cap="flat" cmpd="sng" algn="ctr">
+                      <a:solidFill>
+                        <a:schemeClr val="tx1"/>
+                      </a:solidFill>
+                      <a:prstDash val="solid"/>
+                      <a:round/>
+                      <a:headEnd type="none" w="med" len="med"/>
+                      <a:tailEnd type="none" w="med" len="med"/>
+                    </a:lnB>
+                    <a:noFill/>
+                  </a:tcPr>
+                </a:tc>
+                <a:extLst>
+                  <a:ext uri="{0D108BD9-81ED-4DB2-BD59-A6C34878D82A}">
+                    <a16:rowId xmlns:a16="http://schemas.microsoft.com/office/drawing/2014/main" val="2492690188"/>
+                  </a:ext>
+                </a:extLst>
+              </a:tr>
+              <a:tr h="207692">
+                <a:tc>
+                  <a:txBody>
+                    <a:bodyPr/>
+                    <a:lstStyle/>
+                    <a:p>
+                      <a:pPr marL="0" algn="l" defTabSz="914400" rtl="0" eaLnBrk="1" latinLnBrk="0" hangingPunct="1">
+                        <a:lnSpc>
+                          <a:spcPct val="150000"/>
+                        </a:lnSpc>
+                        <a:spcBef>
+                          <a:spcPts val="1200"/>
+                        </a:spcBef>
+                      </a:pPr>
+                      <a:r>
+                        <a:rPr lang="en-US" sz="1100" kern="1200" dirty="0">
+                          <a:solidFill>
+                            <a:schemeClr val="tx1"/>
+                          </a:solidFill>
+                          <a:effectLst/>
+                          <a:latin typeface="Calibri" panose="020F0502020204030204" pitchFamily="34" charset="0"/>
+                          <a:ea typeface="Calibri" panose="020F0502020204030204" pitchFamily="34" charset="0"/>
+                          <a:cs typeface="Times New Roman" panose="02020603050405020304" pitchFamily="18" charset="0"/>
+                        </a:rPr>
+                        <a:t>Health</a:t>
+                      </a:r>
+                      <a:r>
+                        <a:rPr lang="ru-RU" sz="1100" kern="1200" dirty="0">
+                          <a:solidFill>
+                            <a:schemeClr val="tx1"/>
+                          </a:solidFill>
+                          <a:effectLst/>
+                          <a:latin typeface="Calibri" panose="020F0502020204030204" pitchFamily="34" charset="0"/>
+                          <a:ea typeface="Calibri" panose="020F0502020204030204" pitchFamily="34" charset="0"/>
+                          <a:cs typeface="Times New Roman" panose="02020603050405020304" pitchFamily="18" charset="0"/>
+                        </a:rPr>
+                        <a:t> </a:t>
+                      </a:r>
+                    </a:p>
+                  </a:txBody>
+                  <a:tcPr marL="68580" marR="68580" marT="0" marB="0">
+                    <a:lnL w="9525" cap="flat" cmpd="sng" algn="ctr">
+                      <a:solidFill>
+                        <a:schemeClr val="tx1"/>
+                      </a:solidFill>
+                      <a:prstDash val="solid"/>
+                      <a:round/>
+                      <a:headEnd type="none" w="med" len="med"/>
+                      <a:tailEnd type="none" w="med" len="med"/>
+                    </a:lnL>
+                    <a:lnR w="9525" cap="flat" cmpd="sng" algn="ctr">
+                      <a:solidFill>
+                        <a:schemeClr val="tx1"/>
+                      </a:solidFill>
+                      <a:prstDash val="solid"/>
+                      <a:round/>
+                      <a:headEnd type="none" w="med" len="med"/>
+                      <a:tailEnd type="none" w="med" len="med"/>
+                    </a:lnR>
+                    <a:lnT w="9525" cap="flat" cmpd="sng" algn="ctr">
+                      <a:solidFill>
+                        <a:schemeClr val="tx1"/>
+                      </a:solidFill>
+                      <a:prstDash val="solid"/>
+                      <a:round/>
+                      <a:headEnd type="none" w="med" len="med"/>
+                      <a:tailEnd type="none" w="med" len="med"/>
+                    </a:lnT>
+                    <a:lnB w="9525" cap="flat" cmpd="sng" algn="ctr">
+                      <a:solidFill>
+                        <a:schemeClr val="tx1"/>
+                      </a:solidFill>
+                      <a:prstDash val="solid"/>
+                      <a:round/>
+                      <a:headEnd type="none" w="med" len="med"/>
+                      <a:tailEnd type="none" w="med" len="med"/>
+                    </a:lnB>
+                    <a:noFill/>
+                  </a:tcPr>
+                </a:tc>
+                <a:tc>
+                  <a:txBody>
+                    <a:bodyPr/>
+                    <a:lstStyle/>
+                    <a:p>
+                      <a:pPr marL="0" algn="l" defTabSz="914400" rtl="0" eaLnBrk="1" latinLnBrk="0" hangingPunct="1">
+                        <a:lnSpc>
+                          <a:spcPct val="150000"/>
+                        </a:lnSpc>
+                        <a:spcBef>
+                          <a:spcPts val="1200"/>
+                        </a:spcBef>
+                      </a:pPr>
+                      <a:r>
+                        <a:rPr lang="ru-RU" sz="1100" kern="1200" dirty="0">
+                          <a:solidFill>
+                            <a:schemeClr val="tx1"/>
+                          </a:solidFill>
+                          <a:effectLst/>
+                          <a:latin typeface="Calibri" panose="020F0502020204030204" pitchFamily="34" charset="0"/>
+                          <a:ea typeface="+mn-ea"/>
+                          <a:cs typeface="Times New Roman" panose="02020603050405020304" pitchFamily="18" charset="0"/>
+                        </a:rPr>
+                        <a:t>-0.31</a:t>
+                      </a:r>
+                      <a:endParaRPr lang="ru-RU" sz="1100" kern="1200" dirty="0">
+                        <a:solidFill>
+                          <a:schemeClr val="tx1"/>
+                        </a:solidFill>
+                        <a:effectLst/>
+                        <a:latin typeface="Calibri" panose="020F0502020204030204" pitchFamily="34" charset="0"/>
+                        <a:ea typeface="Calibri" panose="020F0502020204030204" pitchFamily="34" charset="0"/>
+                        <a:cs typeface="Times New Roman" panose="02020603050405020304" pitchFamily="18" charset="0"/>
+                      </a:endParaRPr>
+                    </a:p>
+                  </a:txBody>
+                  <a:tcPr marL="68580" marR="68580" marT="0" marB="0">
+                    <a:lnL w="9525" cap="flat" cmpd="sng" algn="ctr">
+                      <a:solidFill>
+                        <a:schemeClr val="tx1"/>
+                      </a:solidFill>
+                      <a:prstDash val="solid"/>
+                      <a:round/>
+                      <a:headEnd type="none" w="med" len="med"/>
+                      <a:tailEnd type="none" w="med" len="med"/>
+                    </a:lnL>
+                    <a:lnR w="9525" cap="flat" cmpd="sng" algn="ctr">
+                      <a:solidFill>
+                        <a:schemeClr val="tx1"/>
+                      </a:solidFill>
+                      <a:prstDash val="solid"/>
+                      <a:round/>
+                      <a:headEnd type="none" w="med" len="med"/>
+                      <a:tailEnd type="none" w="med" len="med"/>
+                    </a:lnR>
+                    <a:lnT w="9525" cap="flat" cmpd="sng" algn="ctr">
+                      <a:solidFill>
+                        <a:schemeClr val="tx1"/>
+                      </a:solidFill>
+                      <a:prstDash val="solid"/>
+                      <a:round/>
+                      <a:headEnd type="none" w="med" len="med"/>
+                      <a:tailEnd type="none" w="med" len="med"/>
+                    </a:lnT>
+                    <a:lnB w="9525" cap="flat" cmpd="sng" algn="ctr">
+                      <a:solidFill>
+                        <a:schemeClr val="tx1"/>
+                      </a:solidFill>
+                      <a:prstDash val="solid"/>
+                      <a:round/>
+                      <a:headEnd type="none" w="med" len="med"/>
+                      <a:tailEnd type="none" w="med" len="med"/>
+                    </a:lnB>
+                    <a:noFill/>
+                  </a:tcPr>
+                </a:tc>
+                <a:tc>
+                  <a:txBody>
+                    <a:bodyPr/>
+                    <a:lstStyle/>
+                    <a:p>
+                      <a:pPr marL="0" algn="l" defTabSz="914400" rtl="0" eaLnBrk="1" latinLnBrk="0" hangingPunct="1">
+                        <a:lnSpc>
+                          <a:spcPct val="150000"/>
+                        </a:lnSpc>
+                        <a:spcBef>
+                          <a:spcPts val="1200"/>
+                        </a:spcBef>
+                      </a:pPr>
+                      <a:r>
+                        <a:rPr lang="ru-RU" sz="1100" kern="1200" dirty="0">
+                          <a:solidFill>
+                            <a:schemeClr val="tx1"/>
+                          </a:solidFill>
+                          <a:effectLst/>
+                          <a:latin typeface="Calibri" panose="020F0502020204030204" pitchFamily="34" charset="0"/>
+                          <a:ea typeface="Calibri" panose="020F0502020204030204" pitchFamily="34" charset="0"/>
+                          <a:cs typeface="Times New Roman" panose="02020603050405020304" pitchFamily="18" charset="0"/>
+                        </a:rPr>
+                        <a:t>Значима</a:t>
+                      </a:r>
+                    </a:p>
+                  </a:txBody>
+                  <a:tcPr marL="68580" marR="68580" marT="0" marB="0">
+                    <a:lnL w="9525" cap="flat" cmpd="sng" algn="ctr">
+                      <a:solidFill>
+                        <a:schemeClr val="tx1"/>
+                      </a:solidFill>
+                      <a:prstDash val="solid"/>
+                      <a:round/>
+                      <a:headEnd type="none" w="med" len="med"/>
+                      <a:tailEnd type="none" w="med" len="med"/>
+                    </a:lnL>
+                    <a:lnR w="9525" cap="flat" cmpd="sng" algn="ctr">
+                      <a:solidFill>
+                        <a:schemeClr val="tx1"/>
+                      </a:solidFill>
+                      <a:prstDash val="solid"/>
+                      <a:round/>
+                      <a:headEnd type="none" w="med" len="med"/>
+                      <a:tailEnd type="none" w="med" len="med"/>
+                    </a:lnR>
+                    <a:lnT w="9525" cap="flat" cmpd="sng" algn="ctr">
+                      <a:solidFill>
+                        <a:schemeClr val="tx1"/>
+                      </a:solidFill>
+                      <a:prstDash val="solid"/>
+                      <a:round/>
+                      <a:headEnd type="none" w="med" len="med"/>
+                      <a:tailEnd type="none" w="med" len="med"/>
+                    </a:lnT>
+                    <a:lnB w="9525" cap="flat" cmpd="sng" algn="ctr">
+                      <a:solidFill>
+                        <a:schemeClr val="tx1"/>
+                      </a:solidFill>
+                      <a:prstDash val="solid"/>
+                      <a:round/>
+                      <a:headEnd type="none" w="med" len="med"/>
+                      <a:tailEnd type="none" w="med" len="med"/>
+                    </a:lnB>
+                    <a:noFill/>
+                  </a:tcPr>
+                </a:tc>
+                <a:extLst>
+                  <a:ext uri="{0D108BD9-81ED-4DB2-BD59-A6C34878D82A}">
+                    <a16:rowId xmlns:a16="http://schemas.microsoft.com/office/drawing/2014/main" val="695215291"/>
+                  </a:ext>
+                </a:extLst>
+              </a:tr>
+              <a:tr h="189126">
+                <a:tc>
+                  <a:txBody>
+                    <a:bodyPr/>
+                    <a:lstStyle/>
+                    <a:p>
+                      <a:pPr marL="0" algn="l" defTabSz="914400" rtl="0" eaLnBrk="1" latinLnBrk="0" hangingPunct="1">
+                        <a:lnSpc>
+                          <a:spcPct val="150000"/>
+                        </a:lnSpc>
+                        <a:spcBef>
+                          <a:spcPts val="1200"/>
+                        </a:spcBef>
+                      </a:pPr>
+                      <a:r>
+                        <a:rPr lang="en-US" sz="1100" kern="1200" dirty="0" err="1">
+                          <a:solidFill>
+                            <a:schemeClr val="tx1"/>
+                          </a:solidFill>
+                          <a:effectLst/>
+                          <a:latin typeface="Calibri" panose="020F0502020204030204" pitchFamily="34" charset="0"/>
+                          <a:ea typeface="Calibri" panose="020F0502020204030204" pitchFamily="34" charset="0"/>
+                          <a:cs typeface="Times New Roman" panose="02020603050405020304" pitchFamily="18" charset="0"/>
+                        </a:rPr>
+                        <a:t>hincfel</a:t>
+                      </a:r>
+                      <a:endParaRPr lang="ru-RU" sz="1100" kern="1200" dirty="0">
+                        <a:solidFill>
+                          <a:schemeClr val="tx1"/>
+                        </a:solidFill>
+                        <a:effectLst/>
+                        <a:latin typeface="Calibri" panose="020F0502020204030204" pitchFamily="34" charset="0"/>
+                        <a:ea typeface="Calibri" panose="020F0502020204030204" pitchFamily="34" charset="0"/>
+                        <a:cs typeface="Times New Roman" panose="02020603050405020304" pitchFamily="18" charset="0"/>
+                      </a:endParaRPr>
+                    </a:p>
+                  </a:txBody>
+                  <a:tcPr marL="68580" marR="68580" marT="0" marB="0">
+                    <a:lnL w="9525" cap="flat" cmpd="sng" algn="ctr">
+                      <a:solidFill>
+                        <a:schemeClr val="tx1"/>
+                      </a:solidFill>
+                      <a:prstDash val="solid"/>
+                      <a:round/>
+                      <a:headEnd type="none" w="med" len="med"/>
+                      <a:tailEnd type="none" w="med" len="med"/>
+                    </a:lnL>
+                    <a:lnR w="9525" cap="flat" cmpd="sng" algn="ctr">
+                      <a:solidFill>
+                        <a:schemeClr val="tx1"/>
+                      </a:solidFill>
+                      <a:prstDash val="solid"/>
+                      <a:round/>
+                      <a:headEnd type="none" w="med" len="med"/>
+                      <a:tailEnd type="none" w="med" len="med"/>
+                    </a:lnR>
+                    <a:lnT w="9525" cap="flat" cmpd="sng" algn="ctr">
+                      <a:solidFill>
+                        <a:schemeClr val="tx1"/>
+                      </a:solidFill>
+                      <a:prstDash val="solid"/>
+                      <a:round/>
+                      <a:headEnd type="none" w="med" len="med"/>
+                      <a:tailEnd type="none" w="med" len="med"/>
+                    </a:lnT>
+                    <a:lnB w="9525" cap="flat" cmpd="sng" algn="ctr">
+                      <a:solidFill>
+                        <a:schemeClr val="tx1"/>
+                      </a:solidFill>
+                      <a:prstDash val="solid"/>
+                      <a:round/>
+                      <a:headEnd type="none" w="med" len="med"/>
+                      <a:tailEnd type="none" w="med" len="med"/>
+                    </a:lnB>
+                    <a:noFill/>
+                  </a:tcPr>
+                </a:tc>
+                <a:tc>
+                  <a:txBody>
+                    <a:bodyPr/>
+                    <a:lstStyle/>
+                    <a:p>
+                      <a:pPr marL="0" algn="l" defTabSz="914400" rtl="0" eaLnBrk="1" latinLnBrk="0" hangingPunct="1">
+                        <a:lnSpc>
+                          <a:spcPct val="150000"/>
+                        </a:lnSpc>
+                        <a:spcBef>
+                          <a:spcPts val="1200"/>
+                        </a:spcBef>
+                      </a:pPr>
+                      <a:r>
+                        <a:rPr lang="ru-RU" sz="1100" kern="1200" dirty="0">
+                          <a:solidFill>
+                            <a:schemeClr val="tx1"/>
+                          </a:solidFill>
+                          <a:effectLst/>
+                          <a:latin typeface="Calibri" panose="020F0502020204030204" pitchFamily="34" charset="0"/>
+                          <a:ea typeface="+mn-ea"/>
+                          <a:cs typeface="Times New Roman" panose="02020603050405020304" pitchFamily="18" charset="0"/>
+                        </a:rPr>
+                        <a:t>-0.25 </a:t>
+                      </a:r>
+                      <a:endParaRPr lang="ru-RU" sz="1100" kern="1200" dirty="0">
+                        <a:solidFill>
+                          <a:schemeClr val="tx1"/>
+                        </a:solidFill>
+                        <a:effectLst/>
+                        <a:latin typeface="Calibri" panose="020F0502020204030204" pitchFamily="34" charset="0"/>
+                        <a:ea typeface="Calibri" panose="020F0502020204030204" pitchFamily="34" charset="0"/>
+                        <a:cs typeface="Times New Roman" panose="02020603050405020304" pitchFamily="18" charset="0"/>
+                      </a:endParaRPr>
+                    </a:p>
+                  </a:txBody>
+                  <a:tcPr marL="68580" marR="68580" marT="0" marB="0">
+                    <a:lnL w="9525" cap="flat" cmpd="sng" algn="ctr">
+                      <a:solidFill>
+                        <a:schemeClr val="tx1"/>
+                      </a:solidFill>
+                      <a:prstDash val="solid"/>
+                      <a:round/>
+                      <a:headEnd type="none" w="med" len="med"/>
+                      <a:tailEnd type="none" w="med" len="med"/>
+                    </a:lnL>
+                    <a:lnR w="9525" cap="flat" cmpd="sng" algn="ctr">
+                      <a:solidFill>
+                        <a:schemeClr val="tx1"/>
+                      </a:solidFill>
+                      <a:prstDash val="solid"/>
+                      <a:round/>
+                      <a:headEnd type="none" w="med" len="med"/>
+                      <a:tailEnd type="none" w="med" len="med"/>
+                    </a:lnR>
+                    <a:lnT w="9525" cap="flat" cmpd="sng" algn="ctr">
+                      <a:solidFill>
+                        <a:schemeClr val="tx1"/>
+                      </a:solidFill>
+                      <a:prstDash val="solid"/>
+                      <a:round/>
+                      <a:headEnd type="none" w="med" len="med"/>
+                      <a:tailEnd type="none" w="med" len="med"/>
+                    </a:lnT>
+                    <a:lnB w="9525" cap="flat" cmpd="sng" algn="ctr">
+                      <a:solidFill>
+                        <a:schemeClr val="tx1"/>
+                      </a:solidFill>
+                      <a:prstDash val="solid"/>
+                      <a:round/>
+                      <a:headEnd type="none" w="med" len="med"/>
+                      <a:tailEnd type="none" w="med" len="med"/>
+                    </a:lnB>
+                    <a:noFill/>
+                  </a:tcPr>
+                </a:tc>
+                <a:tc>
+                  <a:txBody>
+                    <a:bodyPr/>
+                    <a:lstStyle/>
+                    <a:p>
+                      <a:pPr marL="0" algn="l" defTabSz="914400" rtl="0" eaLnBrk="1" latinLnBrk="0" hangingPunct="1">
+                        <a:lnSpc>
+                          <a:spcPct val="150000"/>
+                        </a:lnSpc>
+                        <a:spcBef>
+                          <a:spcPts val="1200"/>
+                        </a:spcBef>
+                      </a:pPr>
+                      <a:r>
+                        <a:rPr lang="ru-RU" sz="1100" kern="1200" dirty="0">
+                          <a:solidFill>
+                            <a:schemeClr val="tx1"/>
+                          </a:solidFill>
+                          <a:effectLst/>
+                          <a:latin typeface="Calibri" panose="020F0502020204030204" pitchFamily="34" charset="0"/>
+                          <a:ea typeface="Calibri" panose="020F0502020204030204" pitchFamily="34" charset="0"/>
+                          <a:cs typeface="Times New Roman" panose="02020603050405020304" pitchFamily="18" charset="0"/>
+                        </a:rPr>
+                        <a:t>Значима</a:t>
+                      </a:r>
+                    </a:p>
+                  </a:txBody>
+                  <a:tcPr marL="68580" marR="68580" marT="0" marB="0">
+                    <a:lnL w="9525" cap="flat" cmpd="sng" algn="ctr">
+                      <a:solidFill>
+                        <a:schemeClr val="tx1"/>
+                      </a:solidFill>
+                      <a:prstDash val="solid"/>
+                      <a:round/>
+                      <a:headEnd type="none" w="med" len="med"/>
+                      <a:tailEnd type="none" w="med" len="med"/>
+                    </a:lnL>
+                    <a:lnR w="9525" cap="flat" cmpd="sng" algn="ctr">
+                      <a:solidFill>
+                        <a:schemeClr val="tx1"/>
+                      </a:solidFill>
+                      <a:prstDash val="solid"/>
+                      <a:round/>
+                      <a:headEnd type="none" w="med" len="med"/>
+                      <a:tailEnd type="none" w="med" len="med"/>
+                    </a:lnR>
+                    <a:lnT w="9525" cap="flat" cmpd="sng" algn="ctr">
+                      <a:solidFill>
+                        <a:schemeClr val="tx1"/>
+                      </a:solidFill>
+                      <a:prstDash val="solid"/>
+                      <a:round/>
+                      <a:headEnd type="none" w="med" len="med"/>
+                      <a:tailEnd type="none" w="med" len="med"/>
+                    </a:lnT>
+                    <a:lnB w="9525" cap="flat" cmpd="sng" algn="ctr">
+                      <a:solidFill>
+                        <a:schemeClr val="tx1"/>
+                      </a:solidFill>
+                      <a:prstDash val="solid"/>
+                      <a:round/>
+                      <a:headEnd type="none" w="med" len="med"/>
+                      <a:tailEnd type="none" w="med" len="med"/>
+                    </a:lnB>
+                    <a:noFill/>
+                  </a:tcPr>
+                </a:tc>
+                <a:extLst>
+                  <a:ext uri="{0D108BD9-81ED-4DB2-BD59-A6C34878D82A}">
+                    <a16:rowId xmlns:a16="http://schemas.microsoft.com/office/drawing/2014/main" val="3711788390"/>
+                  </a:ext>
+                </a:extLst>
+              </a:tr>
+              <a:tr h="0">
+                <a:tc>
+                  <a:txBody>
+                    <a:bodyPr/>
+                    <a:lstStyle/>
+                    <a:p>
+                      <a:pPr marL="0" algn="l" defTabSz="914400" rtl="0" eaLnBrk="1" latinLnBrk="0" hangingPunct="1">
+                        <a:lnSpc>
+                          <a:spcPct val="150000"/>
+                        </a:lnSpc>
+                        <a:spcBef>
+                          <a:spcPts val="1200"/>
+                        </a:spcBef>
+                      </a:pPr>
+                      <a:r>
+                        <a:rPr lang="en-GB" sz="1100" kern="1200" dirty="0" err="1">
+                          <a:solidFill>
+                            <a:schemeClr val="tx1"/>
+                          </a:solidFill>
+                          <a:effectLst/>
+                          <a:latin typeface="Calibri" panose="020F0502020204030204" pitchFamily="34" charset="0"/>
+                          <a:ea typeface="+mn-ea"/>
+                          <a:cs typeface="Times New Roman" panose="02020603050405020304" pitchFamily="18" charset="0"/>
+                        </a:rPr>
+                        <a:t>agea</a:t>
+                      </a:r>
+                      <a:endParaRPr lang="ru-RU" sz="1100" kern="1200" dirty="0">
+                        <a:solidFill>
+                          <a:schemeClr val="tx1"/>
+                        </a:solidFill>
+                        <a:effectLst/>
+                        <a:latin typeface="Calibri" panose="020F0502020204030204" pitchFamily="34" charset="0"/>
+                        <a:ea typeface="Calibri" panose="020F0502020204030204" pitchFamily="34" charset="0"/>
+                        <a:cs typeface="Times New Roman" panose="02020603050405020304" pitchFamily="18" charset="0"/>
+                      </a:endParaRPr>
+                    </a:p>
+                  </a:txBody>
+                  <a:tcPr marL="68580" marR="68580" marT="0" marB="0">
+                    <a:lnL w="9525" cap="flat" cmpd="sng" algn="ctr">
+                      <a:solidFill>
+                        <a:schemeClr val="tx1"/>
+                      </a:solidFill>
+                      <a:prstDash val="solid"/>
+                      <a:round/>
+                      <a:headEnd type="none" w="med" len="med"/>
+                      <a:tailEnd type="none" w="med" len="med"/>
+                    </a:lnL>
+                    <a:lnR w="9525" cap="flat" cmpd="sng" algn="ctr">
+                      <a:solidFill>
+                        <a:schemeClr val="tx1"/>
+                      </a:solidFill>
+                      <a:prstDash val="solid"/>
+                      <a:round/>
+                      <a:headEnd type="none" w="med" len="med"/>
+                      <a:tailEnd type="none" w="med" len="med"/>
+                    </a:lnR>
+                    <a:lnT w="9525" cap="flat" cmpd="sng" algn="ctr">
+                      <a:solidFill>
+                        <a:schemeClr val="tx1"/>
+                      </a:solidFill>
+                      <a:prstDash val="solid"/>
+                      <a:round/>
+                      <a:headEnd type="none" w="med" len="med"/>
+                      <a:tailEnd type="none" w="med" len="med"/>
+                    </a:lnT>
+                    <a:lnB w="9525" cap="flat" cmpd="sng" algn="ctr">
+                      <a:solidFill>
+                        <a:schemeClr val="tx1"/>
+                      </a:solidFill>
+                      <a:prstDash val="solid"/>
+                      <a:round/>
+                      <a:headEnd type="none" w="med" len="med"/>
+                      <a:tailEnd type="none" w="med" len="med"/>
+                    </a:lnB>
+                    <a:noFill/>
+                  </a:tcPr>
+                </a:tc>
+                <a:tc>
+                  <a:txBody>
+                    <a:bodyPr/>
+                    <a:lstStyle/>
+                    <a:p>
+                      <a:pPr marL="0" algn="l" defTabSz="914400" rtl="0" eaLnBrk="1" latinLnBrk="0" hangingPunct="1">
+                        <a:lnSpc>
+                          <a:spcPct val="150000"/>
+                        </a:lnSpc>
+                        <a:spcBef>
+                          <a:spcPts val="1200"/>
+                        </a:spcBef>
+                      </a:pPr>
+                      <a:r>
+                        <a:rPr lang="ru-RU" sz="1100" kern="1200" dirty="0">
+                          <a:solidFill>
+                            <a:schemeClr val="tx1"/>
+                          </a:solidFill>
+                          <a:effectLst/>
+                          <a:latin typeface="Calibri" panose="020F0502020204030204" pitchFamily="34" charset="0"/>
+                          <a:ea typeface="+mn-ea"/>
+                          <a:cs typeface="Times New Roman" panose="02020603050405020304" pitchFamily="18" charset="0"/>
+                        </a:rPr>
+                        <a:t>-0.20</a:t>
+                      </a:r>
+                      <a:endParaRPr lang="ru-RU" sz="1100" kern="1200" dirty="0">
+                        <a:solidFill>
+                          <a:schemeClr val="tx1"/>
+                        </a:solidFill>
+                        <a:effectLst/>
+                        <a:latin typeface="Calibri" panose="020F0502020204030204" pitchFamily="34" charset="0"/>
+                        <a:ea typeface="Calibri" panose="020F0502020204030204" pitchFamily="34" charset="0"/>
+                        <a:cs typeface="Times New Roman" panose="02020603050405020304" pitchFamily="18" charset="0"/>
+                      </a:endParaRPr>
+                    </a:p>
+                  </a:txBody>
+                  <a:tcPr marL="68580" marR="68580" marT="0" marB="0">
+                    <a:lnL w="9525" cap="flat" cmpd="sng" algn="ctr">
+                      <a:solidFill>
+                        <a:schemeClr val="tx1"/>
+                      </a:solidFill>
+                      <a:prstDash val="solid"/>
+                      <a:round/>
+                      <a:headEnd type="none" w="med" len="med"/>
+                      <a:tailEnd type="none" w="med" len="med"/>
+                    </a:lnL>
+                    <a:lnR w="9525" cap="flat" cmpd="sng" algn="ctr">
+                      <a:solidFill>
+                        <a:schemeClr val="tx1"/>
+                      </a:solidFill>
+                      <a:prstDash val="solid"/>
+                      <a:round/>
+                      <a:headEnd type="none" w="med" len="med"/>
+                      <a:tailEnd type="none" w="med" len="med"/>
+                    </a:lnR>
+                    <a:lnT w="9525" cap="flat" cmpd="sng" algn="ctr">
+                      <a:solidFill>
+                        <a:schemeClr val="tx1"/>
+                      </a:solidFill>
+                      <a:prstDash val="solid"/>
+                      <a:round/>
+                      <a:headEnd type="none" w="med" len="med"/>
+                      <a:tailEnd type="none" w="med" len="med"/>
+                    </a:lnT>
+                    <a:lnB w="9525" cap="flat" cmpd="sng" algn="ctr">
+                      <a:solidFill>
+                        <a:schemeClr val="tx1"/>
+                      </a:solidFill>
+                      <a:prstDash val="solid"/>
+                      <a:round/>
+                      <a:headEnd type="none" w="med" len="med"/>
+                      <a:tailEnd type="none" w="med" len="med"/>
+                    </a:lnB>
+                    <a:noFill/>
+                  </a:tcPr>
+                </a:tc>
+                <a:tc>
+                  <a:txBody>
+                    <a:bodyPr/>
+                    <a:lstStyle/>
+                    <a:p>
+                      <a:pPr marL="0" algn="l" defTabSz="914400" rtl="0" eaLnBrk="1" latinLnBrk="0" hangingPunct="1">
+                        <a:lnSpc>
+                          <a:spcPct val="150000"/>
+                        </a:lnSpc>
+                        <a:spcBef>
+                          <a:spcPts val="1200"/>
+                        </a:spcBef>
+                      </a:pPr>
+                      <a:r>
+                        <a:rPr lang="ru-RU" sz="1100" kern="1200" dirty="0">
+                          <a:solidFill>
+                            <a:schemeClr val="tx1"/>
+                          </a:solidFill>
+                          <a:effectLst/>
+                          <a:latin typeface="Calibri" panose="020F0502020204030204" pitchFamily="34" charset="0"/>
+                          <a:ea typeface="Calibri" panose="020F0502020204030204" pitchFamily="34" charset="0"/>
+                          <a:cs typeface="Times New Roman" panose="02020603050405020304" pitchFamily="18" charset="0"/>
+                        </a:rPr>
+                        <a:t>Значима</a:t>
+                      </a:r>
+                    </a:p>
+                  </a:txBody>
+                  <a:tcPr marL="68580" marR="68580" marT="0" marB="0">
+                    <a:lnL w="9525" cap="flat" cmpd="sng" algn="ctr">
+                      <a:solidFill>
+                        <a:schemeClr val="tx1"/>
+                      </a:solidFill>
+                      <a:prstDash val="solid"/>
+                      <a:round/>
+                      <a:headEnd type="none" w="med" len="med"/>
+                      <a:tailEnd type="none" w="med" len="med"/>
+                    </a:lnL>
+                    <a:lnR w="9525" cap="flat" cmpd="sng" algn="ctr">
+                      <a:solidFill>
+                        <a:schemeClr val="tx1"/>
+                      </a:solidFill>
+                      <a:prstDash val="solid"/>
+                      <a:round/>
+                      <a:headEnd type="none" w="med" len="med"/>
+                      <a:tailEnd type="none" w="med" len="med"/>
+                    </a:lnR>
+                    <a:lnT w="9525" cap="flat" cmpd="sng" algn="ctr">
+                      <a:solidFill>
+                        <a:schemeClr val="tx1"/>
+                      </a:solidFill>
+                      <a:prstDash val="solid"/>
+                      <a:round/>
+                      <a:headEnd type="none" w="med" len="med"/>
+                      <a:tailEnd type="none" w="med" len="med"/>
+                    </a:lnT>
+                    <a:lnB w="9525" cap="flat" cmpd="sng" algn="ctr">
+                      <a:solidFill>
+                        <a:schemeClr val="tx1"/>
+                      </a:solidFill>
+                      <a:prstDash val="solid"/>
+                      <a:round/>
+                      <a:headEnd type="none" w="med" len="med"/>
+                      <a:tailEnd type="none" w="med" len="med"/>
+                    </a:lnB>
+                    <a:noFill/>
+                  </a:tcPr>
+                </a:tc>
+                <a:extLst>
+                  <a:ext uri="{0D108BD9-81ED-4DB2-BD59-A6C34878D82A}">
+                    <a16:rowId xmlns:a16="http://schemas.microsoft.com/office/drawing/2014/main" val="1267310396"/>
+                  </a:ext>
+                </a:extLst>
+              </a:tr>
+            </a:tbl>
+          </a:graphicData>
+        </a:graphic>
+      </p:graphicFrame>
+    </p:spTree>
+    <p:extLst>
+      <p:ext uri="{BB962C8B-B14F-4D97-AF65-F5344CB8AC3E}">
+        <p14:creationId xmlns:p14="http://schemas.microsoft.com/office/powerpoint/2010/main" val="843577549"/>
+      </p:ext>
+    </p:extLst>
+  </p:cSld>
+  <p:clrMapOvr>
+    <a:masterClrMapping/>
+  </p:clrMapOvr>
+</p:sld>
+</file>
+
+<file path=ppt/slides/slide11.xml><?xml version="1.0" encoding="utf-8"?>
+<p:sld xmlns:a="http://schemas.openxmlformats.org/drawingml/2006/main" xmlns:r="http://schemas.openxmlformats.org/officeDocument/2006/relationships" xmlns:p="http://schemas.openxmlformats.org/presentationml/2006/main">
+  <p:cSld>
+    <p:spTree>
+      <p:nvGrpSpPr>
+        <p:cNvPr id="1" name=""/>
+        <p:cNvGrpSpPr/>
+        <p:nvPr/>
+      </p:nvGrpSpPr>
+      <p:grpSpPr>
+        <a:xfrm>
+          <a:off x="0" y="0"/>
+          <a:ext cx="0" cy="0"/>
+          <a:chOff x="0" y="0"/>
+          <a:chExt cx="0" cy="0"/>
+        </a:xfrm>
+      </p:grpSpPr>
+      <p:sp>
+        <p:nvSpPr>
+          <p:cNvPr id="2" name="Текст 1">
+            <a:extLst>
+              <a:ext uri="{FF2B5EF4-FFF2-40B4-BE49-F238E27FC236}">
+                <a16:creationId xmlns:a16="http://schemas.microsoft.com/office/drawing/2014/main" id="{7686AF3F-C863-864E-AFDC-D574F8060B43}"/>
+              </a:ext>
+            </a:extLst>
+          </p:cNvPr>
+          <p:cNvSpPr>
+            <a:spLocks noGrp="1"/>
+          </p:cNvSpPr>
+          <p:nvPr>
+            <p:ph type="body" sz="quarter" idx="13"/>
+          </p:nvPr>
+        </p:nvSpPr>
+        <p:spPr/>
+        <p:txBody>
+          <a:bodyPr/>
+          <a:lstStyle/>
+          <a:p>
+            <a:pPr>
+              <a:lnSpc>
+                <a:spcPct val="120000"/>
+              </a:lnSpc>
+              <a:spcAft>
+                <a:spcPts val="0"/>
+              </a:spcAft>
+            </a:pPr>
+            <a:r>
+              <a:rPr lang="ru-RU" sz="1000" dirty="0">
+                <a:solidFill>
+                  <a:schemeClr val="tx1"/>
+                </a:solidFill>
+              </a:rPr>
+              <a:t>Магистерская программа</a:t>
+            </a:r>
+          </a:p>
+          <a:p>
+            <a:pPr>
+              <a:lnSpc>
+                <a:spcPct val="120000"/>
+              </a:lnSpc>
+              <a:spcAft>
+                <a:spcPts val="0"/>
+              </a:spcAft>
+            </a:pPr>
+            <a:r>
+              <a:rPr lang="ru-RU" sz="1000" dirty="0">
+                <a:solidFill>
+                  <a:schemeClr val="tx1"/>
+                </a:solidFill>
+              </a:rPr>
+              <a:t>“Аналитика больших данных”</a:t>
+            </a:r>
+          </a:p>
+        </p:txBody>
+      </p:sp>
+      <p:sp>
+        <p:nvSpPr>
+          <p:cNvPr id="3" name="Текст 2">
+            <a:extLst>
+              <a:ext uri="{FF2B5EF4-FFF2-40B4-BE49-F238E27FC236}">
+                <a16:creationId xmlns:a16="http://schemas.microsoft.com/office/drawing/2014/main" id="{D3A1EC68-7619-8F49-AEC3-176ECF1F6A21}"/>
+              </a:ext>
+            </a:extLst>
+          </p:cNvPr>
+          <p:cNvSpPr>
+            <a:spLocks noGrp="1"/>
+          </p:cNvSpPr>
+          <p:nvPr>
+            <p:ph type="body" sz="quarter" idx="14"/>
+          </p:nvPr>
+        </p:nvSpPr>
+        <p:spPr>
+          <a:xfrm>
+            <a:off x="3459162" y="548720"/>
+            <a:ext cx="2636837" cy="408109"/>
+          </a:xfrm>
+        </p:spPr>
+        <p:txBody>
+          <a:bodyPr/>
+          <a:lstStyle/>
+          <a:p>
+            <a:r>
+              <a:rPr lang="ru-RU" dirty="0"/>
+              <a:t>Взаимосвязь социально-экономических факторов и восприятия счастья в странах с разными моделями общественного устройства</a:t>
+            </a:r>
+          </a:p>
+          <a:p>
+            <a:endParaRPr lang="ru-RU" dirty="0"/>
+          </a:p>
+        </p:txBody>
+      </p:sp>
+      <p:sp>
+        <p:nvSpPr>
+          <p:cNvPr id="4" name="Текст 3">
+            <a:extLst>
+              <a:ext uri="{FF2B5EF4-FFF2-40B4-BE49-F238E27FC236}">
+                <a16:creationId xmlns:a16="http://schemas.microsoft.com/office/drawing/2014/main" id="{D223B065-0902-0141-A245-63D5DCF436EE}"/>
+              </a:ext>
+            </a:extLst>
+          </p:cNvPr>
+          <p:cNvSpPr>
+            <a:spLocks noGrp="1"/>
+          </p:cNvSpPr>
+          <p:nvPr>
+            <p:ph type="body" sz="quarter" idx="15"/>
+          </p:nvPr>
+        </p:nvSpPr>
+        <p:spPr/>
+        <p:txBody>
+          <a:bodyPr/>
+          <a:lstStyle/>
+          <a:p>
+            <a:r>
+              <a:rPr lang="ru-RU" dirty="0"/>
+              <a:t>Прогнозирование уровня счастья с использованием методов машинного обучения	</a:t>
+            </a:r>
+          </a:p>
+        </p:txBody>
+      </p:sp>
+      <p:sp>
+        <p:nvSpPr>
+          <p:cNvPr id="5" name="Заголовок 4">
+            <a:extLst>
+              <a:ext uri="{FF2B5EF4-FFF2-40B4-BE49-F238E27FC236}">
+                <a16:creationId xmlns:a16="http://schemas.microsoft.com/office/drawing/2014/main" id="{3872CBB7-AE1B-9D40-A298-6BDF023AFBD6}"/>
+              </a:ext>
+            </a:extLst>
+          </p:cNvPr>
+          <p:cNvSpPr>
+            <a:spLocks noGrp="1"/>
+          </p:cNvSpPr>
+          <p:nvPr>
+            <p:ph type="title"/>
+          </p:nvPr>
+        </p:nvSpPr>
+        <p:spPr/>
+        <p:txBody>
+          <a:bodyPr/>
+          <a:lstStyle/>
+          <a:p>
+            <a:r>
+              <a:rPr lang="ru-RU" dirty="0"/>
+              <a:t>Обучение моделей</a:t>
+            </a:r>
+          </a:p>
+        </p:txBody>
+      </p:sp>
+      <p:sp>
+        <p:nvSpPr>
+          <p:cNvPr id="6" name="Текст 5">
+            <a:extLst>
+              <a:ext uri="{FF2B5EF4-FFF2-40B4-BE49-F238E27FC236}">
+                <a16:creationId xmlns:a16="http://schemas.microsoft.com/office/drawing/2014/main" id="{87F297E4-9695-684A-A8A3-54FEC946000F}"/>
+              </a:ext>
+            </a:extLst>
+          </p:cNvPr>
+          <p:cNvSpPr>
+            <a:spLocks noGrp="1"/>
+          </p:cNvSpPr>
+          <p:nvPr>
+            <p:ph type="body" sz="quarter" idx="12"/>
+          </p:nvPr>
+        </p:nvSpPr>
+        <p:spPr>
+          <a:xfrm>
+            <a:off x="585899" y="2379663"/>
+            <a:ext cx="11185798" cy="2919450"/>
+          </a:xfrm>
+        </p:spPr>
+        <p:txBody>
+          <a:bodyPr>
+            <a:normAutofit/>
+          </a:bodyPr>
+          <a:lstStyle/>
+          <a:p>
+            <a:pPr rtl="0">
+              <a:spcBef>
+                <a:spcPts val="0"/>
+              </a:spcBef>
+              <a:spcAft>
+                <a:spcPts val="0"/>
+              </a:spcAft>
+            </a:pPr>
+            <a:r>
+              <a:rPr lang="ru-RU" sz="1800" b="0" i="0" u="none" strike="noStrike" dirty="0">
+                <a:solidFill>
+                  <a:srgbClr val="0F2C68"/>
+                </a:solidFill>
+                <a:effectLst/>
+                <a:latin typeface="Arial" panose="020B0604020202020204" pitchFamily="34" charset="0"/>
+              </a:rPr>
+              <a:t>Были использованы следующие модели для каждой страны: </a:t>
+            </a:r>
+          </a:p>
+          <a:p>
+            <a:pPr rtl="0">
+              <a:spcBef>
+                <a:spcPts val="0"/>
+              </a:spcBef>
+              <a:spcAft>
+                <a:spcPts val="0"/>
+              </a:spcAft>
+            </a:pPr>
+            <a:endParaRPr lang="ru-RU" b="0" dirty="0">
+              <a:effectLst/>
+            </a:endParaRPr>
+          </a:p>
+          <a:p>
+            <a:pPr rtl="0" fontAlgn="base">
+              <a:spcBef>
+                <a:spcPts val="0"/>
+              </a:spcBef>
+              <a:spcAft>
+                <a:spcPts val="0"/>
+              </a:spcAft>
+              <a:buFont typeface="Arial" panose="020B0604020202020204" pitchFamily="34" charset="0"/>
+              <a:buChar char="•"/>
+            </a:pPr>
+            <a:r>
+              <a:rPr lang="ru-RU" sz="1800" b="0" i="0" u="none" strike="noStrike" dirty="0">
+                <a:solidFill>
+                  <a:srgbClr val="0F2C68"/>
+                </a:solidFill>
+                <a:effectLst/>
+                <a:latin typeface="Arial" panose="020B0604020202020204" pitchFamily="34" charset="0"/>
+              </a:rPr>
+              <a:t>Модель линейной регрессии</a:t>
+            </a:r>
+            <a:r>
+              <a:rPr lang="en-US" sz="1800" b="0" i="0" u="none" strike="noStrike" dirty="0">
+                <a:solidFill>
+                  <a:srgbClr val="0F2C68"/>
+                </a:solidFill>
+                <a:effectLst/>
+                <a:latin typeface="Arial" panose="020B0604020202020204" pitchFamily="34" charset="0"/>
+              </a:rPr>
+              <a:t>;</a:t>
+            </a:r>
+            <a:endParaRPr lang="en-GB" sz="1800" b="0" i="0" u="none" strike="noStrike" dirty="0">
+              <a:solidFill>
+                <a:srgbClr val="0F2C68"/>
+              </a:solidFill>
+              <a:effectLst/>
+              <a:latin typeface="Arial" panose="020B0604020202020204" pitchFamily="34" charset="0"/>
+            </a:endParaRPr>
+          </a:p>
+          <a:p>
+            <a:pPr rtl="0" fontAlgn="base">
+              <a:spcBef>
+                <a:spcPts val="0"/>
+              </a:spcBef>
+              <a:spcAft>
+                <a:spcPts val="0"/>
+              </a:spcAft>
+              <a:buFont typeface="Arial" panose="020B0604020202020204" pitchFamily="34" charset="0"/>
+              <a:buChar char="•"/>
+            </a:pPr>
+            <a:r>
+              <a:rPr lang="ru-RU" sz="1800" b="0" i="0" u="none" strike="noStrike" dirty="0">
+                <a:solidFill>
+                  <a:srgbClr val="0F2C68"/>
+                </a:solidFill>
+                <a:effectLst/>
+                <a:latin typeface="Arial" panose="020B0604020202020204" pitchFamily="34" charset="0"/>
+              </a:rPr>
+              <a:t>модель </a:t>
+            </a:r>
+            <a:r>
+              <a:rPr lang="en-GB" sz="1800" b="0" i="0" u="none" strike="noStrike" dirty="0">
+                <a:solidFill>
+                  <a:srgbClr val="0F2C68"/>
+                </a:solidFill>
+                <a:effectLst/>
+                <a:latin typeface="Arial" panose="020B0604020202020204" pitchFamily="34" charset="0"/>
+              </a:rPr>
+              <a:t>SVM (Support Vector Machine);</a:t>
+            </a:r>
+          </a:p>
+          <a:p>
+            <a:pPr rtl="0" fontAlgn="base">
+              <a:spcBef>
+                <a:spcPts val="0"/>
+              </a:spcBef>
+              <a:spcAft>
+                <a:spcPts val="0"/>
+              </a:spcAft>
+              <a:buFont typeface="Arial" panose="020B0604020202020204" pitchFamily="34" charset="0"/>
+              <a:buChar char="•"/>
+            </a:pPr>
+            <a:r>
+              <a:rPr lang="ru-RU" sz="1800" b="0" i="0" u="none" strike="noStrike" dirty="0">
+                <a:solidFill>
+                  <a:srgbClr val="0F2C68"/>
+                </a:solidFill>
+                <a:effectLst/>
+                <a:latin typeface="Arial" panose="020B0604020202020204" pitchFamily="34" charset="0"/>
+              </a:rPr>
+              <a:t>модель </a:t>
+            </a:r>
+            <a:r>
+              <a:rPr lang="en-GB" sz="1800" b="0" i="0" u="none" strike="noStrike" dirty="0">
+                <a:solidFill>
+                  <a:srgbClr val="0F2C68"/>
+                </a:solidFill>
+                <a:effectLst/>
+                <a:latin typeface="Arial" panose="020B0604020202020204" pitchFamily="34" charset="0"/>
+              </a:rPr>
+              <a:t>Decision Tree;</a:t>
+            </a:r>
+          </a:p>
+          <a:p>
+            <a:pPr rtl="0" fontAlgn="base">
+              <a:spcBef>
+                <a:spcPts val="0"/>
+              </a:spcBef>
+              <a:spcAft>
+                <a:spcPts val="0"/>
+              </a:spcAft>
+              <a:buFont typeface="Arial" panose="020B0604020202020204" pitchFamily="34" charset="0"/>
+              <a:buChar char="•"/>
+            </a:pPr>
+            <a:r>
+              <a:rPr lang="ru-RU" sz="1800" b="0" i="0" u="none" strike="noStrike" dirty="0">
+                <a:solidFill>
+                  <a:srgbClr val="0F2C68"/>
+                </a:solidFill>
+                <a:effectLst/>
+                <a:latin typeface="Arial" panose="020B0604020202020204" pitchFamily="34" charset="0"/>
+              </a:rPr>
+              <a:t>модель </a:t>
+            </a:r>
+            <a:r>
+              <a:rPr lang="en-GB" sz="1800" b="0" i="0" u="none" strike="noStrike" dirty="0">
+                <a:solidFill>
+                  <a:srgbClr val="0F2C68"/>
+                </a:solidFill>
+                <a:effectLst/>
+                <a:latin typeface="Arial" panose="020B0604020202020204" pitchFamily="34" charset="0"/>
+              </a:rPr>
+              <a:t>Random Forest;</a:t>
+            </a:r>
+          </a:p>
+          <a:p>
+            <a:pPr rtl="0" fontAlgn="base">
+              <a:spcBef>
+                <a:spcPts val="0"/>
+              </a:spcBef>
+              <a:spcAft>
+                <a:spcPts val="0"/>
+              </a:spcAft>
+              <a:buFont typeface="Arial" panose="020B0604020202020204" pitchFamily="34" charset="0"/>
+              <a:buChar char="•"/>
+            </a:pPr>
+            <a:r>
+              <a:rPr lang="ru-RU" sz="1800" b="0" i="0" u="none" strike="noStrike" dirty="0">
+                <a:solidFill>
+                  <a:srgbClr val="0F2C68"/>
+                </a:solidFill>
+                <a:effectLst/>
+                <a:latin typeface="Arial" panose="020B0604020202020204" pitchFamily="34" charset="0"/>
+              </a:rPr>
+              <a:t>модель </a:t>
+            </a:r>
+            <a:r>
+              <a:rPr lang="en-GB" sz="1800" b="0" i="0" u="none" strike="noStrike" dirty="0" err="1">
+                <a:solidFill>
+                  <a:srgbClr val="0F2C68"/>
+                </a:solidFill>
+                <a:effectLst/>
+                <a:latin typeface="Arial" panose="020B0604020202020204" pitchFamily="34" charset="0"/>
+              </a:rPr>
+              <a:t>CatBoost</a:t>
+            </a:r>
+            <a:r>
+              <a:rPr lang="en-GB" sz="1800" dirty="0">
+                <a:solidFill>
+                  <a:srgbClr val="0F2C68"/>
+                </a:solidFill>
+                <a:latin typeface="Arial" panose="020B0604020202020204" pitchFamily="34" charset="0"/>
+              </a:rPr>
+              <a:t>;</a:t>
+            </a:r>
+            <a:endParaRPr lang="en-GB" sz="1800" b="0" i="0" u="none" strike="noStrike" dirty="0">
+              <a:solidFill>
+                <a:srgbClr val="0F2C68"/>
+              </a:solidFill>
+              <a:effectLst/>
+              <a:latin typeface="Arial" panose="020B0604020202020204" pitchFamily="34" charset="0"/>
+            </a:endParaRPr>
+          </a:p>
+          <a:p>
+            <a:endParaRPr lang="ru-RU" dirty="0"/>
+          </a:p>
+        </p:txBody>
+      </p:sp>
+    </p:spTree>
+    <p:extLst>
+      <p:ext uri="{BB962C8B-B14F-4D97-AF65-F5344CB8AC3E}">
+        <p14:creationId xmlns:p14="http://schemas.microsoft.com/office/powerpoint/2010/main" val="3581150455"/>
+      </p:ext>
+    </p:extLst>
+  </p:cSld>
+  <p:clrMapOvr>
+    <a:masterClrMapping/>
+  </p:clrMapOvr>
+</p:sld>
+</file>
+
+<file path=ppt/slides/slide12.xml><?xml version="1.0" encoding="utf-8"?>
+<p:sld xmlns:a="http://schemas.openxmlformats.org/drawingml/2006/main" xmlns:r="http://schemas.openxmlformats.org/officeDocument/2006/relationships" xmlns:p="http://schemas.openxmlformats.org/presentationml/2006/main">
+  <p:cSld>
+    <p:spTree>
+      <p:nvGrpSpPr>
+        <p:cNvPr id="1" name=""/>
+        <p:cNvGrpSpPr/>
+        <p:nvPr/>
+      </p:nvGrpSpPr>
+      <p:grpSpPr>
+        <a:xfrm>
+          <a:off x="0" y="0"/>
+          <a:ext cx="0" cy="0"/>
+          <a:chOff x="0" y="0"/>
+          <a:chExt cx="0" cy="0"/>
+        </a:xfrm>
+      </p:grpSpPr>
+      <p:sp>
+        <p:nvSpPr>
           <p:cNvPr id="2" name="Текст 1">
             <a:extLst>
               <a:ext uri="{FF2B5EF4-FFF2-40B4-BE49-F238E27FC236}">
@@ -19457,7 +23636,7 @@
 </p:sld>
 </file>
 
-<file path=ppt/slides/slide11.xml><?xml version="1.0" encoding="utf-8"?>
+<file path=ppt/slides/slide13.xml><?xml version="1.0" encoding="utf-8"?>
 <p:sld xmlns:a="http://schemas.openxmlformats.org/drawingml/2006/main" xmlns:r="http://schemas.openxmlformats.org/officeDocument/2006/relationships" xmlns:p="http://schemas.openxmlformats.org/presentationml/2006/main">
   <p:cSld>
     <p:spTree>
@@ -25478,7 +29657,7 @@
 </p:sld>
 </file>
 
-<file path=ppt/slides/slide12.xml><?xml version="1.0" encoding="utf-8"?>
+<file path=ppt/slides/slide14.xml><?xml version="1.0" encoding="utf-8"?>
 <p:sld xmlns:a="http://schemas.openxmlformats.org/drawingml/2006/main" xmlns:r="http://schemas.openxmlformats.org/officeDocument/2006/relationships" xmlns:p="http://schemas.openxmlformats.org/presentationml/2006/main">
   <p:cSld>
     <p:spTree>
@@ -25651,8 +29830,8 @@
           </a:p>
         </p:txBody>
       </p:sp>
-      <mc:AlternateContent xmlns:mc="http://schemas.openxmlformats.org/markup-compatibility/2006">
-        <mc:Choice xmlns:a14="http://schemas.microsoft.com/office/drawing/2010/main" Requires="a14">
+      <mc:AlternateContent xmlns:mc="http://schemas.openxmlformats.org/markup-compatibility/2006" xmlns:a14="http://schemas.microsoft.com/office/drawing/2010/main">
+        <mc:Choice Requires="a14">
           <p:sp>
             <p:nvSpPr>
               <p:cNvPr id="9" name="Заголовок 3">
@@ -25803,7 +29982,7 @@
             </p:txBody>
           </p:sp>
         </mc:Choice>
-        <mc:Fallback>
+        <mc:Fallback xmlns="">
           <p:sp>
             <p:nvSpPr>
               <p:cNvPr id="9" name="Заголовок 3">
@@ -25883,7 +30062,7 @@
 </p:sld>
 </file>
 
-<file path=ppt/slides/slide13.xml><?xml version="1.0" encoding="utf-8"?>
+<file path=ppt/slides/slide15.xml><?xml version="1.0" encoding="utf-8"?>
 <p:sld xmlns:a="http://schemas.openxmlformats.org/drawingml/2006/main" xmlns:r="http://schemas.openxmlformats.org/officeDocument/2006/relationships" xmlns:p="http://schemas.openxmlformats.org/presentationml/2006/main">
   <p:cSld>
     <p:spTree>
@@ -26044,8 +30223,8 @@
         </p:nvSpPr>
         <p:spPr>
           <a:xfrm>
-            <a:off x="585788" y="1447064"/>
-            <a:ext cx="6520092" cy="703205"/>
+            <a:off x="585787" y="1447064"/>
+            <a:ext cx="8307955" cy="703205"/>
           </a:xfrm>
         </p:spPr>
         <p:txBody>
@@ -26068,7 +30247,7 @@
                 <a:ea typeface="+mj-ea"/>
                 <a:cs typeface="+mj-cs"/>
               </a:rPr>
-              <a:t>Топ-5 факторов для каждой страны по </a:t>
+              <a:t>Топ-5 предикторов для каждой страны по </a:t>
             </a:r>
             <a:r>
               <a:rPr lang="en-US" sz="2400" dirty="0" err="1">
@@ -26109,7 +30288,7 @@
         <p:spPr/>
         <p:txBody>
           <a:bodyPr>
-            <a:normAutofit/>
+            <a:normAutofit lnSpcReduction="10000"/>
           </a:bodyPr>
           <a:lstStyle/>
           <a:p>
@@ -26119,7 +30298,7 @@
             </a:pPr>
             <a:r>
               <a:rPr lang="ru-RU" sz="1400" dirty="0"/>
-              <a:t>В Швеции и России решающим фактором выступает состояние здоровья</a:t>
+              <a:t>В Швеции и России решающим предикторов субъективного благополучия выступает состояние здоровья</a:t>
             </a:r>
             <a:endParaRPr lang="en-US" sz="1400" dirty="0"/>
           </a:p>
@@ -28145,7 +32324,7 @@
 </p:sld>
 </file>
 
-<file path=ppt/slides/slide14.xml><?xml version="1.0" encoding="utf-8"?>
+<file path=ppt/slides/slide16.xml><?xml version="1.0" encoding="utf-8"?>
 <p:sld xmlns:a="http://schemas.openxmlformats.org/drawingml/2006/main" xmlns:r="http://schemas.openxmlformats.org/officeDocument/2006/relationships" xmlns:p="http://schemas.openxmlformats.org/presentationml/2006/main">
   <p:cSld>
     <p:spTree>
@@ -28483,7 +32662,7 @@
 </p:sld>
 </file>
 
-<file path=ppt/slides/slide15.xml><?xml version="1.0" encoding="utf-8"?>
+<file path=ppt/slides/slide17.xml><?xml version="1.0" encoding="utf-8"?>
 <p:sld xmlns:a="http://schemas.openxmlformats.org/drawingml/2006/main" xmlns:r="http://schemas.openxmlformats.org/officeDocument/2006/relationships" xmlns:p="http://schemas.openxmlformats.org/presentationml/2006/main">
   <p:cSld>
     <p:spTree>
@@ -41538,125 +45717,10 @@
       </p:grpSpPr>
       <p:sp>
         <p:nvSpPr>
-          <p:cNvPr id="3" name="Заголовок 2">
+          <p:cNvPr id="2" name="Текст 1">
             <a:extLst>
               <a:ext uri="{FF2B5EF4-FFF2-40B4-BE49-F238E27FC236}">
-                <a16:creationId xmlns:a16="http://schemas.microsoft.com/office/drawing/2014/main" id="{E2EAF03B-EC26-1D47-94AC-C75942861D6C}"/>
-              </a:ext>
-            </a:extLst>
-          </p:cNvPr>
-          <p:cNvSpPr>
-            <a:spLocks noGrp="1"/>
-          </p:cNvSpPr>
-          <p:nvPr>
-            <p:ph type="title"/>
-          </p:nvPr>
-        </p:nvSpPr>
-        <p:spPr/>
-        <p:txBody>
-          <a:bodyPr/>
-          <a:lstStyle/>
-          <a:p>
-            <a:r>
-              <a:rPr lang="ru-RU" dirty="0"/>
-              <a:t>Корреляция признаков</a:t>
-            </a:r>
-          </a:p>
-        </p:txBody>
-      </p:sp>
-      <p:sp>
-        <p:nvSpPr>
-          <p:cNvPr id="4" name="Текст 3">
-            <a:extLst>
-              <a:ext uri="{FF2B5EF4-FFF2-40B4-BE49-F238E27FC236}">
-                <a16:creationId xmlns:a16="http://schemas.microsoft.com/office/drawing/2014/main" id="{53356540-7218-FF4B-B6BC-5BD291A372E2}"/>
-              </a:ext>
-            </a:extLst>
-          </p:cNvPr>
-          <p:cNvSpPr>
-            <a:spLocks noGrp="1"/>
-          </p:cNvSpPr>
-          <p:nvPr>
-            <p:ph type="body" sz="quarter" idx="12"/>
-          </p:nvPr>
-        </p:nvSpPr>
-        <p:spPr>
-          <a:xfrm>
-            <a:off x="585896" y="2029015"/>
-            <a:ext cx="11317755" cy="1399985"/>
-          </a:xfrm>
-        </p:spPr>
-        <p:txBody>
-          <a:bodyPr/>
-          <a:lstStyle/>
-          <a:p>
-            <a:pPr marL="285750" lvl="0" indent="-285750">
-              <a:buFont typeface="Arial" panose="020B0604020202020204" pitchFamily="34" charset="0"/>
-              <a:buChar char="•"/>
-            </a:pPr>
-            <a:r>
-              <a:rPr lang="ru-RU" sz="1400" dirty="0">
-                <a:solidFill>
-                  <a:schemeClr val="tx1"/>
-                </a:solidFill>
-              </a:rPr>
-              <a:t>В Швеции наблюдается положительная монотонная связь между уровнем счастья и уровнем финансовой удовлетворенности и доверия к полиции и людям</a:t>
-            </a:r>
-          </a:p>
-          <a:p>
-            <a:pPr marL="285750" indent="-285750">
-              <a:buFont typeface="Arial" panose="020B0604020202020204" pitchFamily="34" charset="0"/>
-              <a:buChar char="•"/>
-            </a:pPr>
-            <a:r>
-              <a:rPr lang="ru-RU" sz="1400" dirty="0">
-                <a:solidFill>
-                  <a:schemeClr val="tx1"/>
-                </a:solidFill>
-              </a:rPr>
-              <a:t>В Великобритании наиболее значимые корреляции с целевой переменной у признаков, отвечающих за здоровье, финансовое благополучие и доверие полиции</a:t>
-            </a:r>
-          </a:p>
-          <a:p>
-            <a:pPr marL="285750" indent="-285750">
-              <a:buFont typeface="Arial" panose="020B0604020202020204" pitchFamily="34" charset="0"/>
-              <a:buChar char="•"/>
-            </a:pPr>
-            <a:r>
-              <a:rPr lang="ru-RU" sz="1400" dirty="0">
-                <a:solidFill>
-                  <a:schemeClr val="tx1"/>
-                </a:solidFill>
-              </a:rPr>
-              <a:t>В РФ наиболее значимые корреляции с целевой переменной у признаков, отвечающих  за здоровье, финансовую удовлетворенность, возраст</a:t>
-            </a:r>
-          </a:p>
-          <a:p>
-            <a:pPr marL="342900" lvl="0" indent="-342900">
-              <a:lnSpc>
-                <a:spcPct val="150000"/>
-              </a:lnSpc>
-              <a:spcBef>
-                <a:spcPts val="1200"/>
-              </a:spcBef>
-              <a:buFont typeface="Symbol" panose="05050102010706020507" pitchFamily="18" charset="2"/>
-              <a:buChar char=""/>
-            </a:pPr>
-            <a:endParaRPr lang="ru-RU" sz="1400" dirty="0">
-              <a:effectLst/>
-              <a:latin typeface="Times New Roman" panose="02020603050405020304" pitchFamily="18" charset="0"/>
-              <a:ea typeface="Times New Roman" panose="02020603050405020304" pitchFamily="18" charset="0"/>
-              <a:cs typeface="Times New Roman" panose="02020603050405020304" pitchFamily="18" charset="0"/>
-            </a:endParaRPr>
-          </a:p>
-        </p:txBody>
-      </p:sp>
-      <p:sp>
-        <p:nvSpPr>
-          <p:cNvPr id="5" name="Текст 4">
-            <a:extLst>
-              <a:ext uri="{FF2B5EF4-FFF2-40B4-BE49-F238E27FC236}">
-                <a16:creationId xmlns:a16="http://schemas.microsoft.com/office/drawing/2014/main" id="{3EB29DC1-D5D4-FB41-9E2D-AA4750D0CC8B}"/>
+                <a16:creationId xmlns:a16="http://schemas.microsoft.com/office/drawing/2014/main" id="{DA33D5D5-13C7-8644-8CD8-A04CCCE73695}"/>
               </a:ext>
             </a:extLst>
           </p:cNvPr>
@@ -41707,14 +45771,17 @@
               <a:t>“Аналитика больших данных”</a:t>
             </a:r>
           </a:p>
+          <a:p>
+            <a:endParaRPr lang="ru-RU" dirty="0"/>
+          </a:p>
         </p:txBody>
       </p:sp>
       <p:sp>
         <p:nvSpPr>
-          <p:cNvPr id="6" name="Текст 5">
+          <p:cNvPr id="3" name="Текст 2">
             <a:extLst>
               <a:ext uri="{FF2B5EF4-FFF2-40B4-BE49-F238E27FC236}">
-                <a16:creationId xmlns:a16="http://schemas.microsoft.com/office/drawing/2014/main" id="{B5B6DD1A-BEFA-D842-9B7A-78D7BD1A5259}"/>
+                <a16:creationId xmlns:a16="http://schemas.microsoft.com/office/drawing/2014/main" id="{B68095CB-94DB-754D-A4ED-35EBDDB3F749}"/>
               </a:ext>
             </a:extLst>
           </p:cNvPr>
@@ -41740,17 +45807,14 @@
               <a:t>Взаимосвязь социально-экономических факторов и восприятия счастья в странах с разными моделями общественного устройства</a:t>
             </a:r>
           </a:p>
-          <a:p>
-            <a:endParaRPr lang="ru-RU" dirty="0"/>
-          </a:p>
         </p:txBody>
       </p:sp>
       <p:sp>
         <p:nvSpPr>
-          <p:cNvPr id="7" name="Текст 6">
+          <p:cNvPr id="8" name="Текст 7">
             <a:extLst>
               <a:ext uri="{FF2B5EF4-FFF2-40B4-BE49-F238E27FC236}">
-                <a16:creationId xmlns:a16="http://schemas.microsoft.com/office/drawing/2014/main" id="{88968744-3B75-9B47-92FD-77E1E725F232}"/>
+                <a16:creationId xmlns:a16="http://schemas.microsoft.com/office/drawing/2014/main" id="{5FE4DD9E-D443-AF4F-A072-F5C4D494A05A}"/>
               </a:ext>
             </a:extLst>
           </p:cNvPr>
@@ -41773,3188 +45837,156 @@
           </a:p>
         </p:txBody>
       </p:sp>
-      <p:graphicFrame>
-        <p:nvGraphicFramePr>
-          <p:cNvPr id="10" name="Таблица 10">
+      <p:pic>
+        <p:nvPicPr>
+          <p:cNvPr id="11" name="Рисунок 10">
             <a:extLst>
               <a:ext uri="{FF2B5EF4-FFF2-40B4-BE49-F238E27FC236}">
-                <a16:creationId xmlns:a16="http://schemas.microsoft.com/office/drawing/2014/main" id="{586B72BA-30D5-4B6D-9EE8-831F1C33058B}"/>
+                <a16:creationId xmlns:a16="http://schemas.microsoft.com/office/drawing/2014/main" id="{553E8E7F-E309-4BBD-9737-EE71E0A2D511}"/>
               </a:ext>
             </a:extLst>
           </p:cNvPr>
-          <p:cNvGraphicFramePr>
-            <a:graphicFrameLocks noGrp="1"/>
-          </p:cNvGraphicFramePr>
-          <p:nvPr>
-            <p:extLst>
-              <p:ext uri="{D42A27DB-BD31-4B8C-83A1-F6EECF244321}">
-                <p14:modId xmlns:p14="http://schemas.microsoft.com/office/powerpoint/2010/main" val="1678422657"/>
-              </p:ext>
-            </p:extLst>
-          </p:nvPr>
-        </p:nvGraphicFramePr>
-        <p:xfrm>
-          <a:off x="710817" y="4803087"/>
-          <a:ext cx="5245561" cy="1338604"/>
-        </p:xfrm>
-        <a:graphic>
-          <a:graphicData uri="http://schemas.openxmlformats.org/drawingml/2006/table">
-            <a:tbl>
-              <a:tblPr firstRow="1" bandRow="1">
-                <a:tableStyleId>{5C22544A-7EE6-4342-B048-85BDC9FD1C3A}</a:tableStyleId>
-              </a:tblPr>
-              <a:tblGrid>
-                <a:gridCol w="2744652">
-                  <a:extLst>
-                    <a:ext uri="{9D8B030D-6E8A-4147-A177-3AD203B41FA5}">
-                      <a16:colId xmlns:a16="http://schemas.microsoft.com/office/drawing/2014/main" val="281395215"/>
-                    </a:ext>
-                  </a:extLst>
-                </a:gridCol>
-                <a:gridCol w="1506528">
-                  <a:extLst>
-                    <a:ext uri="{9D8B030D-6E8A-4147-A177-3AD203B41FA5}">
-                      <a16:colId xmlns:a16="http://schemas.microsoft.com/office/drawing/2014/main" val="454134994"/>
-                    </a:ext>
-                  </a:extLst>
-                </a:gridCol>
-                <a:gridCol w="994381">
-                  <a:extLst>
-                    <a:ext uri="{9D8B030D-6E8A-4147-A177-3AD203B41FA5}">
-                      <a16:colId xmlns:a16="http://schemas.microsoft.com/office/drawing/2014/main" val="4245603752"/>
-                    </a:ext>
-                  </a:extLst>
-                </a:gridCol>
-              </a:tblGrid>
-              <a:tr h="207692">
-                <a:tc>
-                  <a:txBody>
-                    <a:bodyPr/>
-                    <a:lstStyle/>
-                    <a:p>
-                      <a:pPr>
-                        <a:lnSpc>
-                          <a:spcPct val="150000"/>
-                        </a:lnSpc>
-                        <a:spcBef>
-                          <a:spcPts val="1200"/>
-                        </a:spcBef>
-                      </a:pPr>
-                      <a:r>
-                        <a:rPr lang="ru-RU" sz="1200" dirty="0">
-                          <a:solidFill>
-                            <a:schemeClr val="tx1"/>
-                          </a:solidFill>
-                          <a:effectLst/>
-                          <a:latin typeface="Times New Roman" panose="02020603050405020304" pitchFamily="18" charset="0"/>
-                          <a:ea typeface="Calibri" panose="020F0502020204030204" pitchFamily="34" charset="0"/>
-                          <a:cs typeface="Times New Roman" panose="02020603050405020304" pitchFamily="18" charset="0"/>
-                        </a:rPr>
-                        <a:t>Переменная для Швеции</a:t>
-                      </a:r>
-                      <a:endParaRPr lang="ru-RU" sz="1100" dirty="0">
-                        <a:solidFill>
-                          <a:schemeClr val="tx1"/>
-                        </a:solidFill>
-                        <a:effectLst/>
-                        <a:latin typeface="Calibri" panose="020F0502020204030204" pitchFamily="34" charset="0"/>
-                        <a:ea typeface="Calibri" panose="020F0502020204030204" pitchFamily="34" charset="0"/>
-                        <a:cs typeface="Times New Roman" panose="02020603050405020304" pitchFamily="18" charset="0"/>
-                      </a:endParaRPr>
-                    </a:p>
-                  </a:txBody>
-                  <a:tcPr marL="68580" marR="68580" marT="0" marB="0">
-                    <a:lnL w="9525" cap="flat" cmpd="sng" algn="ctr">
-                      <a:solidFill>
-                        <a:schemeClr val="tx1"/>
-                      </a:solidFill>
-                      <a:prstDash val="solid"/>
-                      <a:round/>
-                      <a:headEnd type="none" w="med" len="med"/>
-                      <a:tailEnd type="none" w="med" len="med"/>
-                    </a:lnL>
-                    <a:lnR w="9525" cap="flat" cmpd="sng" algn="ctr">
-                      <a:solidFill>
-                        <a:schemeClr val="tx1"/>
-                      </a:solidFill>
-                      <a:prstDash val="solid"/>
-                      <a:round/>
-                      <a:headEnd type="none" w="med" len="med"/>
-                      <a:tailEnd type="none" w="med" len="med"/>
-                    </a:lnR>
-                    <a:lnT w="9525" cap="flat" cmpd="sng" algn="ctr">
-                      <a:solidFill>
-                        <a:schemeClr val="tx1"/>
-                      </a:solidFill>
-                      <a:prstDash val="solid"/>
-                      <a:round/>
-                      <a:headEnd type="none" w="med" len="med"/>
-                      <a:tailEnd type="none" w="med" len="med"/>
-                    </a:lnT>
-                    <a:lnB w="9525" cap="flat" cmpd="sng" algn="ctr">
-                      <a:solidFill>
-                        <a:schemeClr val="tx1"/>
-                      </a:solidFill>
-                      <a:prstDash val="solid"/>
-                      <a:round/>
-                      <a:headEnd type="none" w="med" len="med"/>
-                      <a:tailEnd type="none" w="med" len="med"/>
-                    </a:lnB>
-                    <a:noFill/>
-                  </a:tcPr>
-                </a:tc>
-                <a:tc>
-                  <a:txBody>
-                    <a:bodyPr/>
-                    <a:lstStyle/>
-                    <a:p>
-                      <a:pPr>
-                        <a:lnSpc>
-                          <a:spcPct val="150000"/>
-                        </a:lnSpc>
-                        <a:spcBef>
-                          <a:spcPts val="1200"/>
-                        </a:spcBef>
-                      </a:pPr>
-                      <a:r>
-                        <a:rPr lang="ru-RU" sz="1100" dirty="0">
-                          <a:solidFill>
-                            <a:schemeClr val="tx1"/>
-                          </a:solidFill>
-                          <a:effectLst/>
-                          <a:latin typeface="Calibri" panose="020F0502020204030204" pitchFamily="34" charset="0"/>
-                          <a:ea typeface="Calibri" panose="020F0502020204030204" pitchFamily="34" charset="0"/>
-                          <a:cs typeface="Times New Roman" panose="02020603050405020304" pitchFamily="18" charset="0"/>
-                        </a:rPr>
-                        <a:t>Корреляция с </a:t>
-                      </a:r>
-                      <a:r>
-                        <a:rPr lang="en-US" sz="1100" dirty="0">
-                          <a:solidFill>
-                            <a:schemeClr val="tx1"/>
-                          </a:solidFill>
-                          <a:effectLst/>
-                          <a:latin typeface="Calibri" panose="020F0502020204030204" pitchFamily="34" charset="0"/>
-                          <a:ea typeface="Calibri" panose="020F0502020204030204" pitchFamily="34" charset="0"/>
-                          <a:cs typeface="Times New Roman" panose="02020603050405020304" pitchFamily="18" charset="0"/>
-                        </a:rPr>
-                        <a:t>happy</a:t>
-                      </a:r>
-                      <a:endParaRPr lang="ru-RU" sz="1100" dirty="0">
-                        <a:solidFill>
-                          <a:schemeClr val="tx1"/>
-                        </a:solidFill>
-                        <a:effectLst/>
-                        <a:latin typeface="Calibri" panose="020F0502020204030204" pitchFamily="34" charset="0"/>
-                        <a:ea typeface="Calibri" panose="020F0502020204030204" pitchFamily="34" charset="0"/>
-                        <a:cs typeface="Times New Roman" panose="02020603050405020304" pitchFamily="18" charset="0"/>
-                      </a:endParaRPr>
-                    </a:p>
-                  </a:txBody>
-                  <a:tcPr marL="68580" marR="68580" marT="0" marB="0">
-                    <a:lnL w="9525" cap="flat" cmpd="sng" algn="ctr">
-                      <a:solidFill>
-                        <a:schemeClr val="tx1"/>
-                      </a:solidFill>
-                      <a:prstDash val="solid"/>
-                      <a:round/>
-                      <a:headEnd type="none" w="med" len="med"/>
-                      <a:tailEnd type="none" w="med" len="med"/>
-                    </a:lnL>
-                    <a:lnR w="9525" cap="flat" cmpd="sng" algn="ctr">
-                      <a:solidFill>
-                        <a:schemeClr val="tx1"/>
-                      </a:solidFill>
-                      <a:prstDash val="solid"/>
-                      <a:round/>
-                      <a:headEnd type="none" w="med" len="med"/>
-                      <a:tailEnd type="none" w="med" len="med"/>
-                    </a:lnR>
-                    <a:lnT w="9525" cap="flat" cmpd="sng" algn="ctr">
-                      <a:solidFill>
-                        <a:schemeClr val="tx1"/>
-                      </a:solidFill>
-                      <a:prstDash val="solid"/>
-                      <a:round/>
-                      <a:headEnd type="none" w="med" len="med"/>
-                      <a:tailEnd type="none" w="med" len="med"/>
-                    </a:lnT>
-                    <a:lnB w="9525" cap="flat" cmpd="sng" algn="ctr">
-                      <a:solidFill>
-                        <a:schemeClr val="tx1"/>
-                      </a:solidFill>
-                      <a:prstDash val="solid"/>
-                      <a:round/>
-                      <a:headEnd type="none" w="med" len="med"/>
-                      <a:tailEnd type="none" w="med" len="med"/>
-                    </a:lnB>
-                    <a:noFill/>
-                  </a:tcPr>
-                </a:tc>
-                <a:tc>
-                  <a:txBody>
-                    <a:bodyPr/>
-                    <a:lstStyle/>
-                    <a:p>
-                      <a:pPr>
-                        <a:lnSpc>
-                          <a:spcPct val="150000"/>
-                        </a:lnSpc>
-                        <a:spcBef>
-                          <a:spcPts val="1200"/>
-                        </a:spcBef>
-                      </a:pPr>
-                      <a:r>
-                        <a:rPr lang="ru-RU" sz="1100" dirty="0">
-                          <a:solidFill>
-                            <a:schemeClr val="tx1"/>
-                          </a:solidFill>
-                          <a:effectLst/>
-                          <a:latin typeface="Calibri" panose="020F0502020204030204" pitchFamily="34" charset="0"/>
-                          <a:ea typeface="Calibri" panose="020F0502020204030204" pitchFamily="34" charset="0"/>
-                          <a:cs typeface="Times New Roman" panose="02020603050405020304" pitchFamily="18" charset="0"/>
-                        </a:rPr>
-                        <a:t>Значимость</a:t>
-                      </a:r>
-                    </a:p>
-                  </a:txBody>
-                  <a:tcPr marL="68580" marR="68580" marT="0" marB="0">
-                    <a:lnL w="9525" cap="flat" cmpd="sng" algn="ctr">
-                      <a:solidFill>
-                        <a:schemeClr val="tx1"/>
-                      </a:solidFill>
-                      <a:prstDash val="solid"/>
-                      <a:round/>
-                      <a:headEnd type="none" w="med" len="med"/>
-                      <a:tailEnd type="none" w="med" len="med"/>
-                    </a:lnL>
-                    <a:lnR w="9525" cap="flat" cmpd="sng" algn="ctr">
-                      <a:solidFill>
-                        <a:schemeClr val="tx1"/>
-                      </a:solidFill>
-                      <a:prstDash val="solid"/>
-                      <a:round/>
-                      <a:headEnd type="none" w="med" len="med"/>
-                      <a:tailEnd type="none" w="med" len="med"/>
-                    </a:lnR>
-                    <a:lnT w="9525" cap="flat" cmpd="sng" algn="ctr">
-                      <a:solidFill>
-                        <a:schemeClr val="tx1"/>
-                      </a:solidFill>
-                      <a:prstDash val="solid"/>
-                      <a:round/>
-                      <a:headEnd type="none" w="med" len="med"/>
-                      <a:tailEnd type="none" w="med" len="med"/>
-                    </a:lnT>
-                    <a:lnB w="9525" cap="flat" cmpd="sng" algn="ctr">
-                      <a:solidFill>
-                        <a:schemeClr val="tx1"/>
-                      </a:solidFill>
-                      <a:prstDash val="solid"/>
-                      <a:round/>
-                      <a:headEnd type="none" w="med" len="med"/>
-                      <a:tailEnd type="none" w="med" len="med"/>
-                    </a:lnB>
-                    <a:noFill/>
-                  </a:tcPr>
-                </a:tc>
-                <a:extLst>
-                  <a:ext uri="{0D108BD9-81ED-4DB2-BD59-A6C34878D82A}">
-                    <a16:rowId xmlns:a16="http://schemas.microsoft.com/office/drawing/2014/main" val="2492690188"/>
-                  </a:ext>
-                </a:extLst>
-              </a:tr>
-              <a:tr h="207692">
-                <a:tc>
-                  <a:txBody>
-                    <a:bodyPr/>
-                    <a:lstStyle/>
-                    <a:p>
-                      <a:pPr>
-                        <a:lnSpc>
-                          <a:spcPct val="150000"/>
-                        </a:lnSpc>
-                        <a:spcBef>
-                          <a:spcPts val="1200"/>
-                        </a:spcBef>
-                      </a:pPr>
-                      <a:r>
-                        <a:rPr lang="en-US" sz="1100" dirty="0">
-                          <a:solidFill>
-                            <a:schemeClr val="tx1"/>
-                          </a:solidFill>
-                          <a:effectLst/>
-                          <a:latin typeface="Calibri" panose="020F0502020204030204" pitchFamily="34" charset="0"/>
-                          <a:ea typeface="Calibri" panose="020F0502020204030204" pitchFamily="34" charset="0"/>
-                          <a:cs typeface="Times New Roman" panose="02020603050405020304" pitchFamily="18" charset="0"/>
-                        </a:rPr>
-                        <a:t>Health</a:t>
-                      </a:r>
-                      <a:r>
-                        <a:rPr lang="ru-RU" sz="1100" dirty="0">
-                          <a:solidFill>
-                            <a:schemeClr val="tx1"/>
-                          </a:solidFill>
-                          <a:effectLst/>
-                          <a:latin typeface="Calibri" panose="020F0502020204030204" pitchFamily="34" charset="0"/>
-                          <a:ea typeface="Calibri" panose="020F0502020204030204" pitchFamily="34" charset="0"/>
-                          <a:cs typeface="Times New Roman" panose="02020603050405020304" pitchFamily="18" charset="0"/>
-                        </a:rPr>
-                        <a:t> </a:t>
-                      </a:r>
-                    </a:p>
-                  </a:txBody>
-                  <a:tcPr marL="68580" marR="68580" marT="0" marB="0">
-                    <a:lnL w="9525" cap="flat" cmpd="sng" algn="ctr">
-                      <a:solidFill>
-                        <a:schemeClr val="tx1"/>
-                      </a:solidFill>
-                      <a:prstDash val="solid"/>
-                      <a:round/>
-                      <a:headEnd type="none" w="med" len="med"/>
-                      <a:tailEnd type="none" w="med" len="med"/>
-                    </a:lnL>
-                    <a:lnR w="9525" cap="flat" cmpd="sng" algn="ctr">
-                      <a:solidFill>
-                        <a:schemeClr val="tx1"/>
-                      </a:solidFill>
-                      <a:prstDash val="solid"/>
-                      <a:round/>
-                      <a:headEnd type="none" w="med" len="med"/>
-                      <a:tailEnd type="none" w="med" len="med"/>
-                    </a:lnR>
-                    <a:lnT w="9525" cap="flat" cmpd="sng" algn="ctr">
-                      <a:solidFill>
-                        <a:schemeClr val="tx1"/>
-                      </a:solidFill>
-                      <a:prstDash val="solid"/>
-                      <a:round/>
-                      <a:headEnd type="none" w="med" len="med"/>
-                      <a:tailEnd type="none" w="med" len="med"/>
-                    </a:lnT>
-                    <a:lnB w="9525" cap="flat" cmpd="sng" algn="ctr">
-                      <a:solidFill>
-                        <a:schemeClr val="tx1"/>
-                      </a:solidFill>
-                      <a:prstDash val="solid"/>
-                      <a:round/>
-                      <a:headEnd type="none" w="med" len="med"/>
-                      <a:tailEnd type="none" w="med" len="med"/>
-                    </a:lnB>
-                    <a:noFill/>
-                  </a:tcPr>
-                </a:tc>
-                <a:tc>
-                  <a:txBody>
-                    <a:bodyPr/>
-                    <a:lstStyle/>
-                    <a:p>
-                      <a:pPr>
-                        <a:lnSpc>
-                          <a:spcPct val="150000"/>
-                        </a:lnSpc>
-                        <a:spcBef>
-                          <a:spcPts val="1200"/>
-                        </a:spcBef>
-                      </a:pPr>
-                      <a:r>
-                        <a:rPr lang="en-US" sz="1200" dirty="0">
-                          <a:solidFill>
-                            <a:schemeClr val="tx1"/>
-                          </a:solidFill>
-                          <a:effectLst/>
-                          <a:latin typeface="Times New Roman" panose="02020603050405020304" pitchFamily="18" charset="0"/>
-                          <a:ea typeface="Calibri" panose="020F0502020204030204" pitchFamily="34" charset="0"/>
-                          <a:cs typeface="Times New Roman" panose="02020603050405020304" pitchFamily="18" charset="0"/>
-                        </a:rPr>
-                        <a:t>-0.3</a:t>
-                      </a:r>
-                      <a:endParaRPr lang="ru-RU" sz="1100" dirty="0">
-                        <a:solidFill>
-                          <a:schemeClr val="tx1"/>
-                        </a:solidFill>
-                        <a:effectLst/>
-                        <a:latin typeface="Calibri" panose="020F0502020204030204" pitchFamily="34" charset="0"/>
-                        <a:ea typeface="Calibri" panose="020F0502020204030204" pitchFamily="34" charset="0"/>
-                        <a:cs typeface="Times New Roman" panose="02020603050405020304" pitchFamily="18" charset="0"/>
-                      </a:endParaRPr>
-                    </a:p>
-                  </a:txBody>
-                  <a:tcPr marL="68580" marR="68580" marT="0" marB="0">
-                    <a:lnL w="9525" cap="flat" cmpd="sng" algn="ctr">
-                      <a:solidFill>
-                        <a:schemeClr val="tx1"/>
-                      </a:solidFill>
-                      <a:prstDash val="solid"/>
-                      <a:round/>
-                      <a:headEnd type="none" w="med" len="med"/>
-                      <a:tailEnd type="none" w="med" len="med"/>
-                    </a:lnL>
-                    <a:lnR w="9525" cap="flat" cmpd="sng" algn="ctr">
-                      <a:solidFill>
-                        <a:schemeClr val="tx1"/>
-                      </a:solidFill>
-                      <a:prstDash val="solid"/>
-                      <a:round/>
-                      <a:headEnd type="none" w="med" len="med"/>
-                      <a:tailEnd type="none" w="med" len="med"/>
-                    </a:lnR>
-                    <a:lnT w="9525" cap="flat" cmpd="sng" algn="ctr">
-                      <a:solidFill>
-                        <a:schemeClr val="tx1"/>
-                      </a:solidFill>
-                      <a:prstDash val="solid"/>
-                      <a:round/>
-                      <a:headEnd type="none" w="med" len="med"/>
-                      <a:tailEnd type="none" w="med" len="med"/>
-                    </a:lnT>
-                    <a:lnB w="9525" cap="flat" cmpd="sng" algn="ctr">
-                      <a:solidFill>
-                        <a:schemeClr val="tx1"/>
-                      </a:solidFill>
-                      <a:prstDash val="solid"/>
-                      <a:round/>
-                      <a:headEnd type="none" w="med" len="med"/>
-                      <a:tailEnd type="none" w="med" len="med"/>
-                    </a:lnB>
-                    <a:noFill/>
-                  </a:tcPr>
-                </a:tc>
-                <a:tc>
-                  <a:txBody>
-                    <a:bodyPr/>
-                    <a:lstStyle/>
-                    <a:p>
-                      <a:pPr>
-                        <a:lnSpc>
-                          <a:spcPct val="150000"/>
-                        </a:lnSpc>
-                        <a:spcBef>
-                          <a:spcPts val="1200"/>
-                        </a:spcBef>
-                      </a:pPr>
-                      <a:r>
-                        <a:rPr lang="ru-RU" sz="1100" dirty="0">
-                          <a:solidFill>
-                            <a:schemeClr val="tx1"/>
-                          </a:solidFill>
-                          <a:effectLst/>
-                          <a:latin typeface="Calibri" panose="020F0502020204030204" pitchFamily="34" charset="0"/>
-                          <a:ea typeface="Calibri" panose="020F0502020204030204" pitchFamily="34" charset="0"/>
-                          <a:cs typeface="Times New Roman" panose="02020603050405020304" pitchFamily="18" charset="0"/>
-                        </a:rPr>
-                        <a:t>Значима</a:t>
-                      </a:r>
-                    </a:p>
-                  </a:txBody>
-                  <a:tcPr marL="68580" marR="68580" marT="0" marB="0">
-                    <a:lnL w="9525" cap="flat" cmpd="sng" algn="ctr">
-                      <a:solidFill>
-                        <a:schemeClr val="tx1"/>
-                      </a:solidFill>
-                      <a:prstDash val="solid"/>
-                      <a:round/>
-                      <a:headEnd type="none" w="med" len="med"/>
-                      <a:tailEnd type="none" w="med" len="med"/>
-                    </a:lnL>
-                    <a:lnR w="9525" cap="flat" cmpd="sng" algn="ctr">
-                      <a:solidFill>
-                        <a:schemeClr val="tx1"/>
-                      </a:solidFill>
-                      <a:prstDash val="solid"/>
-                      <a:round/>
-                      <a:headEnd type="none" w="med" len="med"/>
-                      <a:tailEnd type="none" w="med" len="med"/>
-                    </a:lnR>
-                    <a:lnT w="9525" cap="flat" cmpd="sng" algn="ctr">
-                      <a:solidFill>
-                        <a:schemeClr val="tx1"/>
-                      </a:solidFill>
-                      <a:prstDash val="solid"/>
-                      <a:round/>
-                      <a:headEnd type="none" w="med" len="med"/>
-                      <a:tailEnd type="none" w="med" len="med"/>
-                    </a:lnT>
-                    <a:lnB w="9525" cap="flat" cmpd="sng" algn="ctr">
-                      <a:solidFill>
-                        <a:schemeClr val="tx1"/>
-                      </a:solidFill>
-                      <a:prstDash val="solid"/>
-                      <a:round/>
-                      <a:headEnd type="none" w="med" len="med"/>
-                      <a:tailEnd type="none" w="med" len="med"/>
-                    </a:lnB>
-                    <a:noFill/>
-                  </a:tcPr>
-                </a:tc>
-                <a:extLst>
-                  <a:ext uri="{0D108BD9-81ED-4DB2-BD59-A6C34878D82A}">
-                    <a16:rowId xmlns:a16="http://schemas.microsoft.com/office/drawing/2014/main" val="695215291"/>
-                  </a:ext>
-                </a:extLst>
-              </a:tr>
-              <a:tr h="189126">
-                <a:tc>
-                  <a:txBody>
-                    <a:bodyPr/>
-                    <a:lstStyle/>
-                    <a:p>
-                      <a:pPr>
-                        <a:lnSpc>
-                          <a:spcPct val="150000"/>
-                        </a:lnSpc>
-                        <a:spcBef>
-                          <a:spcPts val="1200"/>
-                        </a:spcBef>
-                      </a:pPr>
-                      <a:r>
-                        <a:rPr lang="en-US" sz="1100" dirty="0" err="1">
-                          <a:solidFill>
-                            <a:schemeClr val="tx1"/>
-                          </a:solidFill>
-                          <a:effectLst/>
-                          <a:latin typeface="Calibri" panose="020F0502020204030204" pitchFamily="34" charset="0"/>
-                          <a:ea typeface="Calibri" panose="020F0502020204030204" pitchFamily="34" charset="0"/>
-                          <a:cs typeface="Times New Roman" panose="02020603050405020304" pitchFamily="18" charset="0"/>
-                        </a:rPr>
-                        <a:t>hincfel</a:t>
-                      </a:r>
-                      <a:endParaRPr lang="ru-RU" sz="1100" dirty="0">
-                        <a:solidFill>
-                          <a:schemeClr val="tx1"/>
-                        </a:solidFill>
-                        <a:effectLst/>
-                        <a:latin typeface="Calibri" panose="020F0502020204030204" pitchFamily="34" charset="0"/>
-                        <a:ea typeface="Calibri" panose="020F0502020204030204" pitchFamily="34" charset="0"/>
-                        <a:cs typeface="Times New Roman" panose="02020603050405020304" pitchFamily="18" charset="0"/>
-                      </a:endParaRPr>
-                    </a:p>
-                  </a:txBody>
-                  <a:tcPr marL="68580" marR="68580" marT="0" marB="0">
-                    <a:lnL w="9525" cap="flat" cmpd="sng" algn="ctr">
-                      <a:solidFill>
-                        <a:schemeClr val="tx1"/>
-                      </a:solidFill>
-                      <a:prstDash val="solid"/>
-                      <a:round/>
-                      <a:headEnd type="none" w="med" len="med"/>
-                      <a:tailEnd type="none" w="med" len="med"/>
-                    </a:lnL>
-                    <a:lnR w="9525" cap="flat" cmpd="sng" algn="ctr">
-                      <a:solidFill>
-                        <a:schemeClr val="tx1"/>
-                      </a:solidFill>
-                      <a:prstDash val="solid"/>
-                      <a:round/>
-                      <a:headEnd type="none" w="med" len="med"/>
-                      <a:tailEnd type="none" w="med" len="med"/>
-                    </a:lnR>
-                    <a:lnT w="9525" cap="flat" cmpd="sng" algn="ctr">
-                      <a:solidFill>
-                        <a:schemeClr val="tx1"/>
-                      </a:solidFill>
-                      <a:prstDash val="solid"/>
-                      <a:round/>
-                      <a:headEnd type="none" w="med" len="med"/>
-                      <a:tailEnd type="none" w="med" len="med"/>
-                    </a:lnT>
-                    <a:lnB w="9525" cap="flat" cmpd="sng" algn="ctr">
-                      <a:solidFill>
-                        <a:schemeClr val="tx1"/>
-                      </a:solidFill>
-                      <a:prstDash val="solid"/>
-                      <a:round/>
-                      <a:headEnd type="none" w="med" len="med"/>
-                      <a:tailEnd type="none" w="med" len="med"/>
-                    </a:lnB>
-                    <a:noFill/>
-                  </a:tcPr>
-                </a:tc>
-                <a:tc>
-                  <a:txBody>
-                    <a:bodyPr/>
-                    <a:lstStyle/>
-                    <a:p>
-                      <a:pPr>
-                        <a:lnSpc>
-                          <a:spcPct val="150000"/>
-                        </a:lnSpc>
-                        <a:spcBef>
-                          <a:spcPts val="1200"/>
-                        </a:spcBef>
-                      </a:pPr>
-                      <a:r>
-                        <a:rPr lang="en-US" sz="1200" dirty="0">
-                          <a:solidFill>
-                            <a:schemeClr val="tx1"/>
-                          </a:solidFill>
-                          <a:effectLst/>
-                          <a:latin typeface="Times New Roman" panose="02020603050405020304" pitchFamily="18" charset="0"/>
-                          <a:ea typeface="Calibri" panose="020F0502020204030204" pitchFamily="34" charset="0"/>
-                          <a:cs typeface="Times New Roman" panose="02020603050405020304" pitchFamily="18" charset="0"/>
-                        </a:rPr>
-                        <a:t>-0.23</a:t>
-                      </a:r>
-                      <a:endParaRPr lang="ru-RU" sz="1100" dirty="0">
-                        <a:solidFill>
-                          <a:schemeClr val="tx1"/>
-                        </a:solidFill>
-                        <a:effectLst/>
-                        <a:latin typeface="Calibri" panose="020F0502020204030204" pitchFamily="34" charset="0"/>
-                        <a:ea typeface="Calibri" panose="020F0502020204030204" pitchFamily="34" charset="0"/>
-                        <a:cs typeface="Times New Roman" panose="02020603050405020304" pitchFamily="18" charset="0"/>
-                      </a:endParaRPr>
-                    </a:p>
-                  </a:txBody>
-                  <a:tcPr marL="68580" marR="68580" marT="0" marB="0">
-                    <a:lnL w="9525" cap="flat" cmpd="sng" algn="ctr">
-                      <a:solidFill>
-                        <a:schemeClr val="tx1"/>
-                      </a:solidFill>
-                      <a:prstDash val="solid"/>
-                      <a:round/>
-                      <a:headEnd type="none" w="med" len="med"/>
-                      <a:tailEnd type="none" w="med" len="med"/>
-                    </a:lnL>
-                    <a:lnR w="9525" cap="flat" cmpd="sng" algn="ctr">
-                      <a:solidFill>
-                        <a:schemeClr val="tx1"/>
-                      </a:solidFill>
-                      <a:prstDash val="solid"/>
-                      <a:round/>
-                      <a:headEnd type="none" w="med" len="med"/>
-                      <a:tailEnd type="none" w="med" len="med"/>
-                    </a:lnR>
-                    <a:lnT w="9525" cap="flat" cmpd="sng" algn="ctr">
-                      <a:solidFill>
-                        <a:schemeClr val="tx1"/>
-                      </a:solidFill>
-                      <a:prstDash val="solid"/>
-                      <a:round/>
-                      <a:headEnd type="none" w="med" len="med"/>
-                      <a:tailEnd type="none" w="med" len="med"/>
-                    </a:lnT>
-                    <a:lnB w="9525" cap="flat" cmpd="sng" algn="ctr">
-                      <a:solidFill>
-                        <a:schemeClr val="tx1"/>
-                      </a:solidFill>
-                      <a:prstDash val="solid"/>
-                      <a:round/>
-                      <a:headEnd type="none" w="med" len="med"/>
-                      <a:tailEnd type="none" w="med" len="med"/>
-                    </a:lnB>
-                    <a:noFill/>
-                  </a:tcPr>
-                </a:tc>
-                <a:tc>
-                  <a:txBody>
-                    <a:bodyPr/>
-                    <a:lstStyle/>
-                    <a:p>
-                      <a:pPr marL="0" algn="l" defTabSz="914400" rtl="0" eaLnBrk="1" latinLnBrk="0" hangingPunct="1">
-                        <a:lnSpc>
-                          <a:spcPct val="150000"/>
-                        </a:lnSpc>
-                        <a:spcBef>
-                          <a:spcPts val="1200"/>
-                        </a:spcBef>
-                      </a:pPr>
-                      <a:r>
-                        <a:rPr lang="ru-RU" sz="1100" kern="1200" dirty="0">
-                          <a:solidFill>
-                            <a:schemeClr val="tx1"/>
-                          </a:solidFill>
-                          <a:effectLst/>
-                          <a:latin typeface="Calibri" panose="020F0502020204030204" pitchFamily="34" charset="0"/>
-                          <a:ea typeface="Calibri" panose="020F0502020204030204" pitchFamily="34" charset="0"/>
-                          <a:cs typeface="Times New Roman" panose="02020603050405020304" pitchFamily="18" charset="0"/>
-                        </a:rPr>
-                        <a:t>Значима</a:t>
-                      </a:r>
-                    </a:p>
-                  </a:txBody>
-                  <a:tcPr marL="68580" marR="68580" marT="0" marB="0">
-                    <a:lnL w="9525" cap="flat" cmpd="sng" algn="ctr">
-                      <a:solidFill>
-                        <a:schemeClr val="tx1"/>
-                      </a:solidFill>
-                      <a:prstDash val="solid"/>
-                      <a:round/>
-                      <a:headEnd type="none" w="med" len="med"/>
-                      <a:tailEnd type="none" w="med" len="med"/>
-                    </a:lnL>
-                    <a:lnR w="9525" cap="flat" cmpd="sng" algn="ctr">
-                      <a:solidFill>
-                        <a:schemeClr val="tx1"/>
-                      </a:solidFill>
-                      <a:prstDash val="solid"/>
-                      <a:round/>
-                      <a:headEnd type="none" w="med" len="med"/>
-                      <a:tailEnd type="none" w="med" len="med"/>
-                    </a:lnR>
-                    <a:lnT w="9525" cap="flat" cmpd="sng" algn="ctr">
-                      <a:solidFill>
-                        <a:schemeClr val="tx1"/>
-                      </a:solidFill>
-                      <a:prstDash val="solid"/>
-                      <a:round/>
-                      <a:headEnd type="none" w="med" len="med"/>
-                      <a:tailEnd type="none" w="med" len="med"/>
-                    </a:lnT>
-                    <a:lnB w="9525" cap="flat" cmpd="sng" algn="ctr">
-                      <a:solidFill>
-                        <a:schemeClr val="tx1"/>
-                      </a:solidFill>
-                      <a:prstDash val="solid"/>
-                      <a:round/>
-                      <a:headEnd type="none" w="med" len="med"/>
-                      <a:tailEnd type="none" w="med" len="med"/>
-                    </a:lnB>
-                    <a:noFill/>
-                  </a:tcPr>
-                </a:tc>
-                <a:extLst>
-                  <a:ext uri="{0D108BD9-81ED-4DB2-BD59-A6C34878D82A}">
-                    <a16:rowId xmlns:a16="http://schemas.microsoft.com/office/drawing/2014/main" val="3711788390"/>
-                  </a:ext>
-                </a:extLst>
-              </a:tr>
-              <a:tr h="357464">
-                <a:tc>
-                  <a:txBody>
-                    <a:bodyPr/>
-                    <a:lstStyle/>
-                    <a:p>
-                      <a:pPr>
-                        <a:lnSpc>
-                          <a:spcPct val="150000"/>
-                        </a:lnSpc>
-                        <a:spcBef>
-                          <a:spcPts val="1200"/>
-                        </a:spcBef>
-                      </a:pPr>
-                      <a:r>
-                        <a:rPr lang="ru-RU" sz="1200" dirty="0" err="1">
-                          <a:solidFill>
-                            <a:schemeClr val="tx1"/>
-                          </a:solidFill>
-                          <a:effectLst/>
-                          <a:latin typeface="Times New Roman" panose="02020603050405020304" pitchFamily="18" charset="0"/>
-                          <a:ea typeface="Calibri" panose="020F0502020204030204" pitchFamily="34" charset="0"/>
-                          <a:cs typeface="Times New Roman" panose="02020603050405020304" pitchFamily="18" charset="0"/>
-                        </a:rPr>
-                        <a:t>trstp</a:t>
-                      </a:r>
-                      <a:r>
-                        <a:rPr lang="en-US" sz="1200" dirty="0">
-                          <a:solidFill>
-                            <a:schemeClr val="tx1"/>
-                          </a:solidFill>
-                          <a:effectLst/>
-                          <a:latin typeface="Times New Roman" panose="02020603050405020304" pitchFamily="18" charset="0"/>
-                          <a:ea typeface="Calibri" panose="020F0502020204030204" pitchFamily="34" charset="0"/>
-                          <a:cs typeface="Times New Roman" panose="02020603050405020304" pitchFamily="18" charset="0"/>
-                        </a:rPr>
-                        <a:t>lc</a:t>
-                      </a:r>
-                      <a:endParaRPr lang="ru-RU" sz="1100" dirty="0">
-                        <a:solidFill>
-                          <a:schemeClr val="tx1"/>
-                        </a:solidFill>
-                        <a:effectLst/>
-                        <a:latin typeface="Calibri" panose="020F0502020204030204" pitchFamily="34" charset="0"/>
-                        <a:ea typeface="Calibri" panose="020F0502020204030204" pitchFamily="34" charset="0"/>
-                        <a:cs typeface="Times New Roman" panose="02020603050405020304" pitchFamily="18" charset="0"/>
-                      </a:endParaRPr>
-                    </a:p>
-                  </a:txBody>
-                  <a:tcPr marL="68580" marR="68580" marT="0" marB="0">
-                    <a:lnL w="9525" cap="flat" cmpd="sng" algn="ctr">
-                      <a:solidFill>
-                        <a:schemeClr val="tx1"/>
-                      </a:solidFill>
-                      <a:prstDash val="solid"/>
-                      <a:round/>
-                      <a:headEnd type="none" w="med" len="med"/>
-                      <a:tailEnd type="none" w="med" len="med"/>
-                    </a:lnL>
-                    <a:lnR w="9525" cap="flat" cmpd="sng" algn="ctr">
-                      <a:solidFill>
-                        <a:schemeClr val="tx1"/>
-                      </a:solidFill>
-                      <a:prstDash val="solid"/>
-                      <a:round/>
-                      <a:headEnd type="none" w="med" len="med"/>
-                      <a:tailEnd type="none" w="med" len="med"/>
-                    </a:lnR>
-                    <a:lnT w="9525" cap="flat" cmpd="sng" algn="ctr">
-                      <a:solidFill>
-                        <a:schemeClr val="tx1"/>
-                      </a:solidFill>
-                      <a:prstDash val="solid"/>
-                      <a:round/>
-                      <a:headEnd type="none" w="med" len="med"/>
-                      <a:tailEnd type="none" w="med" len="med"/>
-                    </a:lnT>
-                    <a:lnB w="9525" cap="flat" cmpd="sng" algn="ctr">
-                      <a:solidFill>
-                        <a:schemeClr val="tx1"/>
-                      </a:solidFill>
-                      <a:prstDash val="solid"/>
-                      <a:round/>
-                      <a:headEnd type="none" w="med" len="med"/>
-                      <a:tailEnd type="none" w="med" len="med"/>
-                    </a:lnB>
-                    <a:noFill/>
-                  </a:tcPr>
-                </a:tc>
-                <a:tc>
-                  <a:txBody>
-                    <a:bodyPr/>
-                    <a:lstStyle/>
-                    <a:p>
-                      <a:pPr>
-                        <a:lnSpc>
-                          <a:spcPct val="150000"/>
-                        </a:lnSpc>
-                        <a:spcBef>
-                          <a:spcPts val="1200"/>
-                        </a:spcBef>
-                      </a:pPr>
-                      <a:r>
-                        <a:rPr lang="en-US" sz="1200" dirty="0">
-                          <a:solidFill>
-                            <a:schemeClr val="tx1"/>
-                          </a:solidFill>
-                          <a:effectLst/>
-                          <a:latin typeface="Times New Roman" panose="02020603050405020304" pitchFamily="18" charset="0"/>
-                          <a:ea typeface="Calibri" panose="020F0502020204030204" pitchFamily="34" charset="0"/>
-                          <a:cs typeface="Times New Roman" panose="02020603050405020304" pitchFamily="18" charset="0"/>
-                        </a:rPr>
-                        <a:t>0.17</a:t>
-                      </a:r>
-                      <a:endParaRPr lang="ru-RU" sz="1100" dirty="0">
-                        <a:solidFill>
-                          <a:schemeClr val="tx1"/>
-                        </a:solidFill>
-                        <a:effectLst/>
-                        <a:latin typeface="Calibri" panose="020F0502020204030204" pitchFamily="34" charset="0"/>
-                        <a:ea typeface="Calibri" panose="020F0502020204030204" pitchFamily="34" charset="0"/>
-                        <a:cs typeface="Times New Roman" panose="02020603050405020304" pitchFamily="18" charset="0"/>
-                      </a:endParaRPr>
-                    </a:p>
-                  </a:txBody>
-                  <a:tcPr marL="68580" marR="68580" marT="0" marB="0">
-                    <a:lnL w="9525" cap="flat" cmpd="sng" algn="ctr">
-                      <a:solidFill>
-                        <a:schemeClr val="tx1"/>
-                      </a:solidFill>
-                      <a:prstDash val="solid"/>
-                      <a:round/>
-                      <a:headEnd type="none" w="med" len="med"/>
-                      <a:tailEnd type="none" w="med" len="med"/>
-                    </a:lnL>
-                    <a:lnR w="9525" cap="flat" cmpd="sng" algn="ctr">
-                      <a:solidFill>
-                        <a:schemeClr val="tx1"/>
-                      </a:solidFill>
-                      <a:prstDash val="solid"/>
-                      <a:round/>
-                      <a:headEnd type="none" w="med" len="med"/>
-                      <a:tailEnd type="none" w="med" len="med"/>
-                    </a:lnR>
-                    <a:lnT w="9525" cap="flat" cmpd="sng" algn="ctr">
-                      <a:solidFill>
-                        <a:schemeClr val="tx1"/>
-                      </a:solidFill>
-                      <a:prstDash val="solid"/>
-                      <a:round/>
-                      <a:headEnd type="none" w="med" len="med"/>
-                      <a:tailEnd type="none" w="med" len="med"/>
-                    </a:lnT>
-                    <a:lnB w="9525" cap="flat" cmpd="sng" algn="ctr">
-                      <a:solidFill>
-                        <a:schemeClr val="tx1"/>
-                      </a:solidFill>
-                      <a:prstDash val="solid"/>
-                      <a:round/>
-                      <a:headEnd type="none" w="med" len="med"/>
-                      <a:tailEnd type="none" w="med" len="med"/>
-                    </a:lnB>
-                    <a:noFill/>
-                  </a:tcPr>
-                </a:tc>
-                <a:tc>
-                  <a:txBody>
-                    <a:bodyPr/>
-                    <a:lstStyle/>
-                    <a:p>
-                      <a:pPr marL="0" algn="l" defTabSz="914400" rtl="0" eaLnBrk="1" latinLnBrk="0" hangingPunct="1">
-                        <a:lnSpc>
-                          <a:spcPct val="150000"/>
-                        </a:lnSpc>
-                        <a:spcBef>
-                          <a:spcPts val="1200"/>
-                        </a:spcBef>
-                      </a:pPr>
-                      <a:r>
-                        <a:rPr lang="ru-RU" sz="1200" kern="1200" dirty="0">
-                          <a:solidFill>
-                            <a:schemeClr val="tx1"/>
-                          </a:solidFill>
-                          <a:effectLst/>
-                          <a:latin typeface="Calibri" panose="020F0502020204030204" pitchFamily="34" charset="0"/>
-                          <a:ea typeface="Calibri" panose="020F0502020204030204" pitchFamily="34" charset="0"/>
-                          <a:cs typeface="Times New Roman" panose="02020603050405020304" pitchFamily="18" charset="0"/>
-                        </a:rPr>
-                        <a:t>Значима</a:t>
-                      </a:r>
-                    </a:p>
-                  </a:txBody>
-                  <a:tcPr marL="68580" marR="68580" marT="0" marB="0">
-                    <a:lnL w="9525" cap="flat" cmpd="sng" algn="ctr">
-                      <a:solidFill>
-                        <a:schemeClr val="tx1"/>
-                      </a:solidFill>
-                      <a:prstDash val="solid"/>
-                      <a:round/>
-                      <a:headEnd type="none" w="med" len="med"/>
-                      <a:tailEnd type="none" w="med" len="med"/>
-                    </a:lnL>
-                    <a:lnR w="9525" cap="flat" cmpd="sng" algn="ctr">
-                      <a:solidFill>
-                        <a:schemeClr val="tx1"/>
-                      </a:solidFill>
-                      <a:prstDash val="solid"/>
-                      <a:round/>
-                      <a:headEnd type="none" w="med" len="med"/>
-                      <a:tailEnd type="none" w="med" len="med"/>
-                    </a:lnR>
-                    <a:lnT w="9525" cap="flat" cmpd="sng" algn="ctr">
-                      <a:solidFill>
-                        <a:schemeClr val="tx1"/>
-                      </a:solidFill>
-                      <a:prstDash val="solid"/>
-                      <a:round/>
-                      <a:headEnd type="none" w="med" len="med"/>
-                      <a:tailEnd type="none" w="med" len="med"/>
-                    </a:lnT>
-                    <a:lnB w="9525" cap="flat" cmpd="sng" algn="ctr">
-                      <a:solidFill>
-                        <a:schemeClr val="tx1"/>
-                      </a:solidFill>
-                      <a:prstDash val="solid"/>
-                      <a:round/>
-                      <a:headEnd type="none" w="med" len="med"/>
-                      <a:tailEnd type="none" w="med" len="med"/>
-                    </a:lnB>
-                    <a:noFill/>
-                  </a:tcPr>
-                </a:tc>
-                <a:extLst>
-                  <a:ext uri="{0D108BD9-81ED-4DB2-BD59-A6C34878D82A}">
-                    <a16:rowId xmlns:a16="http://schemas.microsoft.com/office/drawing/2014/main" val="1267310396"/>
-                  </a:ext>
-                </a:extLst>
-              </a:tr>
-              <a:tr h="207692">
-                <a:tc>
-                  <a:txBody>
-                    <a:bodyPr/>
-                    <a:lstStyle/>
-                    <a:p>
-                      <a:pPr>
-                        <a:lnSpc>
-                          <a:spcPct val="150000"/>
-                        </a:lnSpc>
-                        <a:spcBef>
-                          <a:spcPts val="1200"/>
-                        </a:spcBef>
-                      </a:pPr>
-                      <a:r>
-                        <a:rPr lang="en-US" sz="1100" dirty="0" err="1">
-                          <a:solidFill>
-                            <a:schemeClr val="tx1"/>
-                          </a:solidFill>
-                          <a:effectLst/>
-                          <a:latin typeface="Calibri" panose="020F0502020204030204" pitchFamily="34" charset="0"/>
-                          <a:ea typeface="Calibri" panose="020F0502020204030204" pitchFamily="34" charset="0"/>
-                          <a:cs typeface="Times New Roman" panose="02020603050405020304" pitchFamily="18" charset="0"/>
-                        </a:rPr>
-                        <a:t>ppltrst</a:t>
-                      </a:r>
-                      <a:endParaRPr lang="ru-RU" sz="1100" dirty="0">
-                        <a:solidFill>
-                          <a:schemeClr val="tx1"/>
-                        </a:solidFill>
-                        <a:effectLst/>
-                        <a:latin typeface="Calibri" panose="020F0502020204030204" pitchFamily="34" charset="0"/>
-                        <a:ea typeface="Calibri" panose="020F0502020204030204" pitchFamily="34" charset="0"/>
-                        <a:cs typeface="Times New Roman" panose="02020603050405020304" pitchFamily="18" charset="0"/>
-                      </a:endParaRPr>
-                    </a:p>
-                  </a:txBody>
-                  <a:tcPr marL="68580" marR="68580" marT="0" marB="0">
-                    <a:lnL w="9525" cap="flat" cmpd="sng" algn="ctr">
-                      <a:solidFill>
-                        <a:schemeClr val="tx1"/>
-                      </a:solidFill>
-                      <a:prstDash val="solid"/>
-                      <a:round/>
-                      <a:headEnd type="none" w="med" len="med"/>
-                      <a:tailEnd type="none" w="med" len="med"/>
-                    </a:lnL>
-                    <a:lnR w="9525" cap="flat" cmpd="sng" algn="ctr">
-                      <a:solidFill>
-                        <a:schemeClr val="tx1"/>
-                      </a:solidFill>
-                      <a:prstDash val="solid"/>
-                      <a:round/>
-                      <a:headEnd type="none" w="med" len="med"/>
-                      <a:tailEnd type="none" w="med" len="med"/>
-                    </a:lnR>
-                    <a:lnT w="9525" cap="flat" cmpd="sng" algn="ctr">
-                      <a:solidFill>
-                        <a:schemeClr val="tx1"/>
-                      </a:solidFill>
-                      <a:prstDash val="solid"/>
-                      <a:round/>
-                      <a:headEnd type="none" w="med" len="med"/>
-                      <a:tailEnd type="none" w="med" len="med"/>
-                    </a:lnT>
-                    <a:lnB w="9525" cap="flat" cmpd="sng" algn="ctr">
-                      <a:solidFill>
-                        <a:schemeClr val="tx1"/>
-                      </a:solidFill>
-                      <a:prstDash val="solid"/>
-                      <a:round/>
-                      <a:headEnd type="none" w="med" len="med"/>
-                      <a:tailEnd type="none" w="med" len="med"/>
-                    </a:lnB>
-                    <a:noFill/>
-                  </a:tcPr>
-                </a:tc>
-                <a:tc>
-                  <a:txBody>
-                    <a:bodyPr/>
-                    <a:lstStyle/>
-                    <a:p>
-                      <a:pPr>
-                        <a:lnSpc>
-                          <a:spcPct val="150000"/>
-                        </a:lnSpc>
-                        <a:spcBef>
-                          <a:spcPts val="1200"/>
-                        </a:spcBef>
-                      </a:pPr>
-                      <a:r>
-                        <a:rPr lang="en-US" sz="1200" dirty="0">
-                          <a:solidFill>
-                            <a:schemeClr val="tx1"/>
-                          </a:solidFill>
-                          <a:effectLst/>
-                          <a:latin typeface="Times New Roman" panose="02020603050405020304" pitchFamily="18" charset="0"/>
-                          <a:ea typeface="Calibri" panose="020F0502020204030204" pitchFamily="34" charset="0"/>
-                          <a:cs typeface="Times New Roman" panose="02020603050405020304" pitchFamily="18" charset="0"/>
-                        </a:rPr>
-                        <a:t>0.17</a:t>
-                      </a:r>
-                      <a:endParaRPr lang="ru-RU" sz="1100" dirty="0">
-                        <a:solidFill>
-                          <a:schemeClr val="tx1"/>
-                        </a:solidFill>
-                        <a:effectLst/>
-                        <a:latin typeface="Calibri" panose="020F0502020204030204" pitchFamily="34" charset="0"/>
-                        <a:ea typeface="Calibri" panose="020F0502020204030204" pitchFamily="34" charset="0"/>
-                        <a:cs typeface="Times New Roman" panose="02020603050405020304" pitchFamily="18" charset="0"/>
-                      </a:endParaRPr>
-                    </a:p>
-                  </a:txBody>
-                  <a:tcPr marL="68580" marR="68580" marT="0" marB="0">
-                    <a:lnL w="9525" cap="flat" cmpd="sng" algn="ctr">
-                      <a:solidFill>
-                        <a:schemeClr val="tx1"/>
-                      </a:solidFill>
-                      <a:prstDash val="solid"/>
-                      <a:round/>
-                      <a:headEnd type="none" w="med" len="med"/>
-                      <a:tailEnd type="none" w="med" len="med"/>
-                    </a:lnL>
-                    <a:lnR w="9525" cap="flat" cmpd="sng" algn="ctr">
-                      <a:solidFill>
-                        <a:schemeClr val="tx1"/>
-                      </a:solidFill>
-                      <a:prstDash val="solid"/>
-                      <a:round/>
-                      <a:headEnd type="none" w="med" len="med"/>
-                      <a:tailEnd type="none" w="med" len="med"/>
-                    </a:lnR>
-                    <a:lnT w="9525" cap="flat" cmpd="sng" algn="ctr">
-                      <a:solidFill>
-                        <a:schemeClr val="tx1"/>
-                      </a:solidFill>
-                      <a:prstDash val="solid"/>
-                      <a:round/>
-                      <a:headEnd type="none" w="med" len="med"/>
-                      <a:tailEnd type="none" w="med" len="med"/>
-                    </a:lnT>
-                    <a:lnB w="9525" cap="flat" cmpd="sng" algn="ctr">
-                      <a:solidFill>
-                        <a:schemeClr val="tx1"/>
-                      </a:solidFill>
-                      <a:prstDash val="solid"/>
-                      <a:round/>
-                      <a:headEnd type="none" w="med" len="med"/>
-                      <a:tailEnd type="none" w="med" len="med"/>
-                    </a:lnB>
-                    <a:noFill/>
-                  </a:tcPr>
-                </a:tc>
-                <a:tc>
-                  <a:txBody>
-                    <a:bodyPr/>
-                    <a:lstStyle/>
-                    <a:p>
-                      <a:pPr marL="0" algn="l" defTabSz="914400" rtl="0" eaLnBrk="1" latinLnBrk="0" hangingPunct="1">
-                        <a:lnSpc>
-                          <a:spcPct val="150000"/>
-                        </a:lnSpc>
-                        <a:spcBef>
-                          <a:spcPts val="1200"/>
-                        </a:spcBef>
-                      </a:pPr>
-                      <a:r>
-                        <a:rPr lang="ru-RU" sz="1200" kern="1200" dirty="0">
-                          <a:solidFill>
-                            <a:schemeClr val="tx1"/>
-                          </a:solidFill>
-                          <a:effectLst/>
-                          <a:latin typeface="Calibri" panose="020F0502020204030204" pitchFamily="34" charset="0"/>
-                          <a:ea typeface="Calibri" panose="020F0502020204030204" pitchFamily="34" charset="0"/>
-                          <a:cs typeface="Times New Roman" panose="02020603050405020304" pitchFamily="18" charset="0"/>
-                        </a:rPr>
-                        <a:t>Значима</a:t>
-                      </a:r>
-                    </a:p>
-                  </a:txBody>
-                  <a:tcPr marL="68580" marR="68580" marT="0" marB="0">
-                    <a:lnL w="9525" cap="flat" cmpd="sng" algn="ctr">
-                      <a:solidFill>
-                        <a:schemeClr val="tx1"/>
-                      </a:solidFill>
-                      <a:prstDash val="solid"/>
-                      <a:round/>
-                      <a:headEnd type="none" w="med" len="med"/>
-                      <a:tailEnd type="none" w="med" len="med"/>
-                    </a:lnL>
-                    <a:lnR w="9525" cap="flat" cmpd="sng" algn="ctr">
-                      <a:solidFill>
-                        <a:schemeClr val="tx1"/>
-                      </a:solidFill>
-                      <a:prstDash val="solid"/>
-                      <a:round/>
-                      <a:headEnd type="none" w="med" len="med"/>
-                      <a:tailEnd type="none" w="med" len="med"/>
-                    </a:lnR>
-                    <a:lnT w="9525" cap="flat" cmpd="sng" algn="ctr">
-                      <a:solidFill>
-                        <a:schemeClr val="tx1"/>
-                      </a:solidFill>
-                      <a:prstDash val="solid"/>
-                      <a:round/>
-                      <a:headEnd type="none" w="med" len="med"/>
-                      <a:tailEnd type="none" w="med" len="med"/>
-                    </a:lnT>
-                    <a:lnB w="9525" cap="flat" cmpd="sng" algn="ctr">
-                      <a:solidFill>
-                        <a:schemeClr val="tx1"/>
-                      </a:solidFill>
-                      <a:prstDash val="solid"/>
-                      <a:round/>
-                      <a:headEnd type="none" w="med" len="med"/>
-                      <a:tailEnd type="none" w="med" len="med"/>
-                    </a:lnB>
-                    <a:noFill/>
-                  </a:tcPr>
-                </a:tc>
-                <a:extLst>
-                  <a:ext uri="{0D108BD9-81ED-4DB2-BD59-A6C34878D82A}">
-                    <a16:rowId xmlns:a16="http://schemas.microsoft.com/office/drawing/2014/main" val="1989229793"/>
-                  </a:ext>
-                </a:extLst>
-              </a:tr>
-            </a:tbl>
-          </a:graphicData>
-        </a:graphic>
-      </p:graphicFrame>
-      <p:graphicFrame>
-        <p:nvGraphicFramePr>
-          <p:cNvPr id="11" name="Таблица 10">
+          <p:cNvPicPr/>
+          <p:nvPr/>
+        </p:nvPicPr>
+        <p:blipFill rotWithShape="1">
+          <a:blip r:embed="rId3" cstate="print">
+            <a:extLst>
+              <a:ext uri="{28A0092B-C50C-407E-A947-70E740481C1C}">
+                <a14:useLocalDpi xmlns:a14="http://schemas.microsoft.com/office/drawing/2010/main" val="0"/>
+              </a:ext>
+            </a:extLst>
+          </a:blip>
+          <a:srcRect b="59783"/>
+          <a:stretch/>
+        </p:blipFill>
+        <p:spPr bwMode="auto">
+          <a:xfrm>
+            <a:off x="5079394" y="1416250"/>
+            <a:ext cx="6526708" cy="5007920"/>
+          </a:xfrm>
+          <a:prstGeom prst="rect">
+            <a:avLst/>
+          </a:prstGeom>
+          <a:noFill/>
+          <a:ln>
+            <a:noFill/>
+          </a:ln>
+        </p:spPr>
+      </p:pic>
+      <p:sp>
+        <p:nvSpPr>
+          <p:cNvPr id="13" name="Текст 4">
             <a:extLst>
               <a:ext uri="{FF2B5EF4-FFF2-40B4-BE49-F238E27FC236}">
-                <a16:creationId xmlns:a16="http://schemas.microsoft.com/office/drawing/2014/main" id="{0C2BE4E1-B6FB-4FF4-95F4-239E93F42463}"/>
+                <a16:creationId xmlns:a16="http://schemas.microsoft.com/office/drawing/2014/main" id="{A0EBA77F-ABB1-471F-9D02-20CAF8FDCA34}"/>
               </a:ext>
             </a:extLst>
           </p:cNvPr>
-          <p:cNvGraphicFramePr>
-            <a:graphicFrameLocks noGrp="1"/>
-          </p:cNvGraphicFramePr>
+          <p:cNvSpPr>
+            <a:spLocks noGrp="1"/>
+          </p:cNvSpPr>
           <p:nvPr>
-            <p:extLst>
-              <p:ext uri="{D42A27DB-BD31-4B8C-83A1-F6EECF244321}">
-                <p14:modId xmlns:p14="http://schemas.microsoft.com/office/powerpoint/2010/main" val="918043211"/>
-              </p:ext>
-            </p:extLst>
+            <p:ph type="body" sz="quarter" idx="12"/>
           </p:nvPr>
-        </p:nvGraphicFramePr>
-        <p:xfrm>
-          <a:off x="710818" y="3560977"/>
-          <a:ext cx="5245561" cy="956777"/>
-        </p:xfrm>
-        <a:graphic>
-          <a:graphicData uri="http://schemas.openxmlformats.org/drawingml/2006/table">
-            <a:tbl>
-              <a:tblPr firstRow="1" bandRow="1">
-                <a:tableStyleId>{5C22544A-7EE6-4342-B048-85BDC9FD1C3A}</a:tableStyleId>
-              </a:tblPr>
-              <a:tblGrid>
-                <a:gridCol w="2773527">
-                  <a:extLst>
-                    <a:ext uri="{9D8B030D-6E8A-4147-A177-3AD203B41FA5}">
-                      <a16:colId xmlns:a16="http://schemas.microsoft.com/office/drawing/2014/main" val="281395215"/>
-                    </a:ext>
-                  </a:extLst>
-                </a:gridCol>
-                <a:gridCol w="1463040">
-                  <a:extLst>
-                    <a:ext uri="{9D8B030D-6E8A-4147-A177-3AD203B41FA5}">
-                      <a16:colId xmlns:a16="http://schemas.microsoft.com/office/drawing/2014/main" val="454134994"/>
-                    </a:ext>
-                  </a:extLst>
-                </a:gridCol>
-                <a:gridCol w="1008994">
-                  <a:extLst>
-                    <a:ext uri="{9D8B030D-6E8A-4147-A177-3AD203B41FA5}">
-                      <a16:colId xmlns:a16="http://schemas.microsoft.com/office/drawing/2014/main" val="4245603752"/>
-                    </a:ext>
-                  </a:extLst>
-                </a:gridCol>
-              </a:tblGrid>
-              <a:tr h="280310">
-                <a:tc>
-                  <a:txBody>
-                    <a:bodyPr/>
-                    <a:lstStyle/>
-                    <a:p>
-                      <a:pPr>
-                        <a:lnSpc>
-                          <a:spcPct val="150000"/>
-                        </a:lnSpc>
-                        <a:spcBef>
-                          <a:spcPts val="1200"/>
-                        </a:spcBef>
-                      </a:pPr>
-                      <a:r>
-                        <a:rPr lang="ru-RU" sz="1200" dirty="0">
-                          <a:solidFill>
-                            <a:schemeClr val="tx1"/>
-                          </a:solidFill>
-                          <a:effectLst/>
-                          <a:latin typeface="Times New Roman" panose="02020603050405020304" pitchFamily="18" charset="0"/>
-                          <a:ea typeface="Calibri" panose="020F0502020204030204" pitchFamily="34" charset="0"/>
-                          <a:cs typeface="Times New Roman" panose="02020603050405020304" pitchFamily="18" charset="0"/>
-                        </a:rPr>
-                        <a:t>Переменная для Великобритании </a:t>
-                      </a:r>
-                      <a:endParaRPr lang="ru-RU" sz="1100" dirty="0">
-                        <a:solidFill>
-                          <a:schemeClr val="tx1"/>
-                        </a:solidFill>
-                        <a:effectLst/>
-                        <a:latin typeface="Calibri" panose="020F0502020204030204" pitchFamily="34" charset="0"/>
-                        <a:ea typeface="Calibri" panose="020F0502020204030204" pitchFamily="34" charset="0"/>
-                        <a:cs typeface="Times New Roman" panose="02020603050405020304" pitchFamily="18" charset="0"/>
-                      </a:endParaRPr>
-                    </a:p>
-                  </a:txBody>
-                  <a:tcPr marL="68580" marR="68580" marT="0" marB="0">
-                    <a:lnL w="9525" cap="flat" cmpd="sng" algn="ctr">
-                      <a:solidFill>
-                        <a:schemeClr val="tx1"/>
-                      </a:solidFill>
-                      <a:prstDash val="solid"/>
-                      <a:round/>
-                      <a:headEnd type="none" w="med" len="med"/>
-                      <a:tailEnd type="none" w="med" len="med"/>
-                    </a:lnL>
-                    <a:lnR w="9525" cap="flat" cmpd="sng" algn="ctr">
-                      <a:solidFill>
-                        <a:schemeClr val="tx1"/>
-                      </a:solidFill>
-                      <a:prstDash val="solid"/>
-                      <a:round/>
-                      <a:headEnd type="none" w="med" len="med"/>
-                      <a:tailEnd type="none" w="med" len="med"/>
-                    </a:lnR>
-                    <a:lnT w="9525" cap="flat" cmpd="sng" algn="ctr">
-                      <a:solidFill>
-                        <a:schemeClr val="tx1"/>
-                      </a:solidFill>
-                      <a:prstDash val="solid"/>
-                      <a:round/>
-                      <a:headEnd type="none" w="med" len="med"/>
-                      <a:tailEnd type="none" w="med" len="med"/>
-                    </a:lnT>
-                    <a:lnB w="9525" cap="flat" cmpd="sng" algn="ctr">
-                      <a:solidFill>
-                        <a:schemeClr val="tx1"/>
-                      </a:solidFill>
-                      <a:prstDash val="solid"/>
-                      <a:round/>
-                      <a:headEnd type="none" w="med" len="med"/>
-                      <a:tailEnd type="none" w="med" len="med"/>
-                    </a:lnB>
-                    <a:noFill/>
-                  </a:tcPr>
-                </a:tc>
-                <a:tc>
-                  <a:txBody>
-                    <a:bodyPr/>
-                    <a:lstStyle/>
-                    <a:p>
-                      <a:pPr>
-                        <a:lnSpc>
-                          <a:spcPct val="150000"/>
-                        </a:lnSpc>
-                        <a:spcBef>
-                          <a:spcPts val="1200"/>
-                        </a:spcBef>
-                      </a:pPr>
-                      <a:r>
-                        <a:rPr lang="ru-RU" sz="1100" dirty="0">
-                          <a:solidFill>
-                            <a:schemeClr val="tx1"/>
-                          </a:solidFill>
-                          <a:effectLst/>
-                          <a:latin typeface="Calibri" panose="020F0502020204030204" pitchFamily="34" charset="0"/>
-                          <a:ea typeface="Calibri" panose="020F0502020204030204" pitchFamily="34" charset="0"/>
-                          <a:cs typeface="Times New Roman" panose="02020603050405020304" pitchFamily="18" charset="0"/>
-                        </a:rPr>
-                        <a:t>Корреляция с </a:t>
-                      </a:r>
-                      <a:r>
-                        <a:rPr lang="en-US" sz="1100" dirty="0">
-                          <a:solidFill>
-                            <a:schemeClr val="tx1"/>
-                          </a:solidFill>
-                          <a:effectLst/>
-                          <a:latin typeface="Calibri" panose="020F0502020204030204" pitchFamily="34" charset="0"/>
-                          <a:ea typeface="Calibri" panose="020F0502020204030204" pitchFamily="34" charset="0"/>
-                          <a:cs typeface="Times New Roman" panose="02020603050405020304" pitchFamily="18" charset="0"/>
-                        </a:rPr>
-                        <a:t>happy</a:t>
-                      </a:r>
-                      <a:endParaRPr lang="ru-RU" sz="1100" dirty="0">
-                        <a:solidFill>
-                          <a:schemeClr val="tx1"/>
-                        </a:solidFill>
-                        <a:effectLst/>
-                        <a:latin typeface="Calibri" panose="020F0502020204030204" pitchFamily="34" charset="0"/>
-                        <a:ea typeface="Calibri" panose="020F0502020204030204" pitchFamily="34" charset="0"/>
-                        <a:cs typeface="Times New Roman" panose="02020603050405020304" pitchFamily="18" charset="0"/>
-                      </a:endParaRPr>
-                    </a:p>
-                  </a:txBody>
-                  <a:tcPr marL="68580" marR="68580" marT="0" marB="0">
-                    <a:lnL w="9525" cap="flat" cmpd="sng" algn="ctr">
-                      <a:solidFill>
-                        <a:schemeClr val="tx1"/>
-                      </a:solidFill>
-                      <a:prstDash val="solid"/>
-                      <a:round/>
-                      <a:headEnd type="none" w="med" len="med"/>
-                      <a:tailEnd type="none" w="med" len="med"/>
-                    </a:lnL>
-                    <a:lnR w="9525" cap="flat" cmpd="sng" algn="ctr">
-                      <a:solidFill>
-                        <a:schemeClr val="tx1"/>
-                      </a:solidFill>
-                      <a:prstDash val="solid"/>
-                      <a:round/>
-                      <a:headEnd type="none" w="med" len="med"/>
-                      <a:tailEnd type="none" w="med" len="med"/>
-                    </a:lnR>
-                    <a:lnT w="9525" cap="flat" cmpd="sng" algn="ctr">
-                      <a:solidFill>
-                        <a:schemeClr val="tx1"/>
-                      </a:solidFill>
-                      <a:prstDash val="solid"/>
-                      <a:round/>
-                      <a:headEnd type="none" w="med" len="med"/>
-                      <a:tailEnd type="none" w="med" len="med"/>
-                    </a:lnT>
-                    <a:lnB w="9525" cap="flat" cmpd="sng" algn="ctr">
-                      <a:solidFill>
-                        <a:schemeClr val="tx1"/>
-                      </a:solidFill>
-                      <a:prstDash val="solid"/>
-                      <a:round/>
-                      <a:headEnd type="none" w="med" len="med"/>
-                      <a:tailEnd type="none" w="med" len="med"/>
-                    </a:lnB>
-                    <a:noFill/>
-                  </a:tcPr>
-                </a:tc>
-                <a:tc>
-                  <a:txBody>
-                    <a:bodyPr/>
-                    <a:lstStyle/>
-                    <a:p>
-                      <a:pPr>
-                        <a:lnSpc>
-                          <a:spcPct val="150000"/>
-                        </a:lnSpc>
-                        <a:spcBef>
-                          <a:spcPts val="1200"/>
-                        </a:spcBef>
-                      </a:pPr>
-                      <a:r>
-                        <a:rPr lang="ru-RU" sz="1100" dirty="0">
-                          <a:solidFill>
-                            <a:schemeClr val="tx1"/>
-                          </a:solidFill>
-                          <a:effectLst/>
-                          <a:latin typeface="Calibri" panose="020F0502020204030204" pitchFamily="34" charset="0"/>
-                          <a:ea typeface="Calibri" panose="020F0502020204030204" pitchFamily="34" charset="0"/>
-                          <a:cs typeface="Times New Roman" panose="02020603050405020304" pitchFamily="18" charset="0"/>
-                        </a:rPr>
-                        <a:t>Значимость</a:t>
-                      </a:r>
-                    </a:p>
-                  </a:txBody>
-                  <a:tcPr marL="68580" marR="68580" marT="0" marB="0">
-                    <a:lnL w="9525" cap="flat" cmpd="sng" algn="ctr">
-                      <a:solidFill>
-                        <a:schemeClr val="tx1"/>
-                      </a:solidFill>
-                      <a:prstDash val="solid"/>
-                      <a:round/>
-                      <a:headEnd type="none" w="med" len="med"/>
-                      <a:tailEnd type="none" w="med" len="med"/>
-                    </a:lnL>
-                    <a:lnR w="9525" cap="flat" cmpd="sng" algn="ctr">
-                      <a:solidFill>
-                        <a:schemeClr val="tx1"/>
-                      </a:solidFill>
-                      <a:prstDash val="solid"/>
-                      <a:round/>
-                      <a:headEnd type="none" w="med" len="med"/>
-                      <a:tailEnd type="none" w="med" len="med"/>
-                    </a:lnR>
-                    <a:lnT w="9525" cap="flat" cmpd="sng" algn="ctr">
-                      <a:solidFill>
-                        <a:schemeClr val="tx1"/>
-                      </a:solidFill>
-                      <a:prstDash val="solid"/>
-                      <a:round/>
-                      <a:headEnd type="none" w="med" len="med"/>
-                      <a:tailEnd type="none" w="med" len="med"/>
-                    </a:lnT>
-                    <a:lnB w="9525" cap="flat" cmpd="sng" algn="ctr">
-                      <a:solidFill>
-                        <a:schemeClr val="tx1"/>
-                      </a:solidFill>
-                      <a:prstDash val="solid"/>
-                      <a:round/>
-                      <a:headEnd type="none" w="med" len="med"/>
-                      <a:tailEnd type="none" w="med" len="med"/>
-                    </a:lnB>
-                    <a:noFill/>
-                  </a:tcPr>
-                </a:tc>
-                <a:extLst>
-                  <a:ext uri="{0D108BD9-81ED-4DB2-BD59-A6C34878D82A}">
-                    <a16:rowId xmlns:a16="http://schemas.microsoft.com/office/drawing/2014/main" val="2492690188"/>
-                  </a:ext>
-                </a:extLst>
-              </a:tr>
-              <a:tr h="179602">
-                <a:tc>
-                  <a:txBody>
-                    <a:bodyPr/>
-                    <a:lstStyle/>
-                    <a:p>
-                      <a:pPr marL="0" algn="l" defTabSz="914400" rtl="0" eaLnBrk="1" latinLnBrk="0" hangingPunct="1">
-                        <a:lnSpc>
-                          <a:spcPct val="150000"/>
-                        </a:lnSpc>
-                        <a:spcBef>
-                          <a:spcPts val="1200"/>
-                        </a:spcBef>
-                      </a:pPr>
-                      <a:r>
-                        <a:rPr lang="en-US" sz="1100" kern="1200" dirty="0">
-                          <a:solidFill>
-                            <a:schemeClr val="tx1"/>
-                          </a:solidFill>
-                          <a:effectLst/>
-                          <a:latin typeface="Calibri" panose="020F0502020204030204" pitchFamily="34" charset="0"/>
-                          <a:ea typeface="Calibri" panose="020F0502020204030204" pitchFamily="34" charset="0"/>
-                          <a:cs typeface="Times New Roman" panose="02020603050405020304" pitchFamily="18" charset="0"/>
-                        </a:rPr>
-                        <a:t>Health</a:t>
-                      </a:r>
-                      <a:r>
-                        <a:rPr lang="ru-RU" sz="1100" kern="1200" dirty="0">
-                          <a:solidFill>
-                            <a:schemeClr val="tx1"/>
-                          </a:solidFill>
-                          <a:effectLst/>
-                          <a:latin typeface="Calibri" panose="020F0502020204030204" pitchFamily="34" charset="0"/>
-                          <a:ea typeface="Calibri" panose="020F0502020204030204" pitchFamily="34" charset="0"/>
-                          <a:cs typeface="Times New Roman" panose="02020603050405020304" pitchFamily="18" charset="0"/>
-                        </a:rPr>
-                        <a:t> </a:t>
-                      </a:r>
-                    </a:p>
-                  </a:txBody>
-                  <a:tcPr marL="68580" marR="68580" marT="0" marB="0">
-                    <a:lnL w="9525" cap="flat" cmpd="sng" algn="ctr">
-                      <a:solidFill>
-                        <a:schemeClr val="tx1"/>
-                      </a:solidFill>
-                      <a:prstDash val="solid"/>
-                      <a:round/>
-                      <a:headEnd type="none" w="med" len="med"/>
-                      <a:tailEnd type="none" w="med" len="med"/>
-                    </a:lnL>
-                    <a:lnR w="9525" cap="flat" cmpd="sng" algn="ctr">
-                      <a:solidFill>
-                        <a:schemeClr val="tx1"/>
-                      </a:solidFill>
-                      <a:prstDash val="solid"/>
-                      <a:round/>
-                      <a:headEnd type="none" w="med" len="med"/>
-                      <a:tailEnd type="none" w="med" len="med"/>
-                    </a:lnR>
-                    <a:lnT w="9525" cap="flat" cmpd="sng" algn="ctr">
-                      <a:solidFill>
-                        <a:schemeClr val="tx1"/>
-                      </a:solidFill>
-                      <a:prstDash val="solid"/>
-                      <a:round/>
-                      <a:headEnd type="none" w="med" len="med"/>
-                      <a:tailEnd type="none" w="med" len="med"/>
-                    </a:lnT>
-                    <a:lnB w="9525" cap="flat" cmpd="sng" algn="ctr">
-                      <a:solidFill>
-                        <a:schemeClr val="tx1"/>
-                      </a:solidFill>
-                      <a:prstDash val="solid"/>
-                      <a:round/>
-                      <a:headEnd type="none" w="med" len="med"/>
-                      <a:tailEnd type="none" w="med" len="med"/>
-                    </a:lnB>
-                    <a:noFill/>
-                  </a:tcPr>
-                </a:tc>
-                <a:tc>
-                  <a:txBody>
-                    <a:bodyPr/>
-                    <a:lstStyle/>
-                    <a:p>
-                      <a:pPr marL="0" algn="l" defTabSz="914400" rtl="0" eaLnBrk="1" latinLnBrk="0" hangingPunct="1">
-                        <a:lnSpc>
-                          <a:spcPct val="150000"/>
-                        </a:lnSpc>
-                        <a:spcBef>
-                          <a:spcPts val="1200"/>
-                        </a:spcBef>
-                      </a:pPr>
-                      <a:r>
-                        <a:rPr lang="ru-RU" sz="1100" kern="1200" dirty="0">
-                          <a:solidFill>
-                            <a:schemeClr val="tx1"/>
-                          </a:solidFill>
-                          <a:effectLst/>
-                          <a:latin typeface="Calibri" panose="020F0502020204030204" pitchFamily="34" charset="0"/>
-                          <a:ea typeface="+mn-ea"/>
-                          <a:cs typeface="Times New Roman" panose="02020603050405020304" pitchFamily="18" charset="0"/>
-                        </a:rPr>
-                        <a:t> -0.24 </a:t>
-                      </a:r>
-                      <a:endParaRPr lang="ru-RU" sz="1100" kern="1200" dirty="0">
-                        <a:solidFill>
-                          <a:schemeClr val="tx1"/>
-                        </a:solidFill>
-                        <a:effectLst/>
-                        <a:latin typeface="Calibri" panose="020F0502020204030204" pitchFamily="34" charset="0"/>
-                        <a:ea typeface="Calibri" panose="020F0502020204030204" pitchFamily="34" charset="0"/>
-                        <a:cs typeface="Times New Roman" panose="02020603050405020304" pitchFamily="18" charset="0"/>
-                      </a:endParaRPr>
-                    </a:p>
-                  </a:txBody>
-                  <a:tcPr marL="68580" marR="68580" marT="0" marB="0">
-                    <a:lnL w="9525" cap="flat" cmpd="sng" algn="ctr">
-                      <a:solidFill>
-                        <a:schemeClr val="tx1"/>
-                      </a:solidFill>
-                      <a:prstDash val="solid"/>
-                      <a:round/>
-                      <a:headEnd type="none" w="med" len="med"/>
-                      <a:tailEnd type="none" w="med" len="med"/>
-                    </a:lnL>
-                    <a:lnR w="9525" cap="flat" cmpd="sng" algn="ctr">
-                      <a:solidFill>
-                        <a:schemeClr val="tx1"/>
-                      </a:solidFill>
-                      <a:prstDash val="solid"/>
-                      <a:round/>
-                      <a:headEnd type="none" w="med" len="med"/>
-                      <a:tailEnd type="none" w="med" len="med"/>
-                    </a:lnR>
-                    <a:lnT w="9525" cap="flat" cmpd="sng" algn="ctr">
-                      <a:solidFill>
-                        <a:schemeClr val="tx1"/>
-                      </a:solidFill>
-                      <a:prstDash val="solid"/>
-                      <a:round/>
-                      <a:headEnd type="none" w="med" len="med"/>
-                      <a:tailEnd type="none" w="med" len="med"/>
-                    </a:lnT>
-                    <a:lnB w="9525" cap="flat" cmpd="sng" algn="ctr">
-                      <a:solidFill>
-                        <a:schemeClr val="tx1"/>
-                      </a:solidFill>
-                      <a:prstDash val="solid"/>
-                      <a:round/>
-                      <a:headEnd type="none" w="med" len="med"/>
-                      <a:tailEnd type="none" w="med" len="med"/>
-                    </a:lnB>
-                    <a:noFill/>
-                  </a:tcPr>
-                </a:tc>
-                <a:tc>
-                  <a:txBody>
-                    <a:bodyPr/>
-                    <a:lstStyle/>
-                    <a:p>
-                      <a:pPr marL="0" algn="l" defTabSz="914400" rtl="0" eaLnBrk="1" latinLnBrk="0" hangingPunct="1">
-                        <a:lnSpc>
-                          <a:spcPct val="150000"/>
-                        </a:lnSpc>
-                        <a:spcBef>
-                          <a:spcPts val="1200"/>
-                        </a:spcBef>
-                      </a:pPr>
-                      <a:r>
-                        <a:rPr lang="ru-RU" sz="1100" kern="1200" dirty="0">
-                          <a:solidFill>
-                            <a:schemeClr val="tx1"/>
-                          </a:solidFill>
-                          <a:effectLst/>
-                          <a:latin typeface="Calibri" panose="020F0502020204030204" pitchFamily="34" charset="0"/>
-                          <a:ea typeface="Calibri" panose="020F0502020204030204" pitchFamily="34" charset="0"/>
-                          <a:cs typeface="Times New Roman" panose="02020603050405020304" pitchFamily="18" charset="0"/>
-                        </a:rPr>
-                        <a:t>Значима</a:t>
-                      </a:r>
-                    </a:p>
-                  </a:txBody>
-                  <a:tcPr marL="68580" marR="68580" marT="0" marB="0">
-                    <a:lnL w="9525" cap="flat" cmpd="sng" algn="ctr">
-                      <a:solidFill>
-                        <a:schemeClr val="tx1"/>
-                      </a:solidFill>
-                      <a:prstDash val="solid"/>
-                      <a:round/>
-                      <a:headEnd type="none" w="med" len="med"/>
-                      <a:tailEnd type="none" w="med" len="med"/>
-                    </a:lnL>
-                    <a:lnR w="9525" cap="flat" cmpd="sng" algn="ctr">
-                      <a:solidFill>
-                        <a:schemeClr val="tx1"/>
-                      </a:solidFill>
-                      <a:prstDash val="solid"/>
-                      <a:round/>
-                      <a:headEnd type="none" w="med" len="med"/>
-                      <a:tailEnd type="none" w="med" len="med"/>
-                    </a:lnR>
-                    <a:lnT w="9525" cap="flat" cmpd="sng" algn="ctr">
-                      <a:solidFill>
-                        <a:schemeClr val="tx1"/>
-                      </a:solidFill>
-                      <a:prstDash val="solid"/>
-                      <a:round/>
-                      <a:headEnd type="none" w="med" len="med"/>
-                      <a:tailEnd type="none" w="med" len="med"/>
-                    </a:lnT>
-                    <a:lnB w="9525" cap="flat" cmpd="sng" algn="ctr">
-                      <a:solidFill>
-                        <a:schemeClr val="tx1"/>
-                      </a:solidFill>
-                      <a:prstDash val="solid"/>
-                      <a:round/>
-                      <a:headEnd type="none" w="med" len="med"/>
-                      <a:tailEnd type="none" w="med" len="med"/>
-                    </a:lnB>
-                    <a:noFill/>
-                  </a:tcPr>
-                </a:tc>
-                <a:extLst>
-                  <a:ext uri="{0D108BD9-81ED-4DB2-BD59-A6C34878D82A}">
-                    <a16:rowId xmlns:a16="http://schemas.microsoft.com/office/drawing/2014/main" val="695215291"/>
-                  </a:ext>
-                </a:extLst>
-              </a:tr>
-              <a:tr h="179602">
-                <a:tc>
-                  <a:txBody>
-                    <a:bodyPr/>
-                    <a:lstStyle/>
-                    <a:p>
-                      <a:pPr marL="0" algn="l" defTabSz="914400" rtl="0" eaLnBrk="1" latinLnBrk="0" hangingPunct="1">
-                        <a:lnSpc>
-                          <a:spcPct val="150000"/>
-                        </a:lnSpc>
-                        <a:spcBef>
-                          <a:spcPts val="1200"/>
-                        </a:spcBef>
-                      </a:pPr>
-                      <a:r>
-                        <a:rPr lang="en-US" sz="1100" kern="1200" dirty="0" err="1">
-                          <a:solidFill>
-                            <a:schemeClr val="tx1"/>
-                          </a:solidFill>
-                          <a:effectLst/>
-                          <a:latin typeface="Calibri" panose="020F0502020204030204" pitchFamily="34" charset="0"/>
-                          <a:ea typeface="Calibri" panose="020F0502020204030204" pitchFamily="34" charset="0"/>
-                          <a:cs typeface="Times New Roman" panose="02020603050405020304" pitchFamily="18" charset="0"/>
-                        </a:rPr>
-                        <a:t>hincfel</a:t>
-                      </a:r>
-                      <a:endParaRPr lang="ru-RU" sz="1100" kern="1200" dirty="0">
-                        <a:solidFill>
-                          <a:schemeClr val="tx1"/>
-                        </a:solidFill>
-                        <a:effectLst/>
-                        <a:latin typeface="Calibri" panose="020F0502020204030204" pitchFamily="34" charset="0"/>
-                        <a:ea typeface="Calibri" panose="020F0502020204030204" pitchFamily="34" charset="0"/>
-                        <a:cs typeface="Times New Roman" panose="02020603050405020304" pitchFamily="18" charset="0"/>
-                      </a:endParaRPr>
-                    </a:p>
-                  </a:txBody>
-                  <a:tcPr marL="68580" marR="68580" marT="0" marB="0">
-                    <a:lnL w="9525" cap="flat" cmpd="sng" algn="ctr">
-                      <a:solidFill>
-                        <a:schemeClr val="tx1"/>
-                      </a:solidFill>
-                      <a:prstDash val="solid"/>
-                      <a:round/>
-                      <a:headEnd type="none" w="med" len="med"/>
-                      <a:tailEnd type="none" w="med" len="med"/>
-                    </a:lnL>
-                    <a:lnR w="9525" cap="flat" cmpd="sng" algn="ctr">
-                      <a:solidFill>
-                        <a:schemeClr val="tx1"/>
-                      </a:solidFill>
-                      <a:prstDash val="solid"/>
-                      <a:round/>
-                      <a:headEnd type="none" w="med" len="med"/>
-                      <a:tailEnd type="none" w="med" len="med"/>
-                    </a:lnR>
-                    <a:lnT w="9525" cap="flat" cmpd="sng" algn="ctr">
-                      <a:solidFill>
-                        <a:schemeClr val="tx1"/>
-                      </a:solidFill>
-                      <a:prstDash val="solid"/>
-                      <a:round/>
-                      <a:headEnd type="none" w="med" len="med"/>
-                      <a:tailEnd type="none" w="med" len="med"/>
-                    </a:lnT>
-                    <a:lnB w="9525" cap="flat" cmpd="sng" algn="ctr">
-                      <a:solidFill>
-                        <a:schemeClr val="tx1"/>
-                      </a:solidFill>
-                      <a:prstDash val="solid"/>
-                      <a:round/>
-                      <a:headEnd type="none" w="med" len="med"/>
-                      <a:tailEnd type="none" w="med" len="med"/>
-                    </a:lnB>
-                    <a:noFill/>
-                  </a:tcPr>
-                </a:tc>
-                <a:tc>
-                  <a:txBody>
-                    <a:bodyPr/>
-                    <a:lstStyle/>
-                    <a:p>
-                      <a:pPr marL="0" algn="l" defTabSz="914400" rtl="0" eaLnBrk="1" latinLnBrk="0" hangingPunct="1">
-                        <a:lnSpc>
-                          <a:spcPct val="150000"/>
-                        </a:lnSpc>
-                        <a:spcBef>
-                          <a:spcPts val="1200"/>
-                        </a:spcBef>
-                      </a:pPr>
-                      <a:r>
-                        <a:rPr lang="ru-RU" sz="1100" kern="1200" dirty="0">
-                          <a:solidFill>
-                            <a:schemeClr val="tx1"/>
-                          </a:solidFill>
-                          <a:effectLst/>
-                          <a:latin typeface="Calibri" panose="020F0502020204030204" pitchFamily="34" charset="0"/>
-                          <a:ea typeface="+mn-ea"/>
-                          <a:cs typeface="Times New Roman" panose="02020603050405020304" pitchFamily="18" charset="0"/>
-                        </a:rPr>
-                        <a:t>-0.29</a:t>
-                      </a:r>
-                      <a:endParaRPr lang="ru-RU" sz="1100" kern="1200" dirty="0">
-                        <a:solidFill>
-                          <a:schemeClr val="tx1"/>
-                        </a:solidFill>
-                        <a:effectLst/>
-                        <a:latin typeface="Calibri" panose="020F0502020204030204" pitchFamily="34" charset="0"/>
-                        <a:ea typeface="Calibri" panose="020F0502020204030204" pitchFamily="34" charset="0"/>
-                        <a:cs typeface="Times New Roman" panose="02020603050405020304" pitchFamily="18" charset="0"/>
-                      </a:endParaRPr>
-                    </a:p>
-                  </a:txBody>
-                  <a:tcPr marL="68580" marR="68580" marT="0" marB="0">
-                    <a:lnL w="9525" cap="flat" cmpd="sng" algn="ctr">
-                      <a:solidFill>
-                        <a:schemeClr val="tx1"/>
-                      </a:solidFill>
-                      <a:prstDash val="solid"/>
-                      <a:round/>
-                      <a:headEnd type="none" w="med" len="med"/>
-                      <a:tailEnd type="none" w="med" len="med"/>
-                    </a:lnL>
-                    <a:lnR w="9525" cap="flat" cmpd="sng" algn="ctr">
-                      <a:solidFill>
-                        <a:schemeClr val="tx1"/>
-                      </a:solidFill>
-                      <a:prstDash val="solid"/>
-                      <a:round/>
-                      <a:headEnd type="none" w="med" len="med"/>
-                      <a:tailEnd type="none" w="med" len="med"/>
-                    </a:lnR>
-                    <a:lnT w="9525" cap="flat" cmpd="sng" algn="ctr">
-                      <a:solidFill>
-                        <a:schemeClr val="tx1"/>
-                      </a:solidFill>
-                      <a:prstDash val="solid"/>
-                      <a:round/>
-                      <a:headEnd type="none" w="med" len="med"/>
-                      <a:tailEnd type="none" w="med" len="med"/>
-                    </a:lnT>
-                    <a:lnB w="9525" cap="flat" cmpd="sng" algn="ctr">
-                      <a:solidFill>
-                        <a:schemeClr val="tx1"/>
-                      </a:solidFill>
-                      <a:prstDash val="solid"/>
-                      <a:round/>
-                      <a:headEnd type="none" w="med" len="med"/>
-                      <a:tailEnd type="none" w="med" len="med"/>
-                    </a:lnB>
-                    <a:noFill/>
-                  </a:tcPr>
-                </a:tc>
-                <a:tc>
-                  <a:txBody>
-                    <a:bodyPr/>
-                    <a:lstStyle/>
-                    <a:p>
-                      <a:pPr marL="0" algn="l" defTabSz="914400" rtl="0" eaLnBrk="1" latinLnBrk="0" hangingPunct="1">
-                        <a:lnSpc>
-                          <a:spcPct val="150000"/>
-                        </a:lnSpc>
-                        <a:spcBef>
-                          <a:spcPts val="1200"/>
-                        </a:spcBef>
-                      </a:pPr>
-                      <a:r>
-                        <a:rPr lang="ru-RU" sz="1100" kern="1200" dirty="0">
-                          <a:solidFill>
-                            <a:schemeClr val="tx1"/>
-                          </a:solidFill>
-                          <a:effectLst/>
-                          <a:latin typeface="Calibri" panose="020F0502020204030204" pitchFamily="34" charset="0"/>
-                          <a:ea typeface="Calibri" panose="020F0502020204030204" pitchFamily="34" charset="0"/>
-                          <a:cs typeface="Times New Roman" panose="02020603050405020304" pitchFamily="18" charset="0"/>
-                        </a:rPr>
-                        <a:t>Значима</a:t>
-                      </a:r>
-                    </a:p>
-                  </a:txBody>
-                  <a:tcPr marL="68580" marR="68580" marT="0" marB="0">
-                    <a:lnL w="9525" cap="flat" cmpd="sng" algn="ctr">
-                      <a:solidFill>
-                        <a:schemeClr val="tx1"/>
-                      </a:solidFill>
-                      <a:prstDash val="solid"/>
-                      <a:round/>
-                      <a:headEnd type="none" w="med" len="med"/>
-                      <a:tailEnd type="none" w="med" len="med"/>
-                    </a:lnL>
-                    <a:lnR w="9525" cap="flat" cmpd="sng" algn="ctr">
-                      <a:solidFill>
-                        <a:schemeClr val="tx1"/>
-                      </a:solidFill>
-                      <a:prstDash val="solid"/>
-                      <a:round/>
-                      <a:headEnd type="none" w="med" len="med"/>
-                      <a:tailEnd type="none" w="med" len="med"/>
-                    </a:lnR>
-                    <a:lnT w="9525" cap="flat" cmpd="sng" algn="ctr">
-                      <a:solidFill>
-                        <a:schemeClr val="tx1"/>
-                      </a:solidFill>
-                      <a:prstDash val="solid"/>
-                      <a:round/>
-                      <a:headEnd type="none" w="med" len="med"/>
-                      <a:tailEnd type="none" w="med" len="med"/>
-                    </a:lnT>
-                    <a:lnB w="9525" cap="flat" cmpd="sng" algn="ctr">
-                      <a:solidFill>
-                        <a:schemeClr val="tx1"/>
-                      </a:solidFill>
-                      <a:prstDash val="solid"/>
-                      <a:round/>
-                      <a:headEnd type="none" w="med" len="med"/>
-                      <a:tailEnd type="none" w="med" len="med"/>
-                    </a:lnB>
-                    <a:noFill/>
-                  </a:tcPr>
-                </a:tc>
-                <a:extLst>
-                  <a:ext uri="{0D108BD9-81ED-4DB2-BD59-A6C34878D82A}">
-                    <a16:rowId xmlns:a16="http://schemas.microsoft.com/office/drawing/2014/main" val="3711788390"/>
-                  </a:ext>
-                </a:extLst>
-              </a:tr>
-              <a:tr h="188630">
-                <a:tc>
-                  <a:txBody>
-                    <a:bodyPr/>
-                    <a:lstStyle/>
-                    <a:p>
-                      <a:pPr marL="0" algn="l" defTabSz="914400" rtl="0" eaLnBrk="1" latinLnBrk="0" hangingPunct="1">
-                        <a:lnSpc>
-                          <a:spcPct val="150000"/>
-                        </a:lnSpc>
-                        <a:spcBef>
-                          <a:spcPts val="1200"/>
-                        </a:spcBef>
-                      </a:pPr>
-                      <a:r>
-                        <a:rPr lang="ru-RU" sz="1100" kern="1200" dirty="0" err="1">
-                          <a:solidFill>
-                            <a:schemeClr val="tx1"/>
-                          </a:solidFill>
-                          <a:effectLst/>
-                          <a:latin typeface="Calibri" panose="020F0502020204030204" pitchFamily="34" charset="0"/>
-                          <a:ea typeface="Calibri" panose="020F0502020204030204" pitchFamily="34" charset="0"/>
-                          <a:cs typeface="Times New Roman" panose="02020603050405020304" pitchFamily="18" charset="0"/>
-                        </a:rPr>
-                        <a:t>trstp</a:t>
-                      </a:r>
-                      <a:r>
-                        <a:rPr lang="en-US" sz="1100" kern="1200" dirty="0">
-                          <a:solidFill>
-                            <a:schemeClr val="tx1"/>
-                          </a:solidFill>
-                          <a:effectLst/>
-                          <a:latin typeface="Calibri" panose="020F0502020204030204" pitchFamily="34" charset="0"/>
-                          <a:ea typeface="Calibri" panose="020F0502020204030204" pitchFamily="34" charset="0"/>
-                          <a:cs typeface="Times New Roman" panose="02020603050405020304" pitchFamily="18" charset="0"/>
-                        </a:rPr>
-                        <a:t>lc</a:t>
-                      </a:r>
-                      <a:endParaRPr lang="ru-RU" sz="1100" kern="1200" dirty="0">
-                        <a:solidFill>
-                          <a:schemeClr val="tx1"/>
-                        </a:solidFill>
-                        <a:effectLst/>
-                        <a:latin typeface="Calibri" panose="020F0502020204030204" pitchFamily="34" charset="0"/>
-                        <a:ea typeface="Calibri" panose="020F0502020204030204" pitchFamily="34" charset="0"/>
-                        <a:cs typeface="Times New Roman" panose="02020603050405020304" pitchFamily="18" charset="0"/>
-                      </a:endParaRPr>
-                    </a:p>
-                  </a:txBody>
-                  <a:tcPr marL="68580" marR="68580" marT="0" marB="0">
-                    <a:lnL w="9525" cap="flat" cmpd="sng" algn="ctr">
-                      <a:solidFill>
-                        <a:schemeClr val="tx1"/>
-                      </a:solidFill>
-                      <a:prstDash val="solid"/>
-                      <a:round/>
-                      <a:headEnd type="none" w="med" len="med"/>
-                      <a:tailEnd type="none" w="med" len="med"/>
-                    </a:lnL>
-                    <a:lnR w="9525" cap="flat" cmpd="sng" algn="ctr">
-                      <a:solidFill>
-                        <a:schemeClr val="tx1"/>
-                      </a:solidFill>
-                      <a:prstDash val="solid"/>
-                      <a:round/>
-                      <a:headEnd type="none" w="med" len="med"/>
-                      <a:tailEnd type="none" w="med" len="med"/>
-                    </a:lnR>
-                    <a:lnT w="9525" cap="flat" cmpd="sng" algn="ctr">
-                      <a:solidFill>
-                        <a:schemeClr val="tx1"/>
-                      </a:solidFill>
-                      <a:prstDash val="solid"/>
-                      <a:round/>
-                      <a:headEnd type="none" w="med" len="med"/>
-                      <a:tailEnd type="none" w="med" len="med"/>
-                    </a:lnT>
-                    <a:lnB w="9525" cap="flat" cmpd="sng" algn="ctr">
-                      <a:solidFill>
-                        <a:schemeClr val="tx1"/>
-                      </a:solidFill>
-                      <a:prstDash val="solid"/>
-                      <a:round/>
-                      <a:headEnd type="none" w="med" len="med"/>
-                      <a:tailEnd type="none" w="med" len="med"/>
-                    </a:lnB>
-                    <a:noFill/>
-                  </a:tcPr>
-                </a:tc>
-                <a:tc>
-                  <a:txBody>
-                    <a:bodyPr/>
-                    <a:lstStyle/>
-                    <a:p>
-                      <a:pPr marL="0" algn="l" defTabSz="914400" rtl="0" eaLnBrk="1" latinLnBrk="0" hangingPunct="1">
-                        <a:lnSpc>
-                          <a:spcPct val="150000"/>
-                        </a:lnSpc>
-                        <a:spcBef>
-                          <a:spcPts val="1200"/>
-                        </a:spcBef>
-                      </a:pPr>
-                      <a:r>
-                        <a:rPr lang="ru-RU" sz="1100" kern="1200" dirty="0">
-                          <a:solidFill>
-                            <a:schemeClr val="tx1"/>
-                          </a:solidFill>
-                          <a:effectLst/>
-                          <a:latin typeface="Calibri" panose="020F0502020204030204" pitchFamily="34" charset="0"/>
-                          <a:ea typeface="+mn-ea"/>
-                          <a:cs typeface="Times New Roman" panose="02020603050405020304" pitchFamily="18" charset="0"/>
-                        </a:rPr>
-                        <a:t> 0.21</a:t>
-                      </a:r>
-                      <a:endParaRPr lang="ru-RU" sz="1100" kern="1200" dirty="0">
-                        <a:solidFill>
-                          <a:schemeClr val="tx1"/>
-                        </a:solidFill>
-                        <a:effectLst/>
-                        <a:latin typeface="Calibri" panose="020F0502020204030204" pitchFamily="34" charset="0"/>
-                        <a:ea typeface="Calibri" panose="020F0502020204030204" pitchFamily="34" charset="0"/>
-                        <a:cs typeface="Times New Roman" panose="02020603050405020304" pitchFamily="18" charset="0"/>
-                      </a:endParaRPr>
-                    </a:p>
-                  </a:txBody>
-                  <a:tcPr marL="68580" marR="68580" marT="0" marB="0">
-                    <a:lnL w="9525" cap="flat" cmpd="sng" algn="ctr">
-                      <a:solidFill>
-                        <a:schemeClr val="tx1"/>
-                      </a:solidFill>
-                      <a:prstDash val="solid"/>
-                      <a:round/>
-                      <a:headEnd type="none" w="med" len="med"/>
-                      <a:tailEnd type="none" w="med" len="med"/>
-                    </a:lnL>
-                    <a:lnR w="9525" cap="flat" cmpd="sng" algn="ctr">
-                      <a:solidFill>
-                        <a:schemeClr val="tx1"/>
-                      </a:solidFill>
-                      <a:prstDash val="solid"/>
-                      <a:round/>
-                      <a:headEnd type="none" w="med" len="med"/>
-                      <a:tailEnd type="none" w="med" len="med"/>
-                    </a:lnR>
-                    <a:lnT w="9525" cap="flat" cmpd="sng" algn="ctr">
-                      <a:solidFill>
-                        <a:schemeClr val="tx1"/>
-                      </a:solidFill>
-                      <a:prstDash val="solid"/>
-                      <a:round/>
-                      <a:headEnd type="none" w="med" len="med"/>
-                      <a:tailEnd type="none" w="med" len="med"/>
-                    </a:lnT>
-                    <a:lnB w="9525" cap="flat" cmpd="sng" algn="ctr">
-                      <a:solidFill>
-                        <a:schemeClr val="tx1"/>
-                      </a:solidFill>
-                      <a:prstDash val="solid"/>
-                      <a:round/>
-                      <a:headEnd type="none" w="med" len="med"/>
-                      <a:tailEnd type="none" w="med" len="med"/>
-                    </a:lnB>
-                    <a:noFill/>
-                  </a:tcPr>
-                </a:tc>
-                <a:tc>
-                  <a:txBody>
-                    <a:bodyPr/>
-                    <a:lstStyle/>
-                    <a:p>
-                      <a:pPr marL="0" algn="l" defTabSz="914400" rtl="0" eaLnBrk="1" latinLnBrk="0" hangingPunct="1">
-                        <a:lnSpc>
-                          <a:spcPct val="150000"/>
-                        </a:lnSpc>
-                        <a:spcBef>
-                          <a:spcPts val="1200"/>
-                        </a:spcBef>
-                      </a:pPr>
-                      <a:r>
-                        <a:rPr lang="ru-RU" sz="1100" kern="1200" dirty="0">
-                          <a:solidFill>
-                            <a:schemeClr val="tx1"/>
-                          </a:solidFill>
-                          <a:effectLst/>
-                          <a:latin typeface="Calibri" panose="020F0502020204030204" pitchFamily="34" charset="0"/>
-                          <a:ea typeface="Calibri" panose="020F0502020204030204" pitchFamily="34" charset="0"/>
-                          <a:cs typeface="Times New Roman" panose="02020603050405020304" pitchFamily="18" charset="0"/>
-                        </a:rPr>
-                        <a:t>Значима</a:t>
-                      </a:r>
-                    </a:p>
-                  </a:txBody>
-                  <a:tcPr marL="68580" marR="68580" marT="0" marB="0">
-                    <a:lnL w="9525" cap="flat" cmpd="sng" algn="ctr">
-                      <a:solidFill>
-                        <a:schemeClr val="tx1"/>
-                      </a:solidFill>
-                      <a:prstDash val="solid"/>
-                      <a:round/>
-                      <a:headEnd type="none" w="med" len="med"/>
-                      <a:tailEnd type="none" w="med" len="med"/>
-                    </a:lnL>
-                    <a:lnR w="9525" cap="flat" cmpd="sng" algn="ctr">
-                      <a:solidFill>
-                        <a:schemeClr val="tx1"/>
-                      </a:solidFill>
-                      <a:prstDash val="solid"/>
-                      <a:round/>
-                      <a:headEnd type="none" w="med" len="med"/>
-                      <a:tailEnd type="none" w="med" len="med"/>
-                    </a:lnR>
-                    <a:lnT w="9525" cap="flat" cmpd="sng" algn="ctr">
-                      <a:solidFill>
-                        <a:schemeClr val="tx1"/>
-                      </a:solidFill>
-                      <a:prstDash val="solid"/>
-                      <a:round/>
-                      <a:headEnd type="none" w="med" len="med"/>
-                      <a:tailEnd type="none" w="med" len="med"/>
-                    </a:lnT>
-                    <a:lnB w="9525" cap="flat" cmpd="sng" algn="ctr">
-                      <a:solidFill>
-                        <a:schemeClr val="tx1"/>
-                      </a:solidFill>
-                      <a:prstDash val="solid"/>
-                      <a:round/>
-                      <a:headEnd type="none" w="med" len="med"/>
-                      <a:tailEnd type="none" w="med" len="med"/>
-                    </a:lnB>
-                    <a:noFill/>
-                  </a:tcPr>
-                </a:tc>
-                <a:extLst>
-                  <a:ext uri="{0D108BD9-81ED-4DB2-BD59-A6C34878D82A}">
-                    <a16:rowId xmlns:a16="http://schemas.microsoft.com/office/drawing/2014/main" val="1267310396"/>
-                  </a:ext>
-                </a:extLst>
-              </a:tr>
-            </a:tbl>
-          </a:graphicData>
-        </a:graphic>
-      </p:graphicFrame>
-      <p:graphicFrame>
-        <p:nvGraphicFramePr>
-          <p:cNvPr id="12" name="Таблица 10">
-            <a:extLst>
-              <a:ext uri="{FF2B5EF4-FFF2-40B4-BE49-F238E27FC236}">
-                <a16:creationId xmlns:a16="http://schemas.microsoft.com/office/drawing/2014/main" id="{288FFE73-71D8-4088-BAB7-2E6BDE0F9AA6}"/>
-              </a:ext>
-            </a:extLst>
-          </p:cNvPr>
-          <p:cNvGraphicFramePr>
-            <a:graphicFrameLocks noGrp="1"/>
-          </p:cNvGraphicFramePr>
-          <p:nvPr>
-            <p:extLst>
-              <p:ext uri="{D42A27DB-BD31-4B8C-83A1-F6EECF244321}">
-                <p14:modId xmlns:p14="http://schemas.microsoft.com/office/powerpoint/2010/main" val="2690113367"/>
-              </p:ext>
-            </p:extLst>
-          </p:nvPr>
-        </p:nvGraphicFramePr>
-        <p:xfrm>
-          <a:off x="6360544" y="3564609"/>
-          <a:ext cx="5120640" cy="921514"/>
-        </p:xfrm>
-        <a:graphic>
-          <a:graphicData uri="http://schemas.openxmlformats.org/drawingml/2006/table">
-            <a:tbl>
-              <a:tblPr firstRow="1" bandRow="1">
-                <a:tableStyleId>{5C22544A-7EE6-4342-B048-85BDC9FD1C3A}</a:tableStyleId>
-              </a:tblPr>
-              <a:tblGrid>
-                <a:gridCol w="1936129">
-                  <a:extLst>
-                    <a:ext uri="{9D8B030D-6E8A-4147-A177-3AD203B41FA5}">
-                      <a16:colId xmlns:a16="http://schemas.microsoft.com/office/drawing/2014/main" val="281395215"/>
-                    </a:ext>
-                  </a:extLst>
-                </a:gridCol>
-                <a:gridCol w="1549668">
-                  <a:extLst>
-                    <a:ext uri="{9D8B030D-6E8A-4147-A177-3AD203B41FA5}">
-                      <a16:colId xmlns:a16="http://schemas.microsoft.com/office/drawing/2014/main" val="454134994"/>
-                    </a:ext>
-                  </a:extLst>
-                </a:gridCol>
-                <a:gridCol w="1634843">
-                  <a:extLst>
-                    <a:ext uri="{9D8B030D-6E8A-4147-A177-3AD203B41FA5}">
-                      <a16:colId xmlns:a16="http://schemas.microsoft.com/office/drawing/2014/main" val="4245603752"/>
-                    </a:ext>
-                  </a:extLst>
-                </a:gridCol>
-              </a:tblGrid>
-              <a:tr h="207692">
-                <a:tc>
-                  <a:txBody>
-                    <a:bodyPr/>
-                    <a:lstStyle/>
-                    <a:p>
-                      <a:pPr>
-                        <a:lnSpc>
-                          <a:spcPct val="150000"/>
-                        </a:lnSpc>
-                        <a:spcBef>
-                          <a:spcPts val="1200"/>
-                        </a:spcBef>
-                      </a:pPr>
-                      <a:r>
-                        <a:rPr lang="ru-RU" sz="1200" dirty="0">
-                          <a:solidFill>
-                            <a:schemeClr val="tx1"/>
-                          </a:solidFill>
-                          <a:effectLst/>
-                          <a:latin typeface="Times New Roman" panose="02020603050405020304" pitchFamily="18" charset="0"/>
-                          <a:ea typeface="Calibri" panose="020F0502020204030204" pitchFamily="34" charset="0"/>
-                          <a:cs typeface="Times New Roman" panose="02020603050405020304" pitchFamily="18" charset="0"/>
-                        </a:rPr>
-                        <a:t>Переменная для РФ</a:t>
-                      </a:r>
-                      <a:endParaRPr lang="ru-RU" sz="1100" dirty="0">
-                        <a:solidFill>
-                          <a:schemeClr val="tx1"/>
-                        </a:solidFill>
-                        <a:effectLst/>
-                        <a:latin typeface="Calibri" panose="020F0502020204030204" pitchFamily="34" charset="0"/>
-                        <a:ea typeface="Calibri" panose="020F0502020204030204" pitchFamily="34" charset="0"/>
-                        <a:cs typeface="Times New Roman" panose="02020603050405020304" pitchFamily="18" charset="0"/>
-                      </a:endParaRPr>
-                    </a:p>
-                  </a:txBody>
-                  <a:tcPr marL="68580" marR="68580" marT="0" marB="0">
-                    <a:lnL w="9525" cap="flat" cmpd="sng" algn="ctr">
-                      <a:solidFill>
-                        <a:schemeClr val="tx1"/>
-                      </a:solidFill>
-                      <a:prstDash val="solid"/>
-                      <a:round/>
-                      <a:headEnd type="none" w="med" len="med"/>
-                      <a:tailEnd type="none" w="med" len="med"/>
-                    </a:lnL>
-                    <a:lnR w="9525" cap="flat" cmpd="sng" algn="ctr">
-                      <a:solidFill>
-                        <a:schemeClr val="tx1"/>
-                      </a:solidFill>
-                      <a:prstDash val="solid"/>
-                      <a:round/>
-                      <a:headEnd type="none" w="med" len="med"/>
-                      <a:tailEnd type="none" w="med" len="med"/>
-                    </a:lnR>
-                    <a:lnT w="9525" cap="flat" cmpd="sng" algn="ctr">
-                      <a:solidFill>
-                        <a:schemeClr val="tx1"/>
-                      </a:solidFill>
-                      <a:prstDash val="solid"/>
-                      <a:round/>
-                      <a:headEnd type="none" w="med" len="med"/>
-                      <a:tailEnd type="none" w="med" len="med"/>
-                    </a:lnT>
-                    <a:lnB w="9525" cap="flat" cmpd="sng" algn="ctr">
-                      <a:solidFill>
-                        <a:schemeClr val="tx1"/>
-                      </a:solidFill>
-                      <a:prstDash val="solid"/>
-                      <a:round/>
-                      <a:headEnd type="none" w="med" len="med"/>
-                      <a:tailEnd type="none" w="med" len="med"/>
-                    </a:lnB>
-                    <a:noFill/>
-                  </a:tcPr>
-                </a:tc>
-                <a:tc>
-                  <a:txBody>
-                    <a:bodyPr/>
-                    <a:lstStyle/>
-                    <a:p>
-                      <a:pPr>
-                        <a:lnSpc>
-                          <a:spcPct val="150000"/>
-                        </a:lnSpc>
-                        <a:spcBef>
-                          <a:spcPts val="1200"/>
-                        </a:spcBef>
-                      </a:pPr>
-                      <a:r>
-                        <a:rPr lang="ru-RU" sz="1100" dirty="0">
-                          <a:solidFill>
-                            <a:schemeClr val="tx1"/>
-                          </a:solidFill>
-                          <a:effectLst/>
-                          <a:latin typeface="Calibri" panose="020F0502020204030204" pitchFamily="34" charset="0"/>
-                          <a:ea typeface="Calibri" panose="020F0502020204030204" pitchFamily="34" charset="0"/>
-                          <a:cs typeface="Times New Roman" panose="02020603050405020304" pitchFamily="18" charset="0"/>
-                        </a:rPr>
-                        <a:t>Корреляция с </a:t>
-                      </a:r>
-                      <a:r>
-                        <a:rPr lang="en-US" sz="1100" dirty="0">
-                          <a:solidFill>
-                            <a:schemeClr val="tx1"/>
-                          </a:solidFill>
-                          <a:effectLst/>
-                          <a:latin typeface="Calibri" panose="020F0502020204030204" pitchFamily="34" charset="0"/>
-                          <a:ea typeface="Calibri" panose="020F0502020204030204" pitchFamily="34" charset="0"/>
-                          <a:cs typeface="Times New Roman" panose="02020603050405020304" pitchFamily="18" charset="0"/>
-                        </a:rPr>
-                        <a:t>happy</a:t>
-                      </a:r>
-                      <a:endParaRPr lang="ru-RU" sz="1100" dirty="0">
-                        <a:solidFill>
-                          <a:schemeClr val="tx1"/>
-                        </a:solidFill>
-                        <a:effectLst/>
-                        <a:latin typeface="Calibri" panose="020F0502020204030204" pitchFamily="34" charset="0"/>
-                        <a:ea typeface="Calibri" panose="020F0502020204030204" pitchFamily="34" charset="0"/>
-                        <a:cs typeface="Times New Roman" panose="02020603050405020304" pitchFamily="18" charset="0"/>
-                      </a:endParaRPr>
-                    </a:p>
-                  </a:txBody>
-                  <a:tcPr marL="68580" marR="68580" marT="0" marB="0">
-                    <a:lnL w="9525" cap="flat" cmpd="sng" algn="ctr">
-                      <a:solidFill>
-                        <a:schemeClr val="tx1"/>
-                      </a:solidFill>
-                      <a:prstDash val="solid"/>
-                      <a:round/>
-                      <a:headEnd type="none" w="med" len="med"/>
-                      <a:tailEnd type="none" w="med" len="med"/>
-                    </a:lnL>
-                    <a:lnR w="9525" cap="flat" cmpd="sng" algn="ctr">
-                      <a:solidFill>
-                        <a:schemeClr val="tx1"/>
-                      </a:solidFill>
-                      <a:prstDash val="solid"/>
-                      <a:round/>
-                      <a:headEnd type="none" w="med" len="med"/>
-                      <a:tailEnd type="none" w="med" len="med"/>
-                    </a:lnR>
-                    <a:lnT w="9525" cap="flat" cmpd="sng" algn="ctr">
-                      <a:solidFill>
-                        <a:schemeClr val="tx1"/>
-                      </a:solidFill>
-                      <a:prstDash val="solid"/>
-                      <a:round/>
-                      <a:headEnd type="none" w="med" len="med"/>
-                      <a:tailEnd type="none" w="med" len="med"/>
-                    </a:lnT>
-                    <a:lnB w="9525" cap="flat" cmpd="sng" algn="ctr">
-                      <a:solidFill>
-                        <a:schemeClr val="tx1"/>
-                      </a:solidFill>
-                      <a:prstDash val="solid"/>
-                      <a:round/>
-                      <a:headEnd type="none" w="med" len="med"/>
-                      <a:tailEnd type="none" w="med" len="med"/>
-                    </a:lnB>
-                    <a:noFill/>
-                  </a:tcPr>
-                </a:tc>
-                <a:tc>
-                  <a:txBody>
-                    <a:bodyPr/>
-                    <a:lstStyle/>
-                    <a:p>
-                      <a:pPr>
-                        <a:lnSpc>
-                          <a:spcPct val="150000"/>
-                        </a:lnSpc>
-                        <a:spcBef>
-                          <a:spcPts val="1200"/>
-                        </a:spcBef>
-                      </a:pPr>
-                      <a:r>
-                        <a:rPr lang="ru-RU" sz="1100" dirty="0">
-                          <a:solidFill>
-                            <a:schemeClr val="tx1"/>
-                          </a:solidFill>
-                          <a:effectLst/>
-                          <a:latin typeface="Calibri" panose="020F0502020204030204" pitchFamily="34" charset="0"/>
-                          <a:ea typeface="Calibri" panose="020F0502020204030204" pitchFamily="34" charset="0"/>
-                          <a:cs typeface="Times New Roman" panose="02020603050405020304" pitchFamily="18" charset="0"/>
-                        </a:rPr>
-                        <a:t>Значимость</a:t>
-                      </a:r>
-                    </a:p>
-                  </a:txBody>
-                  <a:tcPr marL="68580" marR="68580" marT="0" marB="0">
-                    <a:lnL w="9525" cap="flat" cmpd="sng" algn="ctr">
-                      <a:solidFill>
-                        <a:schemeClr val="tx1"/>
-                      </a:solidFill>
-                      <a:prstDash val="solid"/>
-                      <a:round/>
-                      <a:headEnd type="none" w="med" len="med"/>
-                      <a:tailEnd type="none" w="med" len="med"/>
-                    </a:lnL>
-                    <a:lnR w="9525" cap="flat" cmpd="sng" algn="ctr">
-                      <a:solidFill>
-                        <a:schemeClr val="tx1"/>
-                      </a:solidFill>
-                      <a:prstDash val="solid"/>
-                      <a:round/>
-                      <a:headEnd type="none" w="med" len="med"/>
-                      <a:tailEnd type="none" w="med" len="med"/>
-                    </a:lnR>
-                    <a:lnT w="9525" cap="flat" cmpd="sng" algn="ctr">
-                      <a:solidFill>
-                        <a:schemeClr val="tx1"/>
-                      </a:solidFill>
-                      <a:prstDash val="solid"/>
-                      <a:round/>
-                      <a:headEnd type="none" w="med" len="med"/>
-                      <a:tailEnd type="none" w="med" len="med"/>
-                    </a:lnT>
-                    <a:lnB w="9525" cap="flat" cmpd="sng" algn="ctr">
-                      <a:solidFill>
-                        <a:schemeClr val="tx1"/>
-                      </a:solidFill>
-                      <a:prstDash val="solid"/>
-                      <a:round/>
-                      <a:headEnd type="none" w="med" len="med"/>
-                      <a:tailEnd type="none" w="med" len="med"/>
-                    </a:lnB>
-                    <a:noFill/>
-                  </a:tcPr>
-                </a:tc>
-                <a:extLst>
-                  <a:ext uri="{0D108BD9-81ED-4DB2-BD59-A6C34878D82A}">
-                    <a16:rowId xmlns:a16="http://schemas.microsoft.com/office/drawing/2014/main" val="2492690188"/>
-                  </a:ext>
-                </a:extLst>
-              </a:tr>
-              <a:tr h="207692">
-                <a:tc>
-                  <a:txBody>
-                    <a:bodyPr/>
-                    <a:lstStyle/>
-                    <a:p>
-                      <a:pPr marL="0" algn="l" defTabSz="914400" rtl="0" eaLnBrk="1" latinLnBrk="0" hangingPunct="1">
-                        <a:lnSpc>
-                          <a:spcPct val="150000"/>
-                        </a:lnSpc>
-                        <a:spcBef>
-                          <a:spcPts val="1200"/>
-                        </a:spcBef>
-                      </a:pPr>
-                      <a:r>
-                        <a:rPr lang="en-US" sz="1100" kern="1200" dirty="0">
-                          <a:solidFill>
-                            <a:schemeClr val="tx1"/>
-                          </a:solidFill>
-                          <a:effectLst/>
-                          <a:latin typeface="Calibri" panose="020F0502020204030204" pitchFamily="34" charset="0"/>
-                          <a:ea typeface="Calibri" panose="020F0502020204030204" pitchFamily="34" charset="0"/>
-                          <a:cs typeface="Times New Roman" panose="02020603050405020304" pitchFamily="18" charset="0"/>
-                        </a:rPr>
-                        <a:t>Health</a:t>
-                      </a:r>
-                      <a:r>
-                        <a:rPr lang="ru-RU" sz="1100" kern="1200" dirty="0">
-                          <a:solidFill>
-                            <a:schemeClr val="tx1"/>
-                          </a:solidFill>
-                          <a:effectLst/>
-                          <a:latin typeface="Calibri" panose="020F0502020204030204" pitchFamily="34" charset="0"/>
-                          <a:ea typeface="Calibri" panose="020F0502020204030204" pitchFamily="34" charset="0"/>
-                          <a:cs typeface="Times New Roman" panose="02020603050405020304" pitchFamily="18" charset="0"/>
-                        </a:rPr>
-                        <a:t> </a:t>
-                      </a:r>
-                    </a:p>
-                  </a:txBody>
-                  <a:tcPr marL="68580" marR="68580" marT="0" marB="0">
-                    <a:lnL w="9525" cap="flat" cmpd="sng" algn="ctr">
-                      <a:solidFill>
-                        <a:schemeClr val="tx1"/>
-                      </a:solidFill>
-                      <a:prstDash val="solid"/>
-                      <a:round/>
-                      <a:headEnd type="none" w="med" len="med"/>
-                      <a:tailEnd type="none" w="med" len="med"/>
-                    </a:lnL>
-                    <a:lnR w="9525" cap="flat" cmpd="sng" algn="ctr">
-                      <a:solidFill>
-                        <a:schemeClr val="tx1"/>
-                      </a:solidFill>
-                      <a:prstDash val="solid"/>
-                      <a:round/>
-                      <a:headEnd type="none" w="med" len="med"/>
-                      <a:tailEnd type="none" w="med" len="med"/>
-                    </a:lnR>
-                    <a:lnT w="9525" cap="flat" cmpd="sng" algn="ctr">
-                      <a:solidFill>
-                        <a:schemeClr val="tx1"/>
-                      </a:solidFill>
-                      <a:prstDash val="solid"/>
-                      <a:round/>
-                      <a:headEnd type="none" w="med" len="med"/>
-                      <a:tailEnd type="none" w="med" len="med"/>
-                    </a:lnT>
-                    <a:lnB w="9525" cap="flat" cmpd="sng" algn="ctr">
-                      <a:solidFill>
-                        <a:schemeClr val="tx1"/>
-                      </a:solidFill>
-                      <a:prstDash val="solid"/>
-                      <a:round/>
-                      <a:headEnd type="none" w="med" len="med"/>
-                      <a:tailEnd type="none" w="med" len="med"/>
-                    </a:lnB>
-                    <a:noFill/>
-                  </a:tcPr>
-                </a:tc>
-                <a:tc>
-                  <a:txBody>
-                    <a:bodyPr/>
-                    <a:lstStyle/>
-                    <a:p>
-                      <a:pPr marL="0" algn="l" defTabSz="914400" rtl="0" eaLnBrk="1" latinLnBrk="0" hangingPunct="1">
-                        <a:lnSpc>
-                          <a:spcPct val="150000"/>
-                        </a:lnSpc>
-                        <a:spcBef>
-                          <a:spcPts val="1200"/>
-                        </a:spcBef>
-                      </a:pPr>
-                      <a:r>
-                        <a:rPr lang="ru-RU" sz="1100" kern="1200" dirty="0">
-                          <a:solidFill>
-                            <a:schemeClr val="tx1"/>
-                          </a:solidFill>
-                          <a:effectLst/>
-                          <a:latin typeface="Calibri" panose="020F0502020204030204" pitchFamily="34" charset="0"/>
-                          <a:ea typeface="+mn-ea"/>
-                          <a:cs typeface="Times New Roman" panose="02020603050405020304" pitchFamily="18" charset="0"/>
-                        </a:rPr>
-                        <a:t>-0.31</a:t>
-                      </a:r>
-                      <a:endParaRPr lang="ru-RU" sz="1100" kern="1200" dirty="0">
-                        <a:solidFill>
-                          <a:schemeClr val="tx1"/>
-                        </a:solidFill>
-                        <a:effectLst/>
-                        <a:latin typeface="Calibri" panose="020F0502020204030204" pitchFamily="34" charset="0"/>
-                        <a:ea typeface="Calibri" panose="020F0502020204030204" pitchFamily="34" charset="0"/>
-                        <a:cs typeface="Times New Roman" panose="02020603050405020304" pitchFamily="18" charset="0"/>
-                      </a:endParaRPr>
-                    </a:p>
-                  </a:txBody>
-                  <a:tcPr marL="68580" marR="68580" marT="0" marB="0">
-                    <a:lnL w="9525" cap="flat" cmpd="sng" algn="ctr">
-                      <a:solidFill>
-                        <a:schemeClr val="tx1"/>
-                      </a:solidFill>
-                      <a:prstDash val="solid"/>
-                      <a:round/>
-                      <a:headEnd type="none" w="med" len="med"/>
-                      <a:tailEnd type="none" w="med" len="med"/>
-                    </a:lnL>
-                    <a:lnR w="9525" cap="flat" cmpd="sng" algn="ctr">
-                      <a:solidFill>
-                        <a:schemeClr val="tx1"/>
-                      </a:solidFill>
-                      <a:prstDash val="solid"/>
-                      <a:round/>
-                      <a:headEnd type="none" w="med" len="med"/>
-                      <a:tailEnd type="none" w="med" len="med"/>
-                    </a:lnR>
-                    <a:lnT w="9525" cap="flat" cmpd="sng" algn="ctr">
-                      <a:solidFill>
-                        <a:schemeClr val="tx1"/>
-                      </a:solidFill>
-                      <a:prstDash val="solid"/>
-                      <a:round/>
-                      <a:headEnd type="none" w="med" len="med"/>
-                      <a:tailEnd type="none" w="med" len="med"/>
-                    </a:lnT>
-                    <a:lnB w="9525" cap="flat" cmpd="sng" algn="ctr">
-                      <a:solidFill>
-                        <a:schemeClr val="tx1"/>
-                      </a:solidFill>
-                      <a:prstDash val="solid"/>
-                      <a:round/>
-                      <a:headEnd type="none" w="med" len="med"/>
-                      <a:tailEnd type="none" w="med" len="med"/>
-                    </a:lnB>
-                    <a:noFill/>
-                  </a:tcPr>
-                </a:tc>
-                <a:tc>
-                  <a:txBody>
-                    <a:bodyPr/>
-                    <a:lstStyle/>
-                    <a:p>
-                      <a:pPr marL="0" algn="l" defTabSz="914400" rtl="0" eaLnBrk="1" latinLnBrk="0" hangingPunct="1">
-                        <a:lnSpc>
-                          <a:spcPct val="150000"/>
-                        </a:lnSpc>
-                        <a:spcBef>
-                          <a:spcPts val="1200"/>
-                        </a:spcBef>
-                      </a:pPr>
-                      <a:r>
-                        <a:rPr lang="ru-RU" sz="1100" kern="1200" dirty="0">
-                          <a:solidFill>
-                            <a:schemeClr val="tx1"/>
-                          </a:solidFill>
-                          <a:effectLst/>
-                          <a:latin typeface="Calibri" panose="020F0502020204030204" pitchFamily="34" charset="0"/>
-                          <a:ea typeface="Calibri" panose="020F0502020204030204" pitchFamily="34" charset="0"/>
-                          <a:cs typeface="Times New Roman" panose="02020603050405020304" pitchFamily="18" charset="0"/>
-                        </a:rPr>
-                        <a:t>Значима</a:t>
-                      </a:r>
-                    </a:p>
-                  </a:txBody>
-                  <a:tcPr marL="68580" marR="68580" marT="0" marB="0">
-                    <a:lnL w="9525" cap="flat" cmpd="sng" algn="ctr">
-                      <a:solidFill>
-                        <a:schemeClr val="tx1"/>
-                      </a:solidFill>
-                      <a:prstDash val="solid"/>
-                      <a:round/>
-                      <a:headEnd type="none" w="med" len="med"/>
-                      <a:tailEnd type="none" w="med" len="med"/>
-                    </a:lnL>
-                    <a:lnR w="9525" cap="flat" cmpd="sng" algn="ctr">
-                      <a:solidFill>
-                        <a:schemeClr val="tx1"/>
-                      </a:solidFill>
-                      <a:prstDash val="solid"/>
-                      <a:round/>
-                      <a:headEnd type="none" w="med" len="med"/>
-                      <a:tailEnd type="none" w="med" len="med"/>
-                    </a:lnR>
-                    <a:lnT w="9525" cap="flat" cmpd="sng" algn="ctr">
-                      <a:solidFill>
-                        <a:schemeClr val="tx1"/>
-                      </a:solidFill>
-                      <a:prstDash val="solid"/>
-                      <a:round/>
-                      <a:headEnd type="none" w="med" len="med"/>
-                      <a:tailEnd type="none" w="med" len="med"/>
-                    </a:lnT>
-                    <a:lnB w="9525" cap="flat" cmpd="sng" algn="ctr">
-                      <a:solidFill>
-                        <a:schemeClr val="tx1"/>
-                      </a:solidFill>
-                      <a:prstDash val="solid"/>
-                      <a:round/>
-                      <a:headEnd type="none" w="med" len="med"/>
-                      <a:tailEnd type="none" w="med" len="med"/>
-                    </a:lnB>
-                    <a:noFill/>
-                  </a:tcPr>
-                </a:tc>
-                <a:extLst>
-                  <a:ext uri="{0D108BD9-81ED-4DB2-BD59-A6C34878D82A}">
-                    <a16:rowId xmlns:a16="http://schemas.microsoft.com/office/drawing/2014/main" val="695215291"/>
-                  </a:ext>
-                </a:extLst>
-              </a:tr>
-              <a:tr h="189126">
-                <a:tc>
-                  <a:txBody>
-                    <a:bodyPr/>
-                    <a:lstStyle/>
-                    <a:p>
-                      <a:pPr marL="0" algn="l" defTabSz="914400" rtl="0" eaLnBrk="1" latinLnBrk="0" hangingPunct="1">
-                        <a:lnSpc>
-                          <a:spcPct val="150000"/>
-                        </a:lnSpc>
-                        <a:spcBef>
-                          <a:spcPts val="1200"/>
-                        </a:spcBef>
-                      </a:pPr>
-                      <a:r>
-                        <a:rPr lang="en-US" sz="1100" kern="1200" dirty="0" err="1">
-                          <a:solidFill>
-                            <a:schemeClr val="tx1"/>
-                          </a:solidFill>
-                          <a:effectLst/>
-                          <a:latin typeface="Calibri" panose="020F0502020204030204" pitchFamily="34" charset="0"/>
-                          <a:ea typeface="Calibri" panose="020F0502020204030204" pitchFamily="34" charset="0"/>
-                          <a:cs typeface="Times New Roman" panose="02020603050405020304" pitchFamily="18" charset="0"/>
-                        </a:rPr>
-                        <a:t>hincfel</a:t>
-                      </a:r>
-                      <a:endParaRPr lang="ru-RU" sz="1100" kern="1200" dirty="0">
-                        <a:solidFill>
-                          <a:schemeClr val="tx1"/>
-                        </a:solidFill>
-                        <a:effectLst/>
-                        <a:latin typeface="Calibri" panose="020F0502020204030204" pitchFamily="34" charset="0"/>
-                        <a:ea typeface="Calibri" panose="020F0502020204030204" pitchFamily="34" charset="0"/>
-                        <a:cs typeface="Times New Roman" panose="02020603050405020304" pitchFamily="18" charset="0"/>
-                      </a:endParaRPr>
-                    </a:p>
-                  </a:txBody>
-                  <a:tcPr marL="68580" marR="68580" marT="0" marB="0">
-                    <a:lnL w="9525" cap="flat" cmpd="sng" algn="ctr">
-                      <a:solidFill>
-                        <a:schemeClr val="tx1"/>
-                      </a:solidFill>
-                      <a:prstDash val="solid"/>
-                      <a:round/>
-                      <a:headEnd type="none" w="med" len="med"/>
-                      <a:tailEnd type="none" w="med" len="med"/>
-                    </a:lnL>
-                    <a:lnR w="9525" cap="flat" cmpd="sng" algn="ctr">
-                      <a:solidFill>
-                        <a:schemeClr val="tx1"/>
-                      </a:solidFill>
-                      <a:prstDash val="solid"/>
-                      <a:round/>
-                      <a:headEnd type="none" w="med" len="med"/>
-                      <a:tailEnd type="none" w="med" len="med"/>
-                    </a:lnR>
-                    <a:lnT w="9525" cap="flat" cmpd="sng" algn="ctr">
-                      <a:solidFill>
-                        <a:schemeClr val="tx1"/>
-                      </a:solidFill>
-                      <a:prstDash val="solid"/>
-                      <a:round/>
-                      <a:headEnd type="none" w="med" len="med"/>
-                      <a:tailEnd type="none" w="med" len="med"/>
-                    </a:lnT>
-                    <a:lnB w="9525" cap="flat" cmpd="sng" algn="ctr">
-                      <a:solidFill>
-                        <a:schemeClr val="tx1"/>
-                      </a:solidFill>
-                      <a:prstDash val="solid"/>
-                      <a:round/>
-                      <a:headEnd type="none" w="med" len="med"/>
-                      <a:tailEnd type="none" w="med" len="med"/>
-                    </a:lnB>
-                    <a:noFill/>
-                  </a:tcPr>
-                </a:tc>
-                <a:tc>
-                  <a:txBody>
-                    <a:bodyPr/>
-                    <a:lstStyle/>
-                    <a:p>
-                      <a:pPr marL="0" algn="l" defTabSz="914400" rtl="0" eaLnBrk="1" latinLnBrk="0" hangingPunct="1">
-                        <a:lnSpc>
-                          <a:spcPct val="150000"/>
-                        </a:lnSpc>
-                        <a:spcBef>
-                          <a:spcPts val="1200"/>
-                        </a:spcBef>
-                      </a:pPr>
-                      <a:r>
-                        <a:rPr lang="ru-RU" sz="1100" kern="1200" dirty="0">
-                          <a:solidFill>
-                            <a:schemeClr val="tx1"/>
-                          </a:solidFill>
-                          <a:effectLst/>
-                          <a:latin typeface="Calibri" panose="020F0502020204030204" pitchFamily="34" charset="0"/>
-                          <a:ea typeface="+mn-ea"/>
-                          <a:cs typeface="Times New Roman" panose="02020603050405020304" pitchFamily="18" charset="0"/>
-                        </a:rPr>
-                        <a:t>-0.25 </a:t>
-                      </a:r>
-                      <a:endParaRPr lang="ru-RU" sz="1100" kern="1200" dirty="0">
-                        <a:solidFill>
-                          <a:schemeClr val="tx1"/>
-                        </a:solidFill>
-                        <a:effectLst/>
-                        <a:latin typeface="Calibri" panose="020F0502020204030204" pitchFamily="34" charset="0"/>
-                        <a:ea typeface="Calibri" panose="020F0502020204030204" pitchFamily="34" charset="0"/>
-                        <a:cs typeface="Times New Roman" panose="02020603050405020304" pitchFamily="18" charset="0"/>
-                      </a:endParaRPr>
-                    </a:p>
-                  </a:txBody>
-                  <a:tcPr marL="68580" marR="68580" marT="0" marB="0">
-                    <a:lnL w="9525" cap="flat" cmpd="sng" algn="ctr">
-                      <a:solidFill>
-                        <a:schemeClr val="tx1"/>
-                      </a:solidFill>
-                      <a:prstDash val="solid"/>
-                      <a:round/>
-                      <a:headEnd type="none" w="med" len="med"/>
-                      <a:tailEnd type="none" w="med" len="med"/>
-                    </a:lnL>
-                    <a:lnR w="9525" cap="flat" cmpd="sng" algn="ctr">
-                      <a:solidFill>
-                        <a:schemeClr val="tx1"/>
-                      </a:solidFill>
-                      <a:prstDash val="solid"/>
-                      <a:round/>
-                      <a:headEnd type="none" w="med" len="med"/>
-                      <a:tailEnd type="none" w="med" len="med"/>
-                    </a:lnR>
-                    <a:lnT w="9525" cap="flat" cmpd="sng" algn="ctr">
-                      <a:solidFill>
-                        <a:schemeClr val="tx1"/>
-                      </a:solidFill>
-                      <a:prstDash val="solid"/>
-                      <a:round/>
-                      <a:headEnd type="none" w="med" len="med"/>
-                      <a:tailEnd type="none" w="med" len="med"/>
-                    </a:lnT>
-                    <a:lnB w="9525" cap="flat" cmpd="sng" algn="ctr">
-                      <a:solidFill>
-                        <a:schemeClr val="tx1"/>
-                      </a:solidFill>
-                      <a:prstDash val="solid"/>
-                      <a:round/>
-                      <a:headEnd type="none" w="med" len="med"/>
-                      <a:tailEnd type="none" w="med" len="med"/>
-                    </a:lnB>
-                    <a:noFill/>
-                  </a:tcPr>
-                </a:tc>
-                <a:tc>
-                  <a:txBody>
-                    <a:bodyPr/>
-                    <a:lstStyle/>
-                    <a:p>
-                      <a:pPr marL="0" algn="l" defTabSz="914400" rtl="0" eaLnBrk="1" latinLnBrk="0" hangingPunct="1">
-                        <a:lnSpc>
-                          <a:spcPct val="150000"/>
-                        </a:lnSpc>
-                        <a:spcBef>
-                          <a:spcPts val="1200"/>
-                        </a:spcBef>
-                      </a:pPr>
-                      <a:r>
-                        <a:rPr lang="ru-RU" sz="1100" kern="1200" dirty="0">
-                          <a:solidFill>
-                            <a:schemeClr val="tx1"/>
-                          </a:solidFill>
-                          <a:effectLst/>
-                          <a:latin typeface="Calibri" panose="020F0502020204030204" pitchFamily="34" charset="0"/>
-                          <a:ea typeface="Calibri" panose="020F0502020204030204" pitchFamily="34" charset="0"/>
-                          <a:cs typeface="Times New Roman" panose="02020603050405020304" pitchFamily="18" charset="0"/>
-                        </a:rPr>
-                        <a:t>Значима</a:t>
-                      </a:r>
-                    </a:p>
-                  </a:txBody>
-                  <a:tcPr marL="68580" marR="68580" marT="0" marB="0">
-                    <a:lnL w="9525" cap="flat" cmpd="sng" algn="ctr">
-                      <a:solidFill>
-                        <a:schemeClr val="tx1"/>
-                      </a:solidFill>
-                      <a:prstDash val="solid"/>
-                      <a:round/>
-                      <a:headEnd type="none" w="med" len="med"/>
-                      <a:tailEnd type="none" w="med" len="med"/>
-                    </a:lnL>
-                    <a:lnR w="9525" cap="flat" cmpd="sng" algn="ctr">
-                      <a:solidFill>
-                        <a:schemeClr val="tx1"/>
-                      </a:solidFill>
-                      <a:prstDash val="solid"/>
-                      <a:round/>
-                      <a:headEnd type="none" w="med" len="med"/>
-                      <a:tailEnd type="none" w="med" len="med"/>
-                    </a:lnR>
-                    <a:lnT w="9525" cap="flat" cmpd="sng" algn="ctr">
-                      <a:solidFill>
-                        <a:schemeClr val="tx1"/>
-                      </a:solidFill>
-                      <a:prstDash val="solid"/>
-                      <a:round/>
-                      <a:headEnd type="none" w="med" len="med"/>
-                      <a:tailEnd type="none" w="med" len="med"/>
-                    </a:lnT>
-                    <a:lnB w="9525" cap="flat" cmpd="sng" algn="ctr">
-                      <a:solidFill>
-                        <a:schemeClr val="tx1"/>
-                      </a:solidFill>
-                      <a:prstDash val="solid"/>
-                      <a:round/>
-                      <a:headEnd type="none" w="med" len="med"/>
-                      <a:tailEnd type="none" w="med" len="med"/>
-                    </a:lnB>
-                    <a:noFill/>
-                  </a:tcPr>
-                </a:tc>
-                <a:extLst>
-                  <a:ext uri="{0D108BD9-81ED-4DB2-BD59-A6C34878D82A}">
-                    <a16:rowId xmlns:a16="http://schemas.microsoft.com/office/drawing/2014/main" val="3711788390"/>
-                  </a:ext>
-                </a:extLst>
-              </a:tr>
-              <a:tr h="0">
-                <a:tc>
-                  <a:txBody>
-                    <a:bodyPr/>
-                    <a:lstStyle/>
-                    <a:p>
-                      <a:pPr marL="0" algn="l" defTabSz="914400" rtl="0" eaLnBrk="1" latinLnBrk="0" hangingPunct="1">
-                        <a:lnSpc>
-                          <a:spcPct val="150000"/>
-                        </a:lnSpc>
-                        <a:spcBef>
-                          <a:spcPts val="1200"/>
-                        </a:spcBef>
-                      </a:pPr>
-                      <a:r>
-                        <a:rPr lang="en-GB" sz="1100" kern="1200" dirty="0" err="1">
-                          <a:solidFill>
-                            <a:schemeClr val="tx1"/>
-                          </a:solidFill>
-                          <a:effectLst/>
-                          <a:latin typeface="Calibri" panose="020F0502020204030204" pitchFamily="34" charset="0"/>
-                          <a:ea typeface="+mn-ea"/>
-                          <a:cs typeface="Times New Roman" panose="02020603050405020304" pitchFamily="18" charset="0"/>
-                        </a:rPr>
-                        <a:t>agea</a:t>
-                      </a:r>
-                      <a:endParaRPr lang="ru-RU" sz="1100" kern="1200" dirty="0">
-                        <a:solidFill>
-                          <a:schemeClr val="tx1"/>
-                        </a:solidFill>
-                        <a:effectLst/>
-                        <a:latin typeface="Calibri" panose="020F0502020204030204" pitchFamily="34" charset="0"/>
-                        <a:ea typeface="Calibri" panose="020F0502020204030204" pitchFamily="34" charset="0"/>
-                        <a:cs typeface="Times New Roman" panose="02020603050405020304" pitchFamily="18" charset="0"/>
-                      </a:endParaRPr>
-                    </a:p>
-                  </a:txBody>
-                  <a:tcPr marL="68580" marR="68580" marT="0" marB="0">
-                    <a:lnL w="9525" cap="flat" cmpd="sng" algn="ctr">
-                      <a:solidFill>
-                        <a:schemeClr val="tx1"/>
-                      </a:solidFill>
-                      <a:prstDash val="solid"/>
-                      <a:round/>
-                      <a:headEnd type="none" w="med" len="med"/>
-                      <a:tailEnd type="none" w="med" len="med"/>
-                    </a:lnL>
-                    <a:lnR w="9525" cap="flat" cmpd="sng" algn="ctr">
-                      <a:solidFill>
-                        <a:schemeClr val="tx1"/>
-                      </a:solidFill>
-                      <a:prstDash val="solid"/>
-                      <a:round/>
-                      <a:headEnd type="none" w="med" len="med"/>
-                      <a:tailEnd type="none" w="med" len="med"/>
-                    </a:lnR>
-                    <a:lnT w="9525" cap="flat" cmpd="sng" algn="ctr">
-                      <a:solidFill>
-                        <a:schemeClr val="tx1"/>
-                      </a:solidFill>
-                      <a:prstDash val="solid"/>
-                      <a:round/>
-                      <a:headEnd type="none" w="med" len="med"/>
-                      <a:tailEnd type="none" w="med" len="med"/>
-                    </a:lnT>
-                    <a:lnB w="9525" cap="flat" cmpd="sng" algn="ctr">
-                      <a:solidFill>
-                        <a:schemeClr val="tx1"/>
-                      </a:solidFill>
-                      <a:prstDash val="solid"/>
-                      <a:round/>
-                      <a:headEnd type="none" w="med" len="med"/>
-                      <a:tailEnd type="none" w="med" len="med"/>
-                    </a:lnB>
-                    <a:noFill/>
-                  </a:tcPr>
-                </a:tc>
-                <a:tc>
-                  <a:txBody>
-                    <a:bodyPr/>
-                    <a:lstStyle/>
-                    <a:p>
-                      <a:pPr marL="0" algn="l" defTabSz="914400" rtl="0" eaLnBrk="1" latinLnBrk="0" hangingPunct="1">
-                        <a:lnSpc>
-                          <a:spcPct val="150000"/>
-                        </a:lnSpc>
-                        <a:spcBef>
-                          <a:spcPts val="1200"/>
-                        </a:spcBef>
-                      </a:pPr>
-                      <a:r>
-                        <a:rPr lang="ru-RU" sz="1100" kern="1200" dirty="0">
-                          <a:solidFill>
-                            <a:schemeClr val="tx1"/>
-                          </a:solidFill>
-                          <a:effectLst/>
-                          <a:latin typeface="Calibri" panose="020F0502020204030204" pitchFamily="34" charset="0"/>
-                          <a:ea typeface="+mn-ea"/>
-                          <a:cs typeface="Times New Roman" panose="02020603050405020304" pitchFamily="18" charset="0"/>
-                        </a:rPr>
-                        <a:t>-0.20</a:t>
-                      </a:r>
-                      <a:endParaRPr lang="ru-RU" sz="1100" kern="1200" dirty="0">
-                        <a:solidFill>
-                          <a:schemeClr val="tx1"/>
-                        </a:solidFill>
-                        <a:effectLst/>
-                        <a:latin typeface="Calibri" panose="020F0502020204030204" pitchFamily="34" charset="0"/>
-                        <a:ea typeface="Calibri" panose="020F0502020204030204" pitchFamily="34" charset="0"/>
-                        <a:cs typeface="Times New Roman" panose="02020603050405020304" pitchFamily="18" charset="0"/>
-                      </a:endParaRPr>
-                    </a:p>
-                  </a:txBody>
-                  <a:tcPr marL="68580" marR="68580" marT="0" marB="0">
-                    <a:lnL w="9525" cap="flat" cmpd="sng" algn="ctr">
-                      <a:solidFill>
-                        <a:schemeClr val="tx1"/>
-                      </a:solidFill>
-                      <a:prstDash val="solid"/>
-                      <a:round/>
-                      <a:headEnd type="none" w="med" len="med"/>
-                      <a:tailEnd type="none" w="med" len="med"/>
-                    </a:lnL>
-                    <a:lnR w="9525" cap="flat" cmpd="sng" algn="ctr">
-                      <a:solidFill>
-                        <a:schemeClr val="tx1"/>
-                      </a:solidFill>
-                      <a:prstDash val="solid"/>
-                      <a:round/>
-                      <a:headEnd type="none" w="med" len="med"/>
-                      <a:tailEnd type="none" w="med" len="med"/>
-                    </a:lnR>
-                    <a:lnT w="9525" cap="flat" cmpd="sng" algn="ctr">
-                      <a:solidFill>
-                        <a:schemeClr val="tx1"/>
-                      </a:solidFill>
-                      <a:prstDash val="solid"/>
-                      <a:round/>
-                      <a:headEnd type="none" w="med" len="med"/>
-                      <a:tailEnd type="none" w="med" len="med"/>
-                    </a:lnT>
-                    <a:lnB w="9525" cap="flat" cmpd="sng" algn="ctr">
-                      <a:solidFill>
-                        <a:schemeClr val="tx1"/>
-                      </a:solidFill>
-                      <a:prstDash val="solid"/>
-                      <a:round/>
-                      <a:headEnd type="none" w="med" len="med"/>
-                      <a:tailEnd type="none" w="med" len="med"/>
-                    </a:lnB>
-                    <a:noFill/>
-                  </a:tcPr>
-                </a:tc>
-                <a:tc>
-                  <a:txBody>
-                    <a:bodyPr/>
-                    <a:lstStyle/>
-                    <a:p>
-                      <a:pPr marL="0" algn="l" defTabSz="914400" rtl="0" eaLnBrk="1" latinLnBrk="0" hangingPunct="1">
-                        <a:lnSpc>
-                          <a:spcPct val="150000"/>
-                        </a:lnSpc>
-                        <a:spcBef>
-                          <a:spcPts val="1200"/>
-                        </a:spcBef>
-                      </a:pPr>
-                      <a:r>
-                        <a:rPr lang="ru-RU" sz="1100" kern="1200" dirty="0">
-                          <a:solidFill>
-                            <a:schemeClr val="tx1"/>
-                          </a:solidFill>
-                          <a:effectLst/>
-                          <a:latin typeface="Calibri" panose="020F0502020204030204" pitchFamily="34" charset="0"/>
-                          <a:ea typeface="Calibri" panose="020F0502020204030204" pitchFamily="34" charset="0"/>
-                          <a:cs typeface="Times New Roman" panose="02020603050405020304" pitchFamily="18" charset="0"/>
-                        </a:rPr>
-                        <a:t>Значима</a:t>
-                      </a:r>
-                    </a:p>
-                  </a:txBody>
-                  <a:tcPr marL="68580" marR="68580" marT="0" marB="0">
-                    <a:lnL w="9525" cap="flat" cmpd="sng" algn="ctr">
-                      <a:solidFill>
-                        <a:schemeClr val="tx1"/>
-                      </a:solidFill>
-                      <a:prstDash val="solid"/>
-                      <a:round/>
-                      <a:headEnd type="none" w="med" len="med"/>
-                      <a:tailEnd type="none" w="med" len="med"/>
-                    </a:lnL>
-                    <a:lnR w="9525" cap="flat" cmpd="sng" algn="ctr">
-                      <a:solidFill>
-                        <a:schemeClr val="tx1"/>
-                      </a:solidFill>
-                      <a:prstDash val="solid"/>
-                      <a:round/>
-                      <a:headEnd type="none" w="med" len="med"/>
-                      <a:tailEnd type="none" w="med" len="med"/>
-                    </a:lnR>
-                    <a:lnT w="9525" cap="flat" cmpd="sng" algn="ctr">
-                      <a:solidFill>
-                        <a:schemeClr val="tx1"/>
-                      </a:solidFill>
-                      <a:prstDash val="solid"/>
-                      <a:round/>
-                      <a:headEnd type="none" w="med" len="med"/>
-                      <a:tailEnd type="none" w="med" len="med"/>
-                    </a:lnT>
-                    <a:lnB w="9525" cap="flat" cmpd="sng" algn="ctr">
-                      <a:solidFill>
-                        <a:schemeClr val="tx1"/>
-                      </a:solidFill>
-                      <a:prstDash val="solid"/>
-                      <a:round/>
-                      <a:headEnd type="none" w="med" len="med"/>
-                      <a:tailEnd type="none" w="med" len="med"/>
-                    </a:lnB>
-                    <a:noFill/>
-                  </a:tcPr>
-                </a:tc>
-                <a:extLst>
-                  <a:ext uri="{0D108BD9-81ED-4DB2-BD59-A6C34878D82A}">
-                    <a16:rowId xmlns:a16="http://schemas.microsoft.com/office/drawing/2014/main" val="1267310396"/>
-                  </a:ext>
-                </a:extLst>
-              </a:tr>
-            </a:tbl>
-          </a:graphicData>
-        </a:graphic>
-      </p:graphicFrame>
+        </p:nvSpPr>
+        <p:spPr>
+          <a:xfrm>
+            <a:off x="718996" y="2211886"/>
+            <a:ext cx="3003406" cy="3856772"/>
+          </a:xfrm>
+        </p:spPr>
+        <p:txBody>
+          <a:bodyPr>
+            <a:normAutofit/>
+          </a:bodyPr>
+          <a:lstStyle/>
+          <a:p>
+            <a:pPr marL="285750" indent="-285750">
+              <a:buFont typeface="Arial" panose="020B0604020202020204" pitchFamily="34" charset="0"/>
+              <a:buChar char="•"/>
+            </a:pPr>
+            <a:r>
+              <a:rPr lang="ru-RU" sz="1400" dirty="0">
+                <a:solidFill>
+                  <a:schemeClr val="tx1"/>
+                </a:solidFill>
+                <a:effectLst/>
+                <a:latin typeface="Times New Roman" panose="02020603050405020304" pitchFamily="18" charset="0"/>
+                <a:ea typeface="Times New Roman" panose="02020603050405020304" pitchFamily="18" charset="0"/>
+              </a:rPr>
+              <a:t>Во всех трех странах чем выше доверие людям, полиции и парламенту, тем выше средний уровень счастья и наоборот.</a:t>
+            </a:r>
+          </a:p>
+          <a:p>
+            <a:pPr marL="285750" indent="-285750">
+              <a:buFont typeface="Arial" panose="020B0604020202020204" pitchFamily="34" charset="0"/>
+              <a:buChar char="•"/>
+            </a:pPr>
+            <a:r>
+              <a:rPr lang="ru-RU" sz="1400" dirty="0">
+                <a:solidFill>
+                  <a:schemeClr val="tx1"/>
+                </a:solidFill>
+                <a:latin typeface="Times New Roman" panose="02020603050405020304" pitchFamily="18" charset="0"/>
+                <a:ea typeface="Times New Roman" panose="02020603050405020304" pitchFamily="18" charset="0"/>
+              </a:rPr>
+              <a:t>Во всех трех странах чем выше субъективная оценка здоровья, тем выше средний уровень счастья и наоборот</a:t>
+            </a:r>
+            <a:endParaRPr lang="ru-RU" sz="1400" dirty="0">
+              <a:solidFill>
+                <a:schemeClr val="tx1"/>
+              </a:solidFill>
+              <a:effectLst/>
+              <a:latin typeface="Times New Roman" panose="02020603050405020304" pitchFamily="18" charset="0"/>
+              <a:ea typeface="Times New Roman" panose="02020603050405020304" pitchFamily="18" charset="0"/>
+            </a:endParaRPr>
+          </a:p>
+          <a:p>
+            <a:pPr marL="285750" indent="-285750">
+              <a:buFont typeface="Arial" panose="020B0604020202020204" pitchFamily="34" charset="0"/>
+              <a:buChar char="•"/>
+            </a:pPr>
+            <a:endParaRPr lang="ru-RU" sz="1400" dirty="0">
+              <a:solidFill>
+                <a:srgbClr val="1F1F1F"/>
+              </a:solidFill>
+              <a:effectLst/>
+              <a:latin typeface="Times New Roman" panose="02020603050405020304" pitchFamily="18" charset="0"/>
+              <a:ea typeface="Times New Roman" panose="02020603050405020304" pitchFamily="18" charset="0"/>
+            </a:endParaRPr>
+          </a:p>
+          <a:p>
+            <a:pPr marL="285750" indent="-285750">
+              <a:buFont typeface="Arial" panose="020B0604020202020204" pitchFamily="34" charset="0"/>
+              <a:buChar char="•"/>
+            </a:pPr>
+            <a:endParaRPr lang="ru-RU" dirty="0">
+              <a:solidFill>
+                <a:schemeClr val="tx1"/>
+              </a:solidFill>
+            </a:endParaRPr>
+          </a:p>
+          <a:p>
+            <a:endParaRPr lang="en-US" dirty="0">
+              <a:solidFill>
+                <a:schemeClr val="tx1"/>
+              </a:solidFill>
+            </a:endParaRPr>
+          </a:p>
+          <a:p>
+            <a:endParaRPr lang="ru-RU" dirty="0">
+              <a:solidFill>
+                <a:schemeClr val="tx1"/>
+              </a:solidFill>
+            </a:endParaRPr>
+          </a:p>
+        </p:txBody>
+      </p:sp>
     </p:spTree>
     <p:extLst>
       <p:ext uri="{BB962C8B-B14F-4D97-AF65-F5344CB8AC3E}">
-        <p14:creationId xmlns:p14="http://schemas.microsoft.com/office/powerpoint/2010/main" val="843577549"/>
+        <p14:creationId xmlns:p14="http://schemas.microsoft.com/office/powerpoint/2010/main" val="485077620"/>
       </p:ext>
     </p:extLst>
   </p:cSld>
@@ -44986,7 +46018,7 @@
           <p:cNvPr id="2" name="Текст 1">
             <a:extLst>
               <a:ext uri="{FF2B5EF4-FFF2-40B4-BE49-F238E27FC236}">
-                <a16:creationId xmlns:a16="http://schemas.microsoft.com/office/drawing/2014/main" id="{7686AF3F-C863-864E-AFDC-D574F8060B43}"/>
+                <a16:creationId xmlns:a16="http://schemas.microsoft.com/office/drawing/2014/main" id="{DA33D5D5-13C7-8644-8CD8-A04CCCE73695}"/>
               </a:ext>
             </a:extLst>
           </p:cNvPr>
@@ -45037,6 +46069,9 @@
               <a:t>“Аналитика больших данных”</a:t>
             </a:r>
           </a:p>
+          <a:p>
+            <a:endParaRPr lang="ru-RU" dirty="0"/>
+          </a:p>
         </p:txBody>
       </p:sp>
       <p:sp>
@@ -45044,7 +46079,7 @@
           <p:cNvPr id="3" name="Текст 2">
             <a:extLst>
               <a:ext uri="{FF2B5EF4-FFF2-40B4-BE49-F238E27FC236}">
-                <a16:creationId xmlns:a16="http://schemas.microsoft.com/office/drawing/2014/main" id="{D3A1EC68-7619-8F49-AEC3-176ECF1F6A21}"/>
+                <a16:creationId xmlns:a16="http://schemas.microsoft.com/office/drawing/2014/main" id="{B68095CB-94DB-754D-A4ED-35EBDDB3F749}"/>
               </a:ext>
             </a:extLst>
           </p:cNvPr>
@@ -45070,17 +46105,14 @@
               <a:t>Взаимосвязь социально-экономических факторов и восприятия счастья в странах с разными моделями общественного устройства</a:t>
             </a:r>
           </a:p>
-          <a:p>
-            <a:endParaRPr lang="ru-RU" dirty="0"/>
-          </a:p>
         </p:txBody>
       </p:sp>
       <p:sp>
         <p:nvSpPr>
-          <p:cNvPr id="4" name="Текст 3">
+          <p:cNvPr id="8" name="Текст 7">
             <a:extLst>
               <a:ext uri="{FF2B5EF4-FFF2-40B4-BE49-F238E27FC236}">
-                <a16:creationId xmlns:a16="http://schemas.microsoft.com/office/drawing/2014/main" id="{D223B065-0902-0141-A245-63D5DCF436EE}"/>
+                <a16:creationId xmlns:a16="http://schemas.microsoft.com/office/drawing/2014/main" id="{5FE4DD9E-D443-AF4F-A072-F5C4D494A05A}"/>
               </a:ext>
             </a:extLst>
           </p:cNvPr>
@@ -45098,45 +46130,17 @@
           <a:p>
             <a:r>
               <a:rPr lang="ru-RU" dirty="0"/>
-              <a:t>Прогнозирование уровня счастья с использованием методов машинного обучения	</a:t>
+              <a:t>Разведочный анализ и построение корреляционных матриц</a:t>
             </a:r>
           </a:p>
         </p:txBody>
       </p:sp>
       <p:sp>
         <p:nvSpPr>
-          <p:cNvPr id="5" name="Заголовок 4">
+          <p:cNvPr id="13" name="Текст 4">
             <a:extLst>
               <a:ext uri="{FF2B5EF4-FFF2-40B4-BE49-F238E27FC236}">
-                <a16:creationId xmlns:a16="http://schemas.microsoft.com/office/drawing/2014/main" id="{3872CBB7-AE1B-9D40-A298-6BDF023AFBD6}"/>
-              </a:ext>
-            </a:extLst>
-          </p:cNvPr>
-          <p:cNvSpPr>
-            <a:spLocks noGrp="1"/>
-          </p:cNvSpPr>
-          <p:nvPr>
-            <p:ph type="title"/>
-          </p:nvPr>
-        </p:nvSpPr>
-        <p:spPr/>
-        <p:txBody>
-          <a:bodyPr/>
-          <a:lstStyle/>
-          <a:p>
-            <a:r>
-              <a:rPr lang="ru-RU" dirty="0"/>
-              <a:t>Обучение моделей</a:t>
-            </a:r>
-          </a:p>
-        </p:txBody>
-      </p:sp>
-      <p:sp>
-        <p:nvSpPr>
-          <p:cNvPr id="6" name="Текст 5">
-            <a:extLst>
-              <a:ext uri="{FF2B5EF4-FFF2-40B4-BE49-F238E27FC236}">
-                <a16:creationId xmlns:a16="http://schemas.microsoft.com/office/drawing/2014/main" id="{87F297E4-9695-684A-A8A3-54FEC946000F}"/>
+                <a16:creationId xmlns:a16="http://schemas.microsoft.com/office/drawing/2014/main" id="{A0EBA77F-ABB1-471F-9D02-20CAF8FDCA34}"/>
               </a:ext>
             </a:extLst>
           </p:cNvPr>
@@ -45149,240 +46153,167 @@
         </p:nvSpPr>
         <p:spPr>
           <a:xfrm>
-            <a:off x="585899" y="2379663"/>
-            <a:ext cx="11185798" cy="2919450"/>
+            <a:off x="718996" y="1347537"/>
+            <a:ext cx="3003406" cy="4969559"/>
           </a:xfrm>
         </p:spPr>
         <p:txBody>
           <a:bodyPr>
-            <a:normAutofit/>
+            <a:normAutofit fontScale="92500" lnSpcReduction="20000"/>
           </a:bodyPr>
           <a:lstStyle/>
           <a:p>
-            <a:pPr rtl="0">
-              <a:spcBef>
-                <a:spcPts val="0"/>
-              </a:spcBef>
-              <a:spcAft>
-                <a:spcPts val="0"/>
-              </a:spcAft>
+            <a:pPr marL="285750" indent="-285750">
+              <a:buFont typeface="Arial" panose="020B0604020202020204" pitchFamily="34" charset="0"/>
+              <a:buChar char="•"/>
             </a:pPr>
             <a:r>
-              <a:rPr lang="ru-RU" sz="1800" b="0" i="0" u="none" strike="noStrike" dirty="0">
+              <a:rPr lang="ru-RU" sz="1400" dirty="0">
                 <a:solidFill>
-                  <a:srgbClr val="0F2C68"/>
+                  <a:schemeClr val="tx1"/>
                 </a:solidFill>
                 <a:effectLst/>
-                <a:latin typeface="Arial" panose="020B0604020202020204" pitchFamily="34" charset="0"/>
-              </a:rPr>
-              <a:t>Были использованы следующие модели для каждой страны: </a:t>
+                <a:latin typeface="Times New Roman" panose="02020603050405020304" pitchFamily="18" charset="0"/>
+                <a:ea typeface="Times New Roman" panose="02020603050405020304" pitchFamily="18" charset="0"/>
+              </a:rPr>
+              <a:t>Во всех трех странах чем человек более социально активен, тем в среднем счастливее и наоборот</a:t>
             </a:r>
           </a:p>
           <a:p>
-            <a:pPr rtl="0">
-              <a:spcBef>
-                <a:spcPts val="0"/>
-              </a:spcBef>
-              <a:spcAft>
-                <a:spcPts val="0"/>
-              </a:spcAft>
+            <a:pPr marL="285750" indent="-285750">
+              <a:buFont typeface="Arial" panose="020B0604020202020204" pitchFamily="34" charset="0"/>
+              <a:buChar char="•"/>
             </a:pPr>
-            <a:endParaRPr lang="ru-RU" b="0" dirty="0">
+            <a:r>
+              <a:rPr lang="ru-RU" sz="1400" dirty="0">
+                <a:solidFill>
+                  <a:schemeClr val="tx1"/>
+                </a:solidFill>
+                <a:latin typeface="Times New Roman" panose="02020603050405020304" pitchFamily="18" charset="0"/>
+                <a:ea typeface="Times New Roman" panose="02020603050405020304" pitchFamily="18" charset="0"/>
+              </a:rPr>
+              <a:t>Во всех трех странах чем выше субъективная оценка финансов и дециль домохозяйства, тем в среднем человек счастливее, и наоборот</a:t>
+            </a:r>
+            <a:endParaRPr lang="ru-RU" sz="1400" dirty="0">
+              <a:solidFill>
+                <a:srgbClr val="1F1F1F"/>
+              </a:solidFill>
               <a:effectLst/>
+              <a:latin typeface="Times New Roman" panose="02020603050405020304" pitchFamily="18" charset="0"/>
+              <a:ea typeface="Times New Roman" panose="02020603050405020304" pitchFamily="18" charset="0"/>
             </a:endParaRPr>
           </a:p>
           <a:p>
-            <a:pPr rtl="0" fontAlgn="base">
-              <a:spcBef>
-                <a:spcPts val="0"/>
-              </a:spcBef>
-              <a:spcAft>
-                <a:spcPts val="0"/>
-              </a:spcAft>
+            <a:pPr marL="285750" indent="-285750">
+              <a:lnSpc>
+                <a:spcPct val="110000"/>
+              </a:lnSpc>
               <a:buFont typeface="Arial" panose="020B0604020202020204" pitchFamily="34" charset="0"/>
               <a:buChar char="•"/>
             </a:pPr>
             <a:r>
-              <a:rPr lang="ru-RU" sz="1800" b="0" i="0" u="none" strike="noStrike" dirty="0">
+              <a:rPr lang="ru-RU" sz="1400" dirty="0">
                 <a:solidFill>
-                  <a:srgbClr val="0F2C68"/>
+                  <a:schemeClr val="tx1"/>
                 </a:solidFill>
-                <a:effectLst/>
-                <a:latin typeface="Arial" panose="020B0604020202020204" pitchFamily="34" charset="0"/>
-              </a:rPr>
-              <a:t>Модель линейной регрессии</a:t>
-            </a:r>
-            <a:r>
-              <a:rPr lang="en-US" sz="1800" b="0" i="0" u="none" strike="noStrike" dirty="0">
+                <a:latin typeface="Times New Roman" panose="02020603050405020304" pitchFamily="18" charset="0"/>
+              </a:rPr>
+              <a:t>В Великобритании и РФ в среднем более счастливы студенты, в то время как в Швеции – работающие люди. При этом в РФ в среднем менее счастливы люди на пенсии, в Швеции – безработные, а в Великобритании – те, кто занимается иной деятельностью</a:t>
+            </a:r>
+          </a:p>
+          <a:p>
+            <a:pPr marL="285750" indent="-285750">
+              <a:lnSpc>
+                <a:spcPct val="110000"/>
+              </a:lnSpc>
+              <a:buFont typeface="Arial" panose="020B0604020202020204" pitchFamily="34" charset="0"/>
+              <a:buChar char="•"/>
+            </a:pPr>
+            <a:r>
+              <a:rPr lang="ru-RU" sz="1400" dirty="0">
                 <a:solidFill>
-                  <a:srgbClr val="0F2C68"/>
+                  <a:schemeClr val="tx1"/>
                 </a:solidFill>
-                <a:effectLst/>
-                <a:latin typeface="Arial" panose="020B0604020202020204" pitchFamily="34" charset="0"/>
-              </a:rPr>
-              <a:t>;</a:t>
-            </a:r>
-            <a:endParaRPr lang="en-GB" sz="1800" b="0" i="0" u="none" strike="noStrike" dirty="0">
+                <a:latin typeface="Times New Roman" panose="02020603050405020304" pitchFamily="18" charset="0"/>
+              </a:rPr>
+              <a:t>Во всех трех странах в среднем более счастливы люди с высшим образованием</a:t>
+            </a:r>
+          </a:p>
+          <a:p>
+            <a:pPr marL="285750" indent="-285750">
+              <a:lnSpc>
+                <a:spcPct val="110000"/>
+              </a:lnSpc>
+              <a:buFont typeface="Arial" panose="020B0604020202020204" pitchFamily="34" charset="0"/>
+              <a:buChar char="•"/>
+            </a:pPr>
+            <a:r>
+              <a:rPr lang="ru-RU" sz="1400" dirty="0">
+                <a:solidFill>
+                  <a:schemeClr val="tx1"/>
+                </a:solidFill>
+                <a:latin typeface="Times New Roman" panose="02020603050405020304" pitchFamily="18" charset="0"/>
+              </a:rPr>
+              <a:t>Во всех трех странах средний уровень счастья несильно отличается в зависимости от пола, но можно заметить, что в Великобритании и Швеции женщины чуть счастливее в среднем, чем мужчины, а в РФ – наоборот</a:t>
+            </a:r>
+          </a:p>
+          <a:p>
+            <a:endParaRPr lang="en-US" dirty="0">
               <a:solidFill>
-                <a:srgbClr val="0F2C68"/>
+                <a:schemeClr val="tx1"/>
               </a:solidFill>
-              <a:effectLst/>
-              <a:latin typeface="Arial" panose="020B0604020202020204" pitchFamily="34" charset="0"/>
             </a:endParaRPr>
           </a:p>
           <a:p>
-            <a:pPr rtl="0" fontAlgn="base">
-              <a:spcBef>
-                <a:spcPts val="0"/>
-              </a:spcBef>
-              <a:spcAft>
-                <a:spcPts val="0"/>
-              </a:spcAft>
-              <a:buFont typeface="Arial" panose="020B0604020202020204" pitchFamily="34" charset="0"/>
-              <a:buChar char="•"/>
-            </a:pPr>
-            <a:r>
-              <a:rPr lang="ru-RU" sz="1800" b="0" i="0" u="none" strike="noStrike" dirty="0">
-                <a:solidFill>
-                  <a:srgbClr val="0F2C68"/>
-                </a:solidFill>
-                <a:effectLst/>
-                <a:latin typeface="Arial" panose="020B0604020202020204" pitchFamily="34" charset="0"/>
-              </a:rPr>
-              <a:t>модель </a:t>
-            </a:r>
-            <a:r>
-              <a:rPr lang="en-GB" sz="1800" b="0" i="0" u="none" strike="noStrike" dirty="0">
-                <a:solidFill>
-                  <a:srgbClr val="0F2C68"/>
-                </a:solidFill>
-                <a:effectLst/>
-                <a:latin typeface="Arial" panose="020B0604020202020204" pitchFamily="34" charset="0"/>
-              </a:rPr>
-              <a:t>SVM (Support Vector Machine);</a:t>
-            </a:r>
-          </a:p>
-          <a:p>
-            <a:pPr rtl="0" fontAlgn="base">
-              <a:spcBef>
-                <a:spcPts val="0"/>
-              </a:spcBef>
-              <a:spcAft>
-                <a:spcPts val="0"/>
-              </a:spcAft>
-              <a:buFont typeface="Arial" panose="020B0604020202020204" pitchFamily="34" charset="0"/>
-              <a:buChar char="•"/>
-            </a:pPr>
-            <a:r>
-              <a:rPr lang="ru-RU" sz="1800" b="0" i="0" u="none" strike="noStrike" dirty="0">
-                <a:solidFill>
-                  <a:srgbClr val="0F2C68"/>
-                </a:solidFill>
-                <a:effectLst/>
-                <a:latin typeface="Arial" panose="020B0604020202020204" pitchFamily="34" charset="0"/>
-              </a:rPr>
-              <a:t>модель </a:t>
-            </a:r>
-            <a:r>
-              <a:rPr lang="en-GB" sz="1800" b="0" i="0" u="none" strike="noStrike" dirty="0">
-                <a:solidFill>
-                  <a:srgbClr val="0F2C68"/>
-                </a:solidFill>
-                <a:effectLst/>
-                <a:latin typeface="Arial" panose="020B0604020202020204" pitchFamily="34" charset="0"/>
-              </a:rPr>
-              <a:t>Decision Tree;</a:t>
-            </a:r>
-          </a:p>
-          <a:p>
-            <a:pPr rtl="0" fontAlgn="base">
-              <a:spcBef>
-                <a:spcPts val="0"/>
-              </a:spcBef>
-              <a:spcAft>
-                <a:spcPts val="0"/>
-              </a:spcAft>
-              <a:buFont typeface="Arial" panose="020B0604020202020204" pitchFamily="34" charset="0"/>
-              <a:buChar char="•"/>
-            </a:pPr>
-            <a:r>
-              <a:rPr lang="ru-RU" sz="1800" b="0" i="0" u="none" strike="noStrike" dirty="0">
-                <a:solidFill>
-                  <a:srgbClr val="0F2C68"/>
-                </a:solidFill>
-                <a:effectLst/>
-                <a:latin typeface="Arial" panose="020B0604020202020204" pitchFamily="34" charset="0"/>
-              </a:rPr>
-              <a:t>модель </a:t>
-            </a:r>
-            <a:r>
-              <a:rPr lang="en-GB" sz="1800" b="0" i="0" u="none" strike="noStrike" dirty="0">
-                <a:solidFill>
-                  <a:srgbClr val="0F2C68"/>
-                </a:solidFill>
-                <a:effectLst/>
-                <a:latin typeface="Arial" panose="020B0604020202020204" pitchFamily="34" charset="0"/>
-              </a:rPr>
-              <a:t>Random Forest;</a:t>
-            </a:r>
-          </a:p>
-          <a:p>
-            <a:pPr rtl="0" fontAlgn="base">
-              <a:spcBef>
-                <a:spcPts val="0"/>
-              </a:spcBef>
-              <a:spcAft>
-                <a:spcPts val="0"/>
-              </a:spcAft>
-              <a:buFont typeface="Arial" panose="020B0604020202020204" pitchFamily="34" charset="0"/>
-              <a:buChar char="•"/>
-            </a:pPr>
-            <a:r>
-              <a:rPr lang="ru-RU" sz="1800" b="0" i="0" u="none" strike="noStrike" dirty="0">
-                <a:solidFill>
-                  <a:srgbClr val="0F2C68"/>
-                </a:solidFill>
-                <a:effectLst/>
-                <a:latin typeface="Arial" panose="020B0604020202020204" pitchFamily="34" charset="0"/>
-              </a:rPr>
-              <a:t>модель </a:t>
-            </a:r>
-            <a:r>
-              <a:rPr lang="en-GB" sz="1800" b="0" i="0" u="none" strike="noStrike" dirty="0" err="1">
-                <a:solidFill>
-                  <a:srgbClr val="0F2C68"/>
-                </a:solidFill>
-                <a:effectLst/>
-                <a:latin typeface="Arial" panose="020B0604020202020204" pitchFamily="34" charset="0"/>
-              </a:rPr>
-              <a:t>CatBoost</a:t>
-            </a:r>
-            <a:r>
-              <a:rPr lang="en-GB" sz="1800" dirty="0">
-                <a:solidFill>
-                  <a:srgbClr val="0F2C68"/>
-                </a:solidFill>
-                <a:latin typeface="Arial" panose="020B0604020202020204" pitchFamily="34" charset="0"/>
-              </a:rPr>
-              <a:t>;</a:t>
-            </a:r>
-            <a:endParaRPr lang="en-GB" sz="1800" b="0" i="0" u="none" strike="noStrike" dirty="0">
+            <a:endParaRPr lang="ru-RU" dirty="0">
               <a:solidFill>
-                <a:srgbClr val="0F2C68"/>
+                <a:schemeClr val="tx1"/>
               </a:solidFill>
-              <a:effectLst/>
-              <a:latin typeface="Arial" panose="020B0604020202020204" pitchFamily="34" charset="0"/>
             </a:endParaRPr>
-          </a:p>
-          <a:p>
-            <a:endParaRPr lang="ru-RU" dirty="0"/>
           </a:p>
         </p:txBody>
       </p:sp>
+      <p:pic>
+        <p:nvPicPr>
+          <p:cNvPr id="7" name="Рисунок 6">
+            <a:extLst>
+              <a:ext uri="{FF2B5EF4-FFF2-40B4-BE49-F238E27FC236}">
+                <a16:creationId xmlns:a16="http://schemas.microsoft.com/office/drawing/2014/main" id="{47010B51-ABBD-4C94-A2B8-AF4E8BAEC638}"/>
+              </a:ext>
+            </a:extLst>
+          </p:cNvPr>
+          <p:cNvPicPr/>
+          <p:nvPr/>
+        </p:nvPicPr>
+        <p:blipFill rotWithShape="1">
+          <a:blip r:embed="rId3" cstate="print">
+            <a:extLst>
+              <a:ext uri="{28A0092B-C50C-407E-A947-70E740481C1C}">
+                <a14:useLocalDpi xmlns:a14="http://schemas.microsoft.com/office/drawing/2010/main" val="0"/>
+              </a:ext>
+            </a:extLst>
+          </a:blip>
+          <a:srcRect t="39624"/>
+          <a:stretch/>
+        </p:blipFill>
+        <p:spPr bwMode="auto">
+          <a:xfrm>
+            <a:off x="5487926" y="1347537"/>
+            <a:ext cx="5963348" cy="5236144"/>
+          </a:xfrm>
+          <a:prstGeom prst="rect">
+            <a:avLst/>
+          </a:prstGeom>
+          <a:noFill/>
+          <a:ln>
+            <a:noFill/>
+          </a:ln>
+        </p:spPr>
+      </p:pic>
     </p:spTree>
     <p:extLst>
       <p:ext uri="{BB962C8B-B14F-4D97-AF65-F5344CB8AC3E}">
-        <p14:creationId xmlns:p14="http://schemas.microsoft.com/office/powerpoint/2010/main" val="3581150455"/>
+        <p14:creationId xmlns:p14="http://schemas.microsoft.com/office/powerpoint/2010/main" val="3691453931"/>
       </p:ext>
     </p:extLst>
   </p:cSld>
@@ -45999,6 +46930,15 @@
 </file>
 
 <file path=customXml/item1.xml><?xml version="1.0" encoding="utf-8"?>
+<?mso-contentType ?>
+<FormTemplates xmlns="http://schemas.microsoft.com/sharepoint/v3/contenttype/forms">
+  <Display>DocumentLibraryForm</Display>
+  <Edit>DocumentLibraryForm</Edit>
+  <New>DocumentLibraryForm</New>
+</FormTemplates>
+</file>
+
+<file path=customXml/item2.xml><?xml version="1.0" encoding="utf-8"?>
 <ct:contentTypeSchema xmlns:ct="http://schemas.microsoft.com/office/2006/metadata/contentType" xmlns:ma="http://schemas.microsoft.com/office/2006/metadata/properties/metaAttributes" ct:_="" ma:_="" ma:contentTypeName="Документ" ma:contentTypeID="0x0101002A9C74E6E830D74E9B0FDDB4017A5417" ma:contentTypeVersion="13" ma:contentTypeDescription="Создание документа." ma:contentTypeScope="" ma:versionID="d4e423622451d608a8a05f4da7a1e1a2">
   <xsd:schema xmlns:xsd="http://www.w3.org/2001/XMLSchema" xmlns:xs="http://www.w3.org/2001/XMLSchema" xmlns:p="http://schemas.microsoft.com/office/2006/metadata/properties" xmlns:ns2="9875bd71-cde8-496c-a136-433f55d5e6d0" xmlns:ns3="e96afe77-3acb-4328-97fc-408e1bde3ecd" targetNamespace="http://schemas.microsoft.com/office/2006/metadata/properties" ma:root="true" ma:fieldsID="4831203c63c08b9f52ea6d3ee0d7a96e" ns2:_="" ns3:_="">
     <xsd:import namespace="9875bd71-cde8-496c-a136-433f55d5e6d0"/>
@@ -46221,15 +47161,6 @@
 </ct:contentTypeSchema>
 </file>
 
-<file path=customXml/item2.xml><?xml version="1.0" encoding="utf-8"?>
-<?mso-contentType ?>
-<FormTemplates xmlns="http://schemas.microsoft.com/sharepoint/v3/contenttype/forms">
-  <Display>DocumentLibraryForm</Display>
-  <Edit>DocumentLibraryForm</Edit>
-  <New>DocumentLibraryForm</New>
-</FormTemplates>
-</file>
-
 <file path=customXml/item3.xml><?xml version="1.0" encoding="utf-8"?>
 <p:properties xmlns:p="http://schemas.microsoft.com/office/2006/metadata/properties" xmlns:xsi="http://www.w3.org/2001/XMLSchema-instance" xmlns:pc="http://schemas.microsoft.com/office/infopath/2007/PartnerControls">
   <documentManagement/>
@@ -46237,6 +47168,14 @@
 </file>
 
 <file path=customXml/itemProps1.xml><?xml version="1.0" encoding="utf-8"?>
+<ds:datastoreItem xmlns:ds="http://schemas.openxmlformats.org/officeDocument/2006/customXml" ds:itemID="{B34386AA-1848-4C75-B336-1053927CB025}">
+  <ds:schemaRefs>
+    <ds:schemaRef ds:uri="http://schemas.microsoft.com/sharepoint/v3/contenttype/forms"/>
+  </ds:schemaRefs>
+</ds:datastoreItem>
+</file>
+
+<file path=customXml/itemProps2.xml><?xml version="1.0" encoding="utf-8"?>
 <ds:datastoreItem xmlns:ds="http://schemas.openxmlformats.org/officeDocument/2006/customXml" ds:itemID="{4D4651DD-DCCC-4759-B2F6-7F520BDCC2B9}">
   <ds:schemaRefs>
     <ds:schemaRef ds:uri="http://schemas.microsoft.com/office/2006/metadata/contentType"/>
@@ -46251,14 +47190,6 @@
     <ds:schemaRef ds:uri="http://purl.org/dc/elements/1.1/"/>
     <ds:schemaRef ds:uri="http://purl.org/dc/terms/"/>
     <ds:schemaRef ds:uri="http://schemas.microsoft.com/internal/obd"/>
-  </ds:schemaRefs>
-</ds:datastoreItem>
-</file>
-
-<file path=customXml/itemProps2.xml><?xml version="1.0" encoding="utf-8"?>
-<ds:datastoreItem xmlns:ds="http://schemas.openxmlformats.org/officeDocument/2006/customXml" ds:itemID="{B34386AA-1848-4C75-B336-1053927CB025}">
-  <ds:schemaRefs>
-    <ds:schemaRef ds:uri="http://schemas.microsoft.com/sharepoint/v3/contenttype/forms"/>
   </ds:schemaRefs>
 </ds:datastoreItem>
 </file>
